--- a/AV_Aldo_Martinez_004D_BackToMe/Fase 2/Evidencias Proyecto/Presentación Proyecto.pptx
+++ b/AV_Aldo_Martinez_004D_BackToMe/Fase 2/Evidencias Proyecto/Presentación Proyecto.pptx
@@ -2,40 +2,40 @@
 <file path=ppt/presentation.xml><?xml version="1.0" encoding="utf-8"?>
 <p:presentation xmlns:a="http://schemas.openxmlformats.org/drawingml/2006/main" xmlns:r="http://schemas.openxmlformats.org/officeDocument/2006/relationships" xmlns:mc="http://schemas.openxmlformats.org/markup-compatibility/2006" xmlns:mv="urn:schemas-microsoft-com:mac:vml" xmlns:p="http://schemas.openxmlformats.org/presentationml/2006/main" xmlns:c="http://schemas.openxmlformats.org/drawingml/2006/chart" xmlns:dgm="http://schemas.openxmlformats.org/drawingml/2006/diagram" xmlns:o="urn:schemas-microsoft-com:office:office" xmlns:v="urn:schemas-microsoft-com:vml" xmlns:pvml="urn:schemas-microsoft-com:office:powerpoint" xmlns:com="http://schemas.openxmlformats.org/drawingml/2006/compatibility" xmlns:p14="http://schemas.microsoft.com/office/powerpoint/2010/main" xmlns:p15="http://schemas.microsoft.com/office/powerpoint/2012/main" xmlns:ahyp="http://schemas.microsoft.com/office/drawing/2018/hyperlinkcolor" autoCompressPictures="0" embedTrueTypeFonts="1" strictFirstAndLastChars="0" saveSubsetFonts="1">
   <p:sldMasterIdLst>
-    <p:sldMasterId id="2147483648" r:id="rId3"/>
+    <p:sldMasterId id="2147483648" r:id="rId4"/>
   </p:sldMasterIdLst>
   <p:notesMasterIdLst>
-    <p:notesMasterId r:id="rId4"/>
+    <p:notesMasterId r:id="rId5"/>
   </p:notesMasterIdLst>
   <p:sldIdLst>
-    <p:sldId id="256" r:id="rId5"/>
-    <p:sldId id="257" r:id="rId6"/>
-    <p:sldId id="258" r:id="rId7"/>
-    <p:sldId id="259" r:id="rId8"/>
-    <p:sldId id="260" r:id="rId9"/>
-    <p:sldId id="261" r:id="rId10"/>
-    <p:sldId id="262" r:id="rId11"/>
-    <p:sldId id="263" r:id="rId12"/>
-    <p:sldId id="264" r:id="rId13"/>
-    <p:sldId id="265" r:id="rId14"/>
-    <p:sldId id="266" r:id="rId15"/>
-    <p:sldId id="267" r:id="rId16"/>
-    <p:sldId id="268" r:id="rId17"/>
+    <p:sldId id="256" r:id="rId6"/>
+    <p:sldId id="257" r:id="rId7"/>
+    <p:sldId id="258" r:id="rId8"/>
+    <p:sldId id="259" r:id="rId9"/>
+    <p:sldId id="260" r:id="rId10"/>
+    <p:sldId id="261" r:id="rId11"/>
+    <p:sldId id="262" r:id="rId12"/>
+    <p:sldId id="263" r:id="rId13"/>
+    <p:sldId id="264" r:id="rId14"/>
+    <p:sldId id="265" r:id="rId15"/>
+    <p:sldId id="266" r:id="rId16"/>
+    <p:sldId id="267" r:id="rId17"/>
+    <p:sldId id="268" r:id="rId18"/>
   </p:sldIdLst>
   <p:sldSz cy="6858000" cx="12192000"/>
   <p:notesSz cx="6858000" cy="12192000"/>
   <p:embeddedFontLst>
     <p:embeddedFont>
       <p:font typeface="IBM Plex Sans"/>
-      <p:regular r:id="rId18"/>
-      <p:bold r:id="rId19"/>
-      <p:italic r:id="rId20"/>
-      <p:boldItalic r:id="rId21"/>
+      <p:regular r:id="rId19"/>
+      <p:bold r:id="rId20"/>
+      <p:italic r:id="rId21"/>
+      <p:boldItalic r:id="rId22"/>
     </p:embeddedFont>
     <p:embeddedFont>
       <p:font typeface="Space Grotesk"/>
-      <p:regular r:id="rId22"/>
-      <p:bold r:id="rId23"/>
+      <p:regular r:id="rId23"/>
+      <p:bold r:id="rId24"/>
     </p:embeddedFont>
   </p:embeddedFontLst>
   <p:defaultTextStyle>
@@ -269,7 +269,7 @@
   </p:defaultTextStyle>
   <p:extLst>
     <p:ext uri="GoogleSlidesCustomDataVersion2">
-      <go:slidesCustomData xmlns:go="http://customooxmlschemas.google.com/" r:id="rId24" roundtripDataSignature="AMtx7mj9JYQl7swkH06c7Cey76B2wvy4Fg=="/>
+      <go:slidesCustomData xmlns:go="http://customooxmlschemas.google.com/" r:id="rId25" roundtripDataSignature="AMtx7mgRZRyanYBdOQXyxs0z/8il9mD3YA=="/>
     </p:ext>
   </p:extLst>
 </p:presentation>
@@ -1605,7 +1605,7 @@
   <p:cSld>
     <p:spTree>
       <p:nvGrpSpPr>
-        <p:cNvPr id="125" name="Shape 125"/>
+        <p:cNvPr id="122" name="Shape 122"/>
         <p:cNvGrpSpPr/>
         <p:nvPr/>
       </p:nvGrpSpPr>
@@ -1619,7 +1619,7 @@
       </p:grpSpPr>
       <p:sp>
         <p:nvSpPr>
-          <p:cNvPr id="126" name="Google Shape;126;h53718624b428c802_0_39:notes"/>
+          <p:cNvPr id="123" name="Google Shape;123;h53718624b428c802_0_39:notes"/>
           <p:cNvSpPr/>
           <p:nvPr>
             <p:ph idx="2" type="sldImg"/>
@@ -1664,7 +1664,7 @@
       </p:sp>
       <p:sp>
         <p:nvSpPr>
-          <p:cNvPr id="127" name="Google Shape;127;h53718624b428c802_0_39:notes"/>
+          <p:cNvPr id="124" name="Google Shape;124;h53718624b428c802_0_39:notes"/>
           <p:cNvSpPr txBox="1"/>
           <p:nvPr>
             <p:ph idx="1" type="body"/>
@@ -1707,7 +1707,7 @@
       </p:sp>
       <p:sp>
         <p:nvSpPr>
-          <p:cNvPr id="128" name="Google Shape;128;h53718624b428c802_0_39:notes"/>
+          <p:cNvPr id="125" name="Google Shape;125;h53718624b428c802_0_39:notes"/>
           <p:cNvSpPr txBox="1"/>
           <p:nvPr>
             <p:ph idx="12" type="sldNum"/>
@@ -1762,7 +1762,7 @@
   <p:cSld>
     <p:spTree>
       <p:nvGrpSpPr>
-        <p:cNvPr id="132" name="Shape 132"/>
+        <p:cNvPr id="129" name="Shape 129"/>
         <p:cNvGrpSpPr/>
         <p:nvPr/>
       </p:nvGrpSpPr>
@@ -1776,7 +1776,7 @@
       </p:grpSpPr>
       <p:sp>
         <p:nvSpPr>
-          <p:cNvPr id="133" name="Google Shape;133;h53718624b428c802_0_0:notes"/>
+          <p:cNvPr id="130" name="Google Shape;130;h53718624b428c802_0_0:notes"/>
           <p:cNvSpPr/>
           <p:nvPr>
             <p:ph idx="2" type="sldImg"/>
@@ -1821,7 +1821,7 @@
       </p:sp>
       <p:sp>
         <p:nvSpPr>
-          <p:cNvPr id="134" name="Google Shape;134;h53718624b428c802_0_0:notes"/>
+          <p:cNvPr id="131" name="Google Shape;131;h53718624b428c802_0_0:notes"/>
           <p:cNvSpPr txBox="1"/>
           <p:nvPr>
             <p:ph idx="1" type="body"/>
@@ -1864,7 +1864,7 @@
       </p:sp>
       <p:sp>
         <p:nvSpPr>
-          <p:cNvPr id="135" name="Google Shape;135;h53718624b428c802_0_0:notes"/>
+          <p:cNvPr id="132" name="Google Shape;132;h53718624b428c802_0_0:notes"/>
           <p:cNvSpPr txBox="1"/>
           <p:nvPr>
             <p:ph idx="12" type="sldNum"/>
@@ -1919,7 +1919,7 @@
   <p:cSld>
     <p:spTree>
       <p:nvGrpSpPr>
-        <p:cNvPr id="142" name="Shape 142"/>
+        <p:cNvPr id="139" name="Shape 139"/>
         <p:cNvGrpSpPr/>
         <p:nvPr/>
       </p:nvGrpSpPr>
@@ -1933,7 +1933,7 @@
       </p:grpSpPr>
       <p:sp>
         <p:nvSpPr>
-          <p:cNvPr id="143" name="Google Shape;143;h53718624b428c802_0_10:notes"/>
+          <p:cNvPr id="140" name="Google Shape;140;h53718624b428c802_0_10:notes"/>
           <p:cNvSpPr/>
           <p:nvPr>
             <p:ph idx="2" type="sldImg"/>
@@ -1978,7 +1978,7 @@
       </p:sp>
       <p:sp>
         <p:nvSpPr>
-          <p:cNvPr id="144" name="Google Shape;144;h53718624b428c802_0_10:notes"/>
+          <p:cNvPr id="141" name="Google Shape;141;h53718624b428c802_0_10:notes"/>
           <p:cNvSpPr txBox="1"/>
           <p:nvPr>
             <p:ph idx="1" type="body"/>
@@ -2021,7 +2021,7 @@
       </p:sp>
       <p:sp>
         <p:nvSpPr>
-          <p:cNvPr id="145" name="Google Shape;145;h53718624b428c802_0_10:notes"/>
+          <p:cNvPr id="142" name="Google Shape;142;h53718624b428c802_0_10:notes"/>
           <p:cNvSpPr txBox="1"/>
           <p:nvPr>
             <p:ph idx="12" type="sldNum"/>
@@ -2076,7 +2076,7 @@
   <p:cSld>
     <p:spTree>
       <p:nvGrpSpPr>
-        <p:cNvPr id="152" name="Shape 152"/>
+        <p:cNvPr id="149" name="Shape 149"/>
         <p:cNvGrpSpPr/>
         <p:nvPr/>
       </p:nvGrpSpPr>
@@ -2090,7 +2090,7 @@
       </p:grpSpPr>
       <p:sp>
         <p:nvSpPr>
-          <p:cNvPr id="153" name="Google Shape;153;p11:notes"/>
+          <p:cNvPr id="150" name="Google Shape;150;p11:notes"/>
           <p:cNvSpPr/>
           <p:nvPr>
             <p:ph idx="2" type="sldImg"/>
@@ -2135,7 +2135,7 @@
       </p:sp>
       <p:sp>
         <p:nvSpPr>
-          <p:cNvPr id="154" name="Google Shape;154;p11:notes"/>
+          <p:cNvPr id="151" name="Google Shape;151;p11:notes"/>
           <p:cNvSpPr txBox="1"/>
           <p:nvPr>
             <p:ph idx="1" type="body"/>
@@ -2179,7 +2179,7 @@
       </p:sp>
       <p:sp>
         <p:nvSpPr>
-          <p:cNvPr id="155" name="Google Shape;155;p11:notes"/>
+          <p:cNvPr id="152" name="Google Shape;152;p11:notes"/>
           <p:cNvSpPr txBox="1"/>
           <p:nvPr>
             <p:ph idx="12" type="sldNum"/>
@@ -5484,7 +5484,7 @@
     </p:bg>
     <p:spTree>
       <p:nvGrpSpPr>
-        <p:cNvPr id="129" name="Shape 129"/>
+        <p:cNvPr id="126" name="Shape 126"/>
         <p:cNvGrpSpPr/>
         <p:nvPr/>
       </p:nvGrpSpPr>
@@ -5498,7 +5498,7 @@
       </p:grpSpPr>
       <p:sp>
         <p:nvSpPr>
-          <p:cNvPr id="130" name="Google Shape;130;h53718624b428c802_0_39"/>
+          <p:cNvPr id="127" name="Google Shape;127;h53718624b428c802_0_39"/>
           <p:cNvSpPr txBox="1"/>
           <p:nvPr>
             <p:ph type="title"/>
@@ -5550,7 +5550,7 @@
       </p:sp>
       <p:pic>
         <p:nvPicPr>
-          <p:cNvPr id="131" name="Google Shape;131;h53718624b428c802_0_39" title="Mapa Tecnológico (1).png"/>
+          <p:cNvPr id="128" name="Google Shape;128;h53718624b428c802_0_39" title="Mapa Tecnológico (1).png"/>
           <p:cNvPicPr preferRelativeResize="0"/>
           <p:nvPr/>
         </p:nvPicPr>
@@ -5596,7 +5596,7 @@
     </p:bg>
     <p:spTree>
       <p:nvGrpSpPr>
-        <p:cNvPr id="136" name="Shape 136"/>
+        <p:cNvPr id="133" name="Shape 133"/>
         <p:cNvGrpSpPr/>
         <p:nvPr/>
       </p:nvGrpSpPr>
@@ -5610,7 +5610,7 @@
       </p:grpSpPr>
       <p:sp>
         <p:nvSpPr>
-          <p:cNvPr id="137" name="Google Shape;137;h53718624b428c802_0_0"/>
+          <p:cNvPr id="134" name="Google Shape;134;h53718624b428c802_0_0"/>
           <p:cNvSpPr txBox="1"/>
           <p:nvPr>
             <p:ph type="title"/>
@@ -5662,7 +5662,7 @@
       </p:sp>
       <p:pic>
         <p:nvPicPr>
-          <p:cNvPr descr="Database" id="138" name="Google Shape;138;h53718624b428c802_0_0"/>
+          <p:cNvPr descr="Database" id="135" name="Google Shape;135;h53718624b428c802_0_0"/>
           <p:cNvPicPr preferRelativeResize="0"/>
           <p:nvPr/>
         </p:nvPicPr>
@@ -5689,7 +5689,7 @@
       </p:pic>
       <p:sp>
         <p:nvSpPr>
-          <p:cNvPr id="139" name="Google Shape;139;h53718624b428c802_0_0"/>
+          <p:cNvPr id="136" name="Google Shape;136;h53718624b428c802_0_0"/>
           <p:cNvSpPr/>
           <p:nvPr/>
         </p:nvSpPr>
@@ -5755,7 +5755,7 @@
       </p:sp>
       <p:sp>
         <p:nvSpPr>
-          <p:cNvPr id="140" name="Google Shape;140;h53718624b428c802_0_0"/>
+          <p:cNvPr id="137" name="Google Shape;137;h53718624b428c802_0_0"/>
           <p:cNvSpPr/>
           <p:nvPr/>
         </p:nvSpPr>
@@ -5821,7 +5821,7 @@
       </p:sp>
       <p:pic>
         <p:nvPicPr>
-          <p:cNvPr id="141" name="Google Shape;141;h53718624b428c802_0_0" title="Flujo BackToMe.drawio.png"/>
+          <p:cNvPr id="138" name="Google Shape;138;h53718624b428c802_0_0" title="Flujo BackToMe.drawio.png"/>
           <p:cNvPicPr preferRelativeResize="0"/>
           <p:nvPr/>
         </p:nvPicPr>
@@ -5866,7 +5866,7 @@
     </p:bg>
     <p:spTree>
       <p:nvGrpSpPr>
-        <p:cNvPr id="146" name="Shape 146"/>
+        <p:cNvPr id="143" name="Shape 143"/>
         <p:cNvGrpSpPr/>
         <p:nvPr/>
       </p:nvGrpSpPr>
@@ -5880,7 +5880,7 @@
       </p:grpSpPr>
       <p:sp>
         <p:nvSpPr>
-          <p:cNvPr id="147" name="Google Shape;147;h53718624b428c802_0_10"/>
+          <p:cNvPr id="144" name="Google Shape;144;h53718624b428c802_0_10"/>
           <p:cNvSpPr txBox="1"/>
           <p:nvPr>
             <p:ph type="title"/>
@@ -5932,7 +5932,7 @@
       </p:sp>
       <p:pic>
         <p:nvPicPr>
-          <p:cNvPr descr="Database" id="148" name="Google Shape;148;h53718624b428c802_0_10"/>
+          <p:cNvPr descr="Database" id="145" name="Google Shape;145;h53718624b428c802_0_10"/>
           <p:cNvPicPr preferRelativeResize="0"/>
           <p:nvPr/>
         </p:nvPicPr>
@@ -5959,7 +5959,7 @@
       </p:pic>
       <p:sp>
         <p:nvSpPr>
-          <p:cNvPr id="149" name="Google Shape;149;h53718624b428c802_0_10"/>
+          <p:cNvPr id="146" name="Google Shape;146;h53718624b428c802_0_10"/>
           <p:cNvSpPr/>
           <p:nvPr/>
         </p:nvSpPr>
@@ -6025,7 +6025,7 @@
       </p:sp>
       <p:sp>
         <p:nvSpPr>
-          <p:cNvPr id="150" name="Google Shape;150;h53718624b428c802_0_10"/>
+          <p:cNvPr id="147" name="Google Shape;147;h53718624b428c802_0_10"/>
           <p:cNvSpPr/>
           <p:nvPr/>
         </p:nvSpPr>
@@ -6091,7 +6091,7 @@
       </p:sp>
       <p:pic>
         <p:nvPicPr>
-          <p:cNvPr id="151" name="Google Shape;151;h53718624b428c802_0_10" title="Flujo BackToMe.drawio.png"/>
+          <p:cNvPr id="148" name="Google Shape;148;h53718624b428c802_0_10" title="Flujo BackToMe.drawio.png"/>
           <p:cNvPicPr preferRelativeResize="0"/>
           <p:nvPr/>
         </p:nvPicPr>
@@ -6136,7 +6136,7 @@
     </p:bg>
     <p:spTree>
       <p:nvGrpSpPr>
-        <p:cNvPr id="156" name="Shape 156"/>
+        <p:cNvPr id="153" name="Shape 153"/>
         <p:cNvGrpSpPr/>
         <p:nvPr/>
       </p:nvGrpSpPr>
@@ -6150,7 +6150,7 @@
       </p:grpSpPr>
       <p:sp>
         <p:nvSpPr>
-          <p:cNvPr id="157" name="Google Shape;157;p11"/>
+          <p:cNvPr id="154" name="Google Shape;154;p11"/>
           <p:cNvSpPr/>
           <p:nvPr/>
         </p:nvSpPr>
@@ -6193,7 +6193,7 @@
       </p:sp>
       <p:sp>
         <p:nvSpPr>
-          <p:cNvPr id="158" name="Google Shape;158;p11"/>
+          <p:cNvPr id="155" name="Google Shape;155;p11"/>
           <p:cNvSpPr/>
           <p:nvPr/>
         </p:nvSpPr>
@@ -6259,7 +6259,7 @@
       </p:sp>
       <p:sp>
         <p:nvSpPr>
-          <p:cNvPr id="159" name="Google Shape;159;p11"/>
+          <p:cNvPr id="156" name="Google Shape;156;p11"/>
           <p:cNvSpPr txBox="1"/>
           <p:nvPr>
             <p:ph type="title"/>
@@ -9467,8 +9467,8 @@
         </p:nvSpPr>
         <p:spPr>
           <a:xfrm>
-            <a:off x="812800" y="1127720"/>
-            <a:ext cx="10883392" cy="528241"/>
+            <a:off x="260975" y="132795"/>
+            <a:ext cx="10883400" cy="528300"/>
           </a:xfrm>
           <a:prstGeom prst="rect">
             <a:avLst/>
@@ -9480,7 +9480,7 @@
         </p:spPr>
         <p:txBody>
           <a:bodyPr anchorCtr="0" anchor="t" bIns="0" lIns="0" spcFirstLastPara="1" rIns="0" wrap="square" tIns="0">
-            <a:normAutofit/>
+            <a:normAutofit fontScale="90000"/>
           </a:bodyPr>
           <a:lstStyle/>
           <a:p>
@@ -9497,7 +9497,7 @@
               <a:buClr>
                 <a:srgbClr val="14213D"/>
               </a:buClr>
-              <a:buSzPts val="3600"/>
+              <a:buSzPct val="100000"/>
               <a:buFont typeface="Space Grotesk"/>
               <a:buNone/>
             </a:pPr>
@@ -9517,216 +9517,4893 @@
           </a:p>
         </p:txBody>
       </p:sp>
-      <p:sp>
-        <p:nvSpPr>
+      <p:graphicFrame>
+        <p:nvGraphicFramePr>
           <p:cNvPr id="121" name="Google Shape;121;p8"/>
-          <p:cNvSpPr/>
+          <p:cNvGraphicFramePr/>
           <p:nvPr/>
-        </p:nvSpPr>
-        <p:spPr>
-          <a:xfrm>
-            <a:off x="822325" y="1894086"/>
-            <a:ext cx="10547350" cy="3938389"/>
-          </a:xfrm>
-          <a:prstGeom prst="roundRect">
-            <a:avLst>
-              <a:gd fmla="val 2983" name="adj"/>
-            </a:avLst>
-          </a:prstGeom>
-          <a:solidFill>
-            <a:srgbClr val="FFFFFF"/>
-          </a:solidFill>
-          <a:ln cap="flat" cmpd="sng" w="19050">
-            <a:solidFill>
-              <a:srgbClr val="9AA5A0"/>
-            </a:solidFill>
-            <a:prstDash val="dash"/>
-            <a:round/>
-            <a:headEnd len="sm" w="sm" type="none"/>
-            <a:tailEnd len="sm" w="sm" type="none"/>
-          </a:ln>
-        </p:spPr>
-        <p:txBody>
-          <a:bodyPr anchorCtr="0" anchor="ctr" bIns="91425" lIns="91425" spcFirstLastPara="1" rIns="91425" wrap="square" tIns="91425">
-            <a:noAutofit/>
-          </a:bodyPr>
-          <a:lstStyle/>
-          <a:p>
-            <a:pPr indent="0" lvl="0" marL="0" rtl="0" algn="l">
-              <a:spcBef>
-                <a:spcPts val="0"/>
-              </a:spcBef>
-              <a:spcAft>
-                <a:spcPts val="0"/>
-              </a:spcAft>
-              <a:buNone/>
-            </a:pPr>
-            <a:r>
-              <a:t/>
-            </a:r>
-            <a:endParaRPr/>
-          </a:p>
-        </p:txBody>
-      </p:sp>
-      <p:pic>
-        <p:nvPicPr>
-          <p:cNvPr descr="Book" id="122" name="Google Shape;122;p8"/>
-          <p:cNvPicPr preferRelativeResize="0"/>
-          <p:nvPr/>
-        </p:nvPicPr>
-        <p:blipFill rotWithShape="1">
-          <a:blip r:embed="rId3">
-            <a:alphaModFix/>
-          </a:blip>
-          <a:srcRect b="0" l="0" r="0" t="0"/>
-          <a:stretch/>
-        </p:blipFill>
-        <p:spPr>
-          <a:xfrm>
-            <a:off x="5791200" y="3182541"/>
-            <a:ext cx="609600" cy="609600"/>
-          </a:xfrm>
-          <a:prstGeom prst="rect">
-            <a:avLst/>
-          </a:prstGeom>
-          <a:noFill/>
-          <a:ln>
-            <a:noFill/>
-          </a:ln>
-        </p:spPr>
-      </p:pic>
-      <p:sp>
-        <p:nvSpPr>
-          <p:cNvPr id="123" name="Google Shape;123;p8"/>
-          <p:cNvSpPr/>
-          <p:nvPr/>
-        </p:nvSpPr>
-        <p:spPr>
-          <a:xfrm>
-            <a:off x="3326616" y="3919141"/>
-            <a:ext cx="5538668" cy="309860"/>
-          </a:xfrm>
-          <a:prstGeom prst="rect">
-            <a:avLst/>
-          </a:prstGeom>
-          <a:noFill/>
-          <a:ln>
-            <a:noFill/>
-          </a:ln>
-        </p:spPr>
-        <p:txBody>
-          <a:bodyPr anchorCtr="0" anchor="t" bIns="0" lIns="0" spcFirstLastPara="1" rIns="0" wrap="square" tIns="0">
-            <a:normAutofit/>
-          </a:bodyPr>
-          <a:lstStyle/>
-          <a:p>
-            <a:pPr indent="0" lvl="0" marL="0" marR="0" rtl="0" algn="ctr">
-              <a:lnSpc>
-                <a:spcPct val="140000"/>
-              </a:lnSpc>
-              <a:spcBef>
-                <a:spcPts val="0"/>
-              </a:spcBef>
-              <a:spcAft>
-                <a:spcPts val="0"/>
-              </a:spcAft>
-              <a:buClr>
-                <a:srgbClr val="14213D"/>
-              </a:buClr>
-              <a:buSzPts val="1600"/>
-              <a:buFont typeface="IBM Plex Sans"/>
-              <a:buNone/>
-            </a:pPr>
-            <a:r>
-              <a:rPr b="1" i="0" lang="en-US" sz="1600" u="none" cap="none" strike="noStrike">
-                <a:solidFill>
-                  <a:srgbClr val="14213D"/>
-                </a:solidFill>
-                <a:latin typeface="IBM Plex Sans"/>
-                <a:ea typeface="IBM Plex Sans"/>
-                <a:cs typeface="IBM Plex Sans"/>
-                <a:sym typeface="IBM Plex Sans"/>
-              </a:rPr>
-              <a:t>Inserta aquí la imagen de las historias de usuario</a:t>
-            </a:r>
-            <a:endParaRPr b="0" i="0" sz="1600" u="none" cap="none" strike="noStrike">
-              <a:solidFill>
-                <a:schemeClr val="dk1"/>
-              </a:solidFill>
-              <a:latin typeface="IBM Plex Sans"/>
-              <a:ea typeface="IBM Plex Sans"/>
-              <a:cs typeface="IBM Plex Sans"/>
-              <a:sym typeface="IBM Plex Sans"/>
-            </a:endParaRPr>
-          </a:p>
-        </p:txBody>
-      </p:sp>
-      <p:sp>
-        <p:nvSpPr>
-          <p:cNvPr id="124" name="Google Shape;124;p8"/>
-          <p:cNvSpPr/>
-          <p:nvPr/>
-        </p:nvSpPr>
-        <p:spPr>
-          <a:xfrm>
-            <a:off x="3506272" y="4330601"/>
-            <a:ext cx="5179457" cy="238720"/>
-          </a:xfrm>
-          <a:prstGeom prst="rect">
-            <a:avLst/>
-          </a:prstGeom>
-          <a:noFill/>
-          <a:ln>
-            <a:noFill/>
-          </a:ln>
-        </p:spPr>
-        <p:txBody>
-          <a:bodyPr anchorCtr="0" anchor="t" bIns="0" lIns="0" spcFirstLastPara="1" rIns="0" wrap="square" tIns="0">
-            <a:normAutofit/>
-          </a:bodyPr>
-          <a:lstStyle/>
-          <a:p>
-            <a:pPr indent="0" lvl="0" marL="0" marR="0" rtl="0" algn="ctr">
-              <a:lnSpc>
-                <a:spcPct val="140000"/>
-              </a:lnSpc>
-              <a:spcBef>
-                <a:spcPts val="0"/>
-              </a:spcBef>
-              <a:spcAft>
-                <a:spcPts val="0"/>
-              </a:spcAft>
-              <a:buClr>
-                <a:srgbClr val="4A5568"/>
-              </a:buClr>
-              <a:buSzPts val="1200"/>
-              <a:buFont typeface="IBM Plex Sans"/>
-              <a:buNone/>
-            </a:pPr>
-            <a:r>
-              <a:rPr b="0" i="0" lang="en-US" sz="1200" u="none" cap="none" strike="noStrike">
-                <a:solidFill>
-                  <a:srgbClr val="4A5568"/>
-                </a:solidFill>
-                <a:latin typeface="IBM Plex Sans"/>
-                <a:ea typeface="IBM Plex Sans"/>
-                <a:cs typeface="IBM Plex Sans"/>
-                <a:sym typeface="IBM Plex Sans"/>
-              </a:rPr>
-              <a:t>Reemplaza este recuadro por la imagen exportada (PNG o SVG)</a:t>
-            </a:r>
-            <a:endParaRPr b="0" i="0" sz="1200" u="none" cap="none" strike="noStrike">
-              <a:solidFill>
-                <a:schemeClr val="dk1"/>
-              </a:solidFill>
-              <a:latin typeface="IBM Plex Sans"/>
-              <a:ea typeface="IBM Plex Sans"/>
-              <a:cs typeface="IBM Plex Sans"/>
-              <a:sym typeface="IBM Plex Sans"/>
-            </a:endParaRPr>
-          </a:p>
-        </p:txBody>
-      </p:sp>
+        </p:nvGraphicFramePr>
+        <p:xfrm>
+          <a:off x="39913" y="661100"/>
+          <a:ext cx="3000000" cy="3000000"/>
+        </p:xfrm>
+        <a:graphic>
+          <a:graphicData uri="http://schemas.openxmlformats.org/drawingml/2006/table">
+            <a:tbl>
+              <a:tblPr>
+                <a:noFill/>
+                <a:tableStyleId>{26211ED6-88C6-46B8-B31E-0D305AA5337D}</a:tableStyleId>
+              </a:tblPr>
+              <a:tblGrid>
+                <a:gridCol w="494500"/>
+                <a:gridCol w="999150"/>
+                <a:gridCol w="1229725"/>
+                <a:gridCol w="1005125"/>
+                <a:gridCol w="594825"/>
+                <a:gridCol w="693650"/>
+                <a:gridCol w="702700"/>
+                <a:gridCol w="677175"/>
+                <a:gridCol w="1800250"/>
+                <a:gridCol w="1836275"/>
+                <a:gridCol w="2078800"/>
+              </a:tblGrid>
+              <a:tr h="324950">
+                <a:tc>
+                  <a:txBody>
+                    <a:bodyPr/>
+                    <a:lstStyle/>
+                    <a:p>
+                      <a:pPr indent="0" lvl="0" marL="0" rtl="0" algn="ctr">
+                        <a:lnSpc>
+                          <a:spcPct val="115000"/>
+                        </a:lnSpc>
+                        <a:spcBef>
+                          <a:spcPts val="0"/>
+                        </a:spcBef>
+                        <a:spcAft>
+                          <a:spcPts val="0"/>
+                        </a:spcAft>
+                        <a:buNone/>
+                      </a:pPr>
+                      <a:r>
+                        <a:rPr b="1" lang="en-US" sz="1100">
+                          <a:solidFill>
+                            <a:srgbClr val="FFFFFF"/>
+                          </a:solidFill>
+                          <a:latin typeface="Calibri"/>
+                          <a:ea typeface="Calibri"/>
+                          <a:cs typeface="Calibri"/>
+                          <a:sym typeface="Calibri"/>
+                        </a:rPr>
+                        <a:t>ID</a:t>
+                      </a:r>
+                      <a:endParaRPr sz="1100">
+                        <a:latin typeface="Calibri"/>
+                        <a:ea typeface="Calibri"/>
+                        <a:cs typeface="Calibri"/>
+                        <a:sym typeface="Calibri"/>
+                      </a:endParaRPr>
+                    </a:p>
+                  </a:txBody>
+                  <a:tcPr marT="0" marB="0" marR="25400" marL="25400" anchor="ctr">
+                    <a:lnL cap="flat" cmpd="sng" w="9525">
+                      <a:solidFill>
+                        <a:srgbClr val="000000"/>
+                      </a:solidFill>
+                      <a:prstDash val="solid"/>
+                      <a:round/>
+                      <a:headEnd len="sm" w="sm" type="none"/>
+                      <a:tailEnd len="sm" w="sm" type="none"/>
+                    </a:lnL>
+                    <a:lnR cap="flat" cmpd="sng" w="9525">
+                      <a:solidFill>
+                        <a:srgbClr val="CCCCCC"/>
+                      </a:solidFill>
+                      <a:prstDash val="solid"/>
+                      <a:round/>
+                      <a:headEnd len="sm" w="sm" type="none"/>
+                      <a:tailEnd len="sm" w="sm" type="none"/>
+                    </a:lnR>
+                    <a:lnT cap="flat" cmpd="sng" w="9525">
+                      <a:solidFill>
+                        <a:srgbClr val="000000"/>
+                      </a:solidFill>
+                      <a:prstDash val="solid"/>
+                      <a:round/>
+                      <a:headEnd len="sm" w="sm" type="none"/>
+                      <a:tailEnd len="sm" w="sm" type="none"/>
+                    </a:lnT>
+                    <a:lnB cap="flat" cmpd="sng" w="9525">
+                      <a:solidFill>
+                        <a:srgbClr val="CCCCCC"/>
+                      </a:solidFill>
+                      <a:prstDash val="solid"/>
+                      <a:round/>
+                      <a:headEnd len="sm" w="sm" type="none"/>
+                      <a:tailEnd len="sm" w="sm" type="none"/>
+                    </a:lnB>
+                    <a:solidFill>
+                      <a:srgbClr val="1F4E78"/>
+                    </a:solidFill>
+                  </a:tcPr>
+                </a:tc>
+                <a:tc>
+                  <a:txBody>
+                    <a:bodyPr/>
+                    <a:lstStyle/>
+                    <a:p>
+                      <a:pPr indent="0" lvl="0" marL="0" rtl="0" algn="ctr">
+                        <a:lnSpc>
+                          <a:spcPct val="115000"/>
+                        </a:lnSpc>
+                        <a:spcBef>
+                          <a:spcPts val="0"/>
+                        </a:spcBef>
+                        <a:spcAft>
+                          <a:spcPts val="0"/>
+                        </a:spcAft>
+                        <a:buNone/>
+                      </a:pPr>
+                      <a:r>
+                        <a:rPr b="1" lang="en-US" sz="1100">
+                          <a:solidFill>
+                            <a:srgbClr val="FFFFFF"/>
+                          </a:solidFill>
+                          <a:latin typeface="Calibri"/>
+                          <a:ea typeface="Calibri"/>
+                          <a:cs typeface="Calibri"/>
+                          <a:sym typeface="Calibri"/>
+                        </a:rPr>
+                        <a:t>Épica</a:t>
+                      </a:r>
+                      <a:endParaRPr sz="1100">
+                        <a:latin typeface="Calibri"/>
+                        <a:ea typeface="Calibri"/>
+                        <a:cs typeface="Calibri"/>
+                        <a:sym typeface="Calibri"/>
+                      </a:endParaRPr>
+                    </a:p>
+                  </a:txBody>
+                  <a:tcPr marT="0" marB="0" marR="25400" marL="25400" anchor="ctr">
+                    <a:lnL cap="flat" cmpd="sng" w="9525">
+                      <a:solidFill>
+                        <a:srgbClr val="CCCCCC"/>
+                      </a:solidFill>
+                      <a:prstDash val="solid"/>
+                      <a:round/>
+                      <a:headEnd len="sm" w="sm" type="none"/>
+                      <a:tailEnd len="sm" w="sm" type="none"/>
+                    </a:lnL>
+                    <a:lnR cap="flat" cmpd="sng" w="9525">
+                      <a:solidFill>
+                        <a:srgbClr val="CCCCCC"/>
+                      </a:solidFill>
+                      <a:prstDash val="solid"/>
+                      <a:round/>
+                      <a:headEnd len="sm" w="sm" type="none"/>
+                      <a:tailEnd len="sm" w="sm" type="none"/>
+                    </a:lnR>
+                    <a:lnT cap="flat" cmpd="sng" w="9525">
+                      <a:solidFill>
+                        <a:srgbClr val="000000"/>
+                      </a:solidFill>
+                      <a:prstDash val="solid"/>
+                      <a:round/>
+                      <a:headEnd len="sm" w="sm" type="none"/>
+                      <a:tailEnd len="sm" w="sm" type="none"/>
+                    </a:lnT>
+                    <a:lnB cap="flat" cmpd="sng" w="9525">
+                      <a:solidFill>
+                        <a:srgbClr val="CCCCCC"/>
+                      </a:solidFill>
+                      <a:prstDash val="solid"/>
+                      <a:round/>
+                      <a:headEnd len="sm" w="sm" type="none"/>
+                      <a:tailEnd len="sm" w="sm" type="none"/>
+                    </a:lnB>
+                    <a:solidFill>
+                      <a:srgbClr val="1F4E78"/>
+                    </a:solidFill>
+                  </a:tcPr>
+                </a:tc>
+                <a:tc>
+                  <a:txBody>
+                    <a:bodyPr/>
+                    <a:lstStyle/>
+                    <a:p>
+                      <a:pPr indent="0" lvl="0" marL="0" rtl="0" algn="ctr">
+                        <a:lnSpc>
+                          <a:spcPct val="115000"/>
+                        </a:lnSpc>
+                        <a:spcBef>
+                          <a:spcPts val="0"/>
+                        </a:spcBef>
+                        <a:spcAft>
+                          <a:spcPts val="0"/>
+                        </a:spcAft>
+                        <a:buNone/>
+                      </a:pPr>
+                      <a:r>
+                        <a:rPr b="1" lang="en-US" sz="1100">
+                          <a:solidFill>
+                            <a:srgbClr val="FFFFFF"/>
+                          </a:solidFill>
+                          <a:latin typeface="Calibri"/>
+                          <a:ea typeface="Calibri"/>
+                          <a:cs typeface="Calibri"/>
+                          <a:sym typeface="Calibri"/>
+                        </a:rPr>
+                        <a:t>Título de la Historia de Usuario</a:t>
+                      </a:r>
+                      <a:endParaRPr sz="1100">
+                        <a:latin typeface="Calibri"/>
+                        <a:ea typeface="Calibri"/>
+                        <a:cs typeface="Calibri"/>
+                        <a:sym typeface="Calibri"/>
+                      </a:endParaRPr>
+                    </a:p>
+                  </a:txBody>
+                  <a:tcPr marT="0" marB="0" marR="25400" marL="25400" anchor="ctr">
+                    <a:lnL cap="flat" cmpd="sng" w="9525">
+                      <a:solidFill>
+                        <a:srgbClr val="CCCCCC"/>
+                      </a:solidFill>
+                      <a:prstDash val="solid"/>
+                      <a:round/>
+                      <a:headEnd len="sm" w="sm" type="none"/>
+                      <a:tailEnd len="sm" w="sm" type="none"/>
+                    </a:lnL>
+                    <a:lnR cap="flat" cmpd="sng" w="9525">
+                      <a:solidFill>
+                        <a:srgbClr val="CCCCCC"/>
+                      </a:solidFill>
+                      <a:prstDash val="solid"/>
+                      <a:round/>
+                      <a:headEnd len="sm" w="sm" type="none"/>
+                      <a:tailEnd len="sm" w="sm" type="none"/>
+                    </a:lnR>
+                    <a:lnT cap="flat" cmpd="sng" w="9525">
+                      <a:solidFill>
+                        <a:srgbClr val="000000"/>
+                      </a:solidFill>
+                      <a:prstDash val="solid"/>
+                      <a:round/>
+                      <a:headEnd len="sm" w="sm" type="none"/>
+                      <a:tailEnd len="sm" w="sm" type="none"/>
+                    </a:lnT>
+                    <a:lnB cap="flat" cmpd="sng" w="9525">
+                      <a:solidFill>
+                        <a:srgbClr val="CCCCCC"/>
+                      </a:solidFill>
+                      <a:prstDash val="solid"/>
+                      <a:round/>
+                      <a:headEnd len="sm" w="sm" type="none"/>
+                      <a:tailEnd len="sm" w="sm" type="none"/>
+                    </a:lnB>
+                    <a:solidFill>
+                      <a:srgbClr val="1F4E78"/>
+                    </a:solidFill>
+                  </a:tcPr>
+                </a:tc>
+                <a:tc>
+                  <a:txBody>
+                    <a:bodyPr/>
+                    <a:lstStyle/>
+                    <a:p>
+                      <a:pPr indent="0" lvl="0" marL="0" rtl="0" algn="ctr">
+                        <a:lnSpc>
+                          <a:spcPct val="115000"/>
+                        </a:lnSpc>
+                        <a:spcBef>
+                          <a:spcPts val="0"/>
+                        </a:spcBef>
+                        <a:spcAft>
+                          <a:spcPts val="0"/>
+                        </a:spcAft>
+                        <a:buNone/>
+                      </a:pPr>
+                      <a:r>
+                        <a:rPr b="1" lang="en-US" sz="1100">
+                          <a:solidFill>
+                            <a:srgbClr val="FFFFFF"/>
+                          </a:solidFill>
+                          <a:latin typeface="Calibri"/>
+                          <a:ea typeface="Calibri"/>
+                          <a:cs typeface="Calibri"/>
+                          <a:sym typeface="Calibri"/>
+                        </a:rPr>
+                        <a:t>Rol / Enfoque</a:t>
+                      </a:r>
+                      <a:endParaRPr sz="1100">
+                        <a:latin typeface="Calibri"/>
+                        <a:ea typeface="Calibri"/>
+                        <a:cs typeface="Calibri"/>
+                        <a:sym typeface="Calibri"/>
+                      </a:endParaRPr>
+                    </a:p>
+                  </a:txBody>
+                  <a:tcPr marT="0" marB="0" marR="25400" marL="25400" anchor="ctr">
+                    <a:lnL cap="flat" cmpd="sng" w="9525">
+                      <a:solidFill>
+                        <a:srgbClr val="CCCCCC"/>
+                      </a:solidFill>
+                      <a:prstDash val="solid"/>
+                      <a:round/>
+                      <a:headEnd len="sm" w="sm" type="none"/>
+                      <a:tailEnd len="sm" w="sm" type="none"/>
+                    </a:lnL>
+                    <a:lnR cap="flat" cmpd="sng" w="9525">
+                      <a:solidFill>
+                        <a:srgbClr val="CCCCCC"/>
+                      </a:solidFill>
+                      <a:prstDash val="solid"/>
+                      <a:round/>
+                      <a:headEnd len="sm" w="sm" type="none"/>
+                      <a:tailEnd len="sm" w="sm" type="none"/>
+                    </a:lnR>
+                    <a:lnT cap="flat" cmpd="sng" w="9525">
+                      <a:solidFill>
+                        <a:srgbClr val="000000"/>
+                      </a:solidFill>
+                      <a:prstDash val="solid"/>
+                      <a:round/>
+                      <a:headEnd len="sm" w="sm" type="none"/>
+                      <a:tailEnd len="sm" w="sm" type="none"/>
+                    </a:lnT>
+                    <a:lnB cap="flat" cmpd="sng" w="9525">
+                      <a:solidFill>
+                        <a:srgbClr val="CCCCCC"/>
+                      </a:solidFill>
+                      <a:prstDash val="solid"/>
+                      <a:round/>
+                      <a:headEnd len="sm" w="sm" type="none"/>
+                      <a:tailEnd len="sm" w="sm" type="none"/>
+                    </a:lnB>
+                    <a:solidFill>
+                      <a:srgbClr val="1F4E78"/>
+                    </a:solidFill>
+                  </a:tcPr>
+                </a:tc>
+                <a:tc>
+                  <a:txBody>
+                    <a:bodyPr/>
+                    <a:lstStyle/>
+                    <a:p>
+                      <a:pPr indent="0" lvl="0" marL="0" rtl="0" algn="ctr">
+                        <a:lnSpc>
+                          <a:spcPct val="115000"/>
+                        </a:lnSpc>
+                        <a:spcBef>
+                          <a:spcPts val="0"/>
+                        </a:spcBef>
+                        <a:spcAft>
+                          <a:spcPts val="0"/>
+                        </a:spcAft>
+                        <a:buNone/>
+                      </a:pPr>
+                      <a:r>
+                        <a:rPr b="1" lang="en-US" sz="1100">
+                          <a:solidFill>
+                            <a:srgbClr val="FFFFFF"/>
+                          </a:solidFill>
+                          <a:latin typeface="Calibri"/>
+                          <a:ea typeface="Calibri"/>
+                          <a:cs typeface="Calibri"/>
+                          <a:sym typeface="Calibri"/>
+                        </a:rPr>
+                        <a:t>Prioridad</a:t>
+                      </a:r>
+                      <a:endParaRPr sz="1100">
+                        <a:latin typeface="Calibri"/>
+                        <a:ea typeface="Calibri"/>
+                        <a:cs typeface="Calibri"/>
+                        <a:sym typeface="Calibri"/>
+                      </a:endParaRPr>
+                    </a:p>
+                  </a:txBody>
+                  <a:tcPr marT="0" marB="0" marR="25400" marL="25400" anchor="ctr">
+                    <a:lnL cap="flat" cmpd="sng" w="9525">
+                      <a:solidFill>
+                        <a:srgbClr val="CCCCCC"/>
+                      </a:solidFill>
+                      <a:prstDash val="solid"/>
+                      <a:round/>
+                      <a:headEnd len="sm" w="sm" type="none"/>
+                      <a:tailEnd len="sm" w="sm" type="none"/>
+                    </a:lnL>
+                    <a:lnR cap="flat" cmpd="sng" w="9525">
+                      <a:solidFill>
+                        <a:srgbClr val="CCCCCC"/>
+                      </a:solidFill>
+                      <a:prstDash val="solid"/>
+                      <a:round/>
+                      <a:headEnd len="sm" w="sm" type="none"/>
+                      <a:tailEnd len="sm" w="sm" type="none"/>
+                    </a:lnR>
+                    <a:lnT cap="flat" cmpd="sng" w="9525">
+                      <a:solidFill>
+                        <a:srgbClr val="000000"/>
+                      </a:solidFill>
+                      <a:prstDash val="solid"/>
+                      <a:round/>
+                      <a:headEnd len="sm" w="sm" type="none"/>
+                      <a:tailEnd len="sm" w="sm" type="none"/>
+                    </a:lnT>
+                    <a:lnB cap="flat" cmpd="sng" w="9525">
+                      <a:solidFill>
+                        <a:srgbClr val="CCCCCC"/>
+                      </a:solidFill>
+                      <a:prstDash val="solid"/>
+                      <a:round/>
+                      <a:headEnd len="sm" w="sm" type="none"/>
+                      <a:tailEnd len="sm" w="sm" type="none"/>
+                    </a:lnB>
+                    <a:solidFill>
+                      <a:srgbClr val="1F4E78"/>
+                    </a:solidFill>
+                  </a:tcPr>
+                </a:tc>
+                <a:tc>
+                  <a:txBody>
+                    <a:bodyPr/>
+                    <a:lstStyle/>
+                    <a:p>
+                      <a:pPr indent="0" lvl="0" marL="0" rtl="0" algn="ctr">
+                        <a:lnSpc>
+                          <a:spcPct val="115000"/>
+                        </a:lnSpc>
+                        <a:spcBef>
+                          <a:spcPts val="0"/>
+                        </a:spcBef>
+                        <a:spcAft>
+                          <a:spcPts val="0"/>
+                        </a:spcAft>
+                        <a:buNone/>
+                      </a:pPr>
+                      <a:r>
+                        <a:rPr b="1" lang="en-US" sz="1100">
+                          <a:solidFill>
+                            <a:srgbClr val="FFFFFF"/>
+                          </a:solidFill>
+                          <a:latin typeface="Calibri"/>
+                          <a:ea typeface="Calibri"/>
+                          <a:cs typeface="Calibri"/>
+                          <a:sym typeface="Calibri"/>
+                        </a:rPr>
+                        <a:t>Story Points</a:t>
+                      </a:r>
+                      <a:endParaRPr sz="1100">
+                        <a:latin typeface="Calibri"/>
+                        <a:ea typeface="Calibri"/>
+                        <a:cs typeface="Calibri"/>
+                        <a:sym typeface="Calibri"/>
+                      </a:endParaRPr>
+                    </a:p>
+                  </a:txBody>
+                  <a:tcPr marT="0" marB="0" marR="25400" marL="25400" anchor="ctr">
+                    <a:lnL cap="flat" cmpd="sng" w="9525">
+                      <a:solidFill>
+                        <a:srgbClr val="CCCCCC"/>
+                      </a:solidFill>
+                      <a:prstDash val="solid"/>
+                      <a:round/>
+                      <a:headEnd len="sm" w="sm" type="none"/>
+                      <a:tailEnd len="sm" w="sm" type="none"/>
+                    </a:lnL>
+                    <a:lnR cap="flat" cmpd="sng" w="9525">
+                      <a:solidFill>
+                        <a:srgbClr val="CCCCCC"/>
+                      </a:solidFill>
+                      <a:prstDash val="solid"/>
+                      <a:round/>
+                      <a:headEnd len="sm" w="sm" type="none"/>
+                      <a:tailEnd len="sm" w="sm" type="none"/>
+                    </a:lnR>
+                    <a:lnT cap="flat" cmpd="sng" w="9525">
+                      <a:solidFill>
+                        <a:srgbClr val="000000"/>
+                      </a:solidFill>
+                      <a:prstDash val="solid"/>
+                      <a:round/>
+                      <a:headEnd len="sm" w="sm" type="none"/>
+                      <a:tailEnd len="sm" w="sm" type="none"/>
+                    </a:lnT>
+                    <a:lnB cap="flat" cmpd="sng" w="9525">
+                      <a:solidFill>
+                        <a:srgbClr val="CCCCCC"/>
+                      </a:solidFill>
+                      <a:prstDash val="solid"/>
+                      <a:round/>
+                      <a:headEnd len="sm" w="sm" type="none"/>
+                      <a:tailEnd len="sm" w="sm" type="none"/>
+                    </a:lnB>
+                    <a:solidFill>
+                      <a:srgbClr val="1F4E78"/>
+                    </a:solidFill>
+                  </a:tcPr>
+                </a:tc>
+                <a:tc>
+                  <a:txBody>
+                    <a:bodyPr/>
+                    <a:lstStyle/>
+                    <a:p>
+                      <a:pPr indent="0" lvl="0" marL="0" rtl="0" algn="ctr">
+                        <a:lnSpc>
+                          <a:spcPct val="115000"/>
+                        </a:lnSpc>
+                        <a:spcBef>
+                          <a:spcPts val="0"/>
+                        </a:spcBef>
+                        <a:spcAft>
+                          <a:spcPts val="0"/>
+                        </a:spcAft>
+                        <a:buNone/>
+                      </a:pPr>
+                      <a:r>
+                        <a:rPr b="1" lang="en-US" sz="1100">
+                          <a:solidFill>
+                            <a:srgbClr val="FFFFFF"/>
+                          </a:solidFill>
+                          <a:latin typeface="Calibri"/>
+                          <a:ea typeface="Calibri"/>
+                          <a:cs typeface="Calibri"/>
+                          <a:sym typeface="Calibri"/>
+                        </a:rPr>
+                        <a:t>Sprint</a:t>
+                      </a:r>
+                      <a:endParaRPr sz="1100">
+                        <a:latin typeface="Calibri"/>
+                        <a:ea typeface="Calibri"/>
+                        <a:cs typeface="Calibri"/>
+                        <a:sym typeface="Calibri"/>
+                      </a:endParaRPr>
+                    </a:p>
+                  </a:txBody>
+                  <a:tcPr marT="0" marB="0" marR="25400" marL="25400" anchor="ctr">
+                    <a:lnL cap="flat" cmpd="sng" w="9525">
+                      <a:solidFill>
+                        <a:srgbClr val="CCCCCC"/>
+                      </a:solidFill>
+                      <a:prstDash val="solid"/>
+                      <a:round/>
+                      <a:headEnd len="sm" w="sm" type="none"/>
+                      <a:tailEnd len="sm" w="sm" type="none"/>
+                    </a:lnL>
+                    <a:lnR cap="flat" cmpd="sng" w="9525">
+                      <a:solidFill>
+                        <a:srgbClr val="CCCCCC"/>
+                      </a:solidFill>
+                      <a:prstDash val="solid"/>
+                      <a:round/>
+                      <a:headEnd len="sm" w="sm" type="none"/>
+                      <a:tailEnd len="sm" w="sm" type="none"/>
+                    </a:lnR>
+                    <a:lnT cap="flat" cmpd="sng" w="9525">
+                      <a:solidFill>
+                        <a:srgbClr val="000000"/>
+                      </a:solidFill>
+                      <a:prstDash val="solid"/>
+                      <a:round/>
+                      <a:headEnd len="sm" w="sm" type="none"/>
+                      <a:tailEnd len="sm" w="sm" type="none"/>
+                    </a:lnT>
+                    <a:lnB cap="flat" cmpd="sng" w="9525">
+                      <a:solidFill>
+                        <a:srgbClr val="CCCCCC"/>
+                      </a:solidFill>
+                      <a:prstDash val="solid"/>
+                      <a:round/>
+                      <a:headEnd len="sm" w="sm" type="none"/>
+                      <a:tailEnd len="sm" w="sm" type="none"/>
+                    </a:lnB>
+                    <a:solidFill>
+                      <a:srgbClr val="1F4E78"/>
+                    </a:solidFill>
+                  </a:tcPr>
+                </a:tc>
+                <a:tc>
+                  <a:txBody>
+                    <a:bodyPr/>
+                    <a:lstStyle/>
+                    <a:p>
+                      <a:pPr indent="0" lvl="0" marL="0" rtl="0" algn="ctr">
+                        <a:lnSpc>
+                          <a:spcPct val="115000"/>
+                        </a:lnSpc>
+                        <a:spcBef>
+                          <a:spcPts val="0"/>
+                        </a:spcBef>
+                        <a:spcAft>
+                          <a:spcPts val="0"/>
+                        </a:spcAft>
+                        <a:buNone/>
+                      </a:pPr>
+                      <a:r>
+                        <a:rPr b="1" lang="en-US" sz="1100">
+                          <a:solidFill>
+                            <a:srgbClr val="FFFFFF"/>
+                          </a:solidFill>
+                          <a:latin typeface="Calibri"/>
+                          <a:ea typeface="Calibri"/>
+                          <a:cs typeface="Calibri"/>
+                          <a:sym typeface="Calibri"/>
+                        </a:rPr>
+                        <a:t>Estado</a:t>
+                      </a:r>
+                      <a:endParaRPr sz="1100">
+                        <a:latin typeface="Calibri"/>
+                        <a:ea typeface="Calibri"/>
+                        <a:cs typeface="Calibri"/>
+                        <a:sym typeface="Calibri"/>
+                      </a:endParaRPr>
+                    </a:p>
+                  </a:txBody>
+                  <a:tcPr marT="0" marB="0" marR="25400" marL="25400" anchor="ctr">
+                    <a:lnL cap="flat" cmpd="sng" w="9525">
+                      <a:solidFill>
+                        <a:srgbClr val="CCCCCC"/>
+                      </a:solidFill>
+                      <a:prstDash val="solid"/>
+                      <a:round/>
+                      <a:headEnd len="sm" w="sm" type="none"/>
+                      <a:tailEnd len="sm" w="sm" type="none"/>
+                    </a:lnL>
+                    <a:lnR cap="flat" cmpd="sng" w="9525">
+                      <a:solidFill>
+                        <a:srgbClr val="CCCCCC"/>
+                      </a:solidFill>
+                      <a:prstDash val="solid"/>
+                      <a:round/>
+                      <a:headEnd len="sm" w="sm" type="none"/>
+                      <a:tailEnd len="sm" w="sm" type="none"/>
+                    </a:lnR>
+                    <a:lnT cap="flat" cmpd="sng" w="9525">
+                      <a:solidFill>
+                        <a:srgbClr val="000000"/>
+                      </a:solidFill>
+                      <a:prstDash val="solid"/>
+                      <a:round/>
+                      <a:headEnd len="sm" w="sm" type="none"/>
+                      <a:tailEnd len="sm" w="sm" type="none"/>
+                    </a:lnT>
+                    <a:lnB cap="flat" cmpd="sng" w="9525">
+                      <a:solidFill>
+                        <a:srgbClr val="CCCCCC"/>
+                      </a:solidFill>
+                      <a:prstDash val="solid"/>
+                      <a:round/>
+                      <a:headEnd len="sm" w="sm" type="none"/>
+                      <a:tailEnd len="sm" w="sm" type="none"/>
+                    </a:lnB>
+                    <a:solidFill>
+                      <a:srgbClr val="1F4E78"/>
+                    </a:solidFill>
+                  </a:tcPr>
+                </a:tc>
+                <a:tc>
+                  <a:txBody>
+                    <a:bodyPr/>
+                    <a:lstStyle/>
+                    <a:p>
+                      <a:pPr indent="0" lvl="0" marL="0" rtl="0" algn="ctr">
+                        <a:lnSpc>
+                          <a:spcPct val="115000"/>
+                        </a:lnSpc>
+                        <a:spcBef>
+                          <a:spcPts val="0"/>
+                        </a:spcBef>
+                        <a:spcAft>
+                          <a:spcPts val="0"/>
+                        </a:spcAft>
+                        <a:buNone/>
+                      </a:pPr>
+                      <a:r>
+                        <a:rPr b="1" lang="en-US" sz="1100">
+                          <a:solidFill>
+                            <a:srgbClr val="FFFFFF"/>
+                          </a:solidFill>
+                          <a:latin typeface="Calibri"/>
+                          <a:ea typeface="Calibri"/>
+                          <a:cs typeface="Calibri"/>
+                          <a:sym typeface="Calibri"/>
+                        </a:rPr>
+                        <a:t>Declaración Ágil (COMO / QUIERO / PARA)</a:t>
+                      </a:r>
+                      <a:endParaRPr sz="1100">
+                        <a:latin typeface="Calibri"/>
+                        <a:ea typeface="Calibri"/>
+                        <a:cs typeface="Calibri"/>
+                        <a:sym typeface="Calibri"/>
+                      </a:endParaRPr>
+                    </a:p>
+                  </a:txBody>
+                  <a:tcPr marT="0" marB="0" marR="25400" marL="25400" anchor="ctr">
+                    <a:lnL cap="flat" cmpd="sng" w="9525">
+                      <a:solidFill>
+                        <a:srgbClr val="CCCCCC"/>
+                      </a:solidFill>
+                      <a:prstDash val="solid"/>
+                      <a:round/>
+                      <a:headEnd len="sm" w="sm" type="none"/>
+                      <a:tailEnd len="sm" w="sm" type="none"/>
+                    </a:lnL>
+                    <a:lnR cap="flat" cmpd="sng" w="9525">
+                      <a:solidFill>
+                        <a:srgbClr val="CCCCCC"/>
+                      </a:solidFill>
+                      <a:prstDash val="solid"/>
+                      <a:round/>
+                      <a:headEnd len="sm" w="sm" type="none"/>
+                      <a:tailEnd len="sm" w="sm" type="none"/>
+                    </a:lnR>
+                    <a:lnT cap="flat" cmpd="sng" w="9525">
+                      <a:solidFill>
+                        <a:srgbClr val="000000"/>
+                      </a:solidFill>
+                      <a:prstDash val="solid"/>
+                      <a:round/>
+                      <a:headEnd len="sm" w="sm" type="none"/>
+                      <a:tailEnd len="sm" w="sm" type="none"/>
+                    </a:lnT>
+                    <a:lnB cap="flat" cmpd="sng" w="9525">
+                      <a:solidFill>
+                        <a:srgbClr val="CCCCCC"/>
+                      </a:solidFill>
+                      <a:prstDash val="solid"/>
+                      <a:round/>
+                      <a:headEnd len="sm" w="sm" type="none"/>
+                      <a:tailEnd len="sm" w="sm" type="none"/>
+                    </a:lnB>
+                    <a:solidFill>
+                      <a:srgbClr val="1F4E78"/>
+                    </a:solidFill>
+                  </a:tcPr>
+                </a:tc>
+                <a:tc>
+                  <a:txBody>
+                    <a:bodyPr/>
+                    <a:lstStyle/>
+                    <a:p>
+                      <a:pPr indent="0" lvl="0" marL="0" rtl="0" algn="ctr">
+                        <a:lnSpc>
+                          <a:spcPct val="115000"/>
+                        </a:lnSpc>
+                        <a:spcBef>
+                          <a:spcPts val="0"/>
+                        </a:spcBef>
+                        <a:spcAft>
+                          <a:spcPts val="0"/>
+                        </a:spcAft>
+                        <a:buNone/>
+                      </a:pPr>
+                      <a:r>
+                        <a:rPr b="1" lang="en-US" sz="1100">
+                          <a:solidFill>
+                            <a:srgbClr val="FFFFFF"/>
+                          </a:solidFill>
+                          <a:latin typeface="Calibri"/>
+                          <a:ea typeface="Calibri"/>
+                          <a:cs typeface="Calibri"/>
+                          <a:sym typeface="Calibri"/>
+                        </a:rPr>
+                        <a:t>Criterios de Aceptación Funcionales</a:t>
+                      </a:r>
+                      <a:endParaRPr sz="1100">
+                        <a:latin typeface="Calibri"/>
+                        <a:ea typeface="Calibri"/>
+                        <a:cs typeface="Calibri"/>
+                        <a:sym typeface="Calibri"/>
+                      </a:endParaRPr>
+                    </a:p>
+                  </a:txBody>
+                  <a:tcPr marT="0" marB="0" marR="25400" marL="25400" anchor="ctr">
+                    <a:lnL cap="flat" cmpd="sng" w="9525">
+                      <a:solidFill>
+                        <a:srgbClr val="CCCCCC"/>
+                      </a:solidFill>
+                      <a:prstDash val="solid"/>
+                      <a:round/>
+                      <a:headEnd len="sm" w="sm" type="none"/>
+                      <a:tailEnd len="sm" w="sm" type="none"/>
+                    </a:lnL>
+                    <a:lnR cap="flat" cmpd="sng" w="9525">
+                      <a:solidFill>
+                        <a:srgbClr val="CCCCCC"/>
+                      </a:solidFill>
+                      <a:prstDash val="solid"/>
+                      <a:round/>
+                      <a:headEnd len="sm" w="sm" type="none"/>
+                      <a:tailEnd len="sm" w="sm" type="none"/>
+                    </a:lnR>
+                    <a:lnT cap="flat" cmpd="sng" w="9525">
+                      <a:solidFill>
+                        <a:srgbClr val="000000"/>
+                      </a:solidFill>
+                      <a:prstDash val="solid"/>
+                      <a:round/>
+                      <a:headEnd len="sm" w="sm" type="none"/>
+                      <a:tailEnd len="sm" w="sm" type="none"/>
+                    </a:lnT>
+                    <a:lnB cap="flat" cmpd="sng" w="9525">
+                      <a:solidFill>
+                        <a:srgbClr val="CCCCCC"/>
+                      </a:solidFill>
+                      <a:prstDash val="solid"/>
+                      <a:round/>
+                      <a:headEnd len="sm" w="sm" type="none"/>
+                      <a:tailEnd len="sm" w="sm" type="none"/>
+                    </a:lnB>
+                    <a:solidFill>
+                      <a:srgbClr val="1F4E78"/>
+                    </a:solidFill>
+                  </a:tcPr>
+                </a:tc>
+                <a:tc>
+                  <a:txBody>
+                    <a:bodyPr/>
+                    <a:lstStyle/>
+                    <a:p>
+                      <a:pPr indent="0" lvl="0" marL="0" rtl="0" algn="ctr">
+                        <a:lnSpc>
+                          <a:spcPct val="115000"/>
+                        </a:lnSpc>
+                        <a:spcBef>
+                          <a:spcPts val="0"/>
+                        </a:spcBef>
+                        <a:spcAft>
+                          <a:spcPts val="0"/>
+                        </a:spcAft>
+                        <a:buNone/>
+                      </a:pPr>
+                      <a:r>
+                        <a:rPr b="1" lang="en-US" sz="1100">
+                          <a:solidFill>
+                            <a:srgbClr val="FFFFFF"/>
+                          </a:solidFill>
+                          <a:latin typeface="Calibri"/>
+                          <a:ea typeface="Calibri"/>
+                          <a:cs typeface="Calibri"/>
+                          <a:sym typeface="Calibri"/>
+                        </a:rPr>
+                        <a:t>Definición de Hecho Técnica (DoD)</a:t>
+                      </a:r>
+                      <a:endParaRPr sz="1100">
+                        <a:latin typeface="Calibri"/>
+                        <a:ea typeface="Calibri"/>
+                        <a:cs typeface="Calibri"/>
+                        <a:sym typeface="Calibri"/>
+                      </a:endParaRPr>
+                    </a:p>
+                  </a:txBody>
+                  <a:tcPr marT="0" marB="0" marR="25400" marL="25400" anchor="ctr">
+                    <a:lnL cap="flat" cmpd="sng" w="9525">
+                      <a:solidFill>
+                        <a:srgbClr val="CCCCCC"/>
+                      </a:solidFill>
+                      <a:prstDash val="solid"/>
+                      <a:round/>
+                      <a:headEnd len="sm" w="sm" type="none"/>
+                      <a:tailEnd len="sm" w="sm" type="none"/>
+                    </a:lnL>
+                    <a:lnR cap="flat" cmpd="sng" w="9525">
+                      <a:solidFill>
+                        <a:srgbClr val="CCCCCC"/>
+                      </a:solidFill>
+                      <a:prstDash val="solid"/>
+                      <a:round/>
+                      <a:headEnd len="sm" w="sm" type="none"/>
+                      <a:tailEnd len="sm" w="sm" type="none"/>
+                    </a:lnR>
+                    <a:lnT cap="flat" cmpd="sng" w="9525">
+                      <a:solidFill>
+                        <a:srgbClr val="000000"/>
+                      </a:solidFill>
+                      <a:prstDash val="solid"/>
+                      <a:round/>
+                      <a:headEnd len="sm" w="sm" type="none"/>
+                      <a:tailEnd len="sm" w="sm" type="none"/>
+                    </a:lnT>
+                    <a:lnB cap="flat" cmpd="sng" w="9525">
+                      <a:solidFill>
+                        <a:srgbClr val="CCCCCC"/>
+                      </a:solidFill>
+                      <a:prstDash val="solid"/>
+                      <a:round/>
+                      <a:headEnd len="sm" w="sm" type="none"/>
+                      <a:tailEnd len="sm" w="sm" type="none"/>
+                    </a:lnB>
+                    <a:solidFill>
+                      <a:srgbClr val="1F4E78"/>
+                    </a:solidFill>
+                  </a:tcPr>
+                </a:tc>
+              </a:tr>
+              <a:tr h="1137325">
+                <a:tc>
+                  <a:txBody>
+                    <a:bodyPr/>
+                    <a:lstStyle/>
+                    <a:p>
+                      <a:pPr indent="0" lvl="0" marL="0" rtl="0" algn="ctr">
+                        <a:lnSpc>
+                          <a:spcPct val="115000"/>
+                        </a:lnSpc>
+                        <a:spcBef>
+                          <a:spcPts val="0"/>
+                        </a:spcBef>
+                        <a:spcAft>
+                          <a:spcPts val="0"/>
+                        </a:spcAft>
+                        <a:buNone/>
+                      </a:pPr>
+                      <a:r>
+                        <a:rPr b="1" lang="en-US" sz="1100">
+                          <a:latin typeface="Calibri"/>
+                          <a:ea typeface="Calibri"/>
+                          <a:cs typeface="Calibri"/>
+                          <a:sym typeface="Calibri"/>
+                        </a:rPr>
+                        <a:t>HU-01</a:t>
+                      </a:r>
+                      <a:endParaRPr sz="1100">
+                        <a:latin typeface="Calibri"/>
+                        <a:ea typeface="Calibri"/>
+                        <a:cs typeface="Calibri"/>
+                        <a:sym typeface="Calibri"/>
+                      </a:endParaRPr>
+                    </a:p>
+                  </a:txBody>
+                  <a:tcPr marT="0" marB="0" marR="25400" marL="25400">
+                    <a:lnL cap="flat" cmpd="sng" w="9525">
+                      <a:solidFill>
+                        <a:srgbClr val="D9D9D9"/>
+                      </a:solidFill>
+                      <a:prstDash val="solid"/>
+                      <a:round/>
+                      <a:headEnd len="sm" w="sm" type="none"/>
+                      <a:tailEnd len="sm" w="sm" type="none"/>
+                    </a:lnL>
+                    <a:lnR cap="flat" cmpd="sng" w="9525">
+                      <a:solidFill>
+                        <a:srgbClr val="CCCCCC"/>
+                      </a:solidFill>
+                      <a:prstDash val="solid"/>
+                      <a:round/>
+                      <a:headEnd len="sm" w="sm" type="none"/>
+                      <a:tailEnd len="sm" w="sm" type="none"/>
+                    </a:lnR>
+                    <a:lnT cap="flat" cmpd="sng" w="9525">
+                      <a:solidFill>
+                        <a:srgbClr val="CCCCCC"/>
+                      </a:solidFill>
+                      <a:prstDash val="solid"/>
+                      <a:round/>
+                      <a:headEnd len="sm" w="sm" type="none"/>
+                      <a:tailEnd len="sm" w="sm" type="none"/>
+                    </a:lnT>
+                    <a:lnB cap="flat" cmpd="sng" w="9525">
+                      <a:solidFill>
+                        <a:srgbClr val="CCCCCC"/>
+                      </a:solidFill>
+                      <a:prstDash val="solid"/>
+                      <a:round/>
+                      <a:headEnd len="sm" w="sm" type="none"/>
+                      <a:tailEnd len="sm" w="sm" type="none"/>
+                    </a:lnB>
+                    <a:solidFill>
+                      <a:srgbClr val="F9FAFB"/>
+                    </a:solidFill>
+                  </a:tcPr>
+                </a:tc>
+                <a:tc>
+                  <a:txBody>
+                    <a:bodyPr/>
+                    <a:lstStyle/>
+                    <a:p>
+                      <a:pPr indent="0" lvl="0" marL="0" rtl="0" algn="l">
+                        <a:lnSpc>
+                          <a:spcPct val="115000"/>
+                        </a:lnSpc>
+                        <a:spcBef>
+                          <a:spcPts val="0"/>
+                        </a:spcBef>
+                        <a:spcAft>
+                          <a:spcPts val="0"/>
+                        </a:spcAft>
+                        <a:buNone/>
+                      </a:pPr>
+                      <a:r>
+                        <a:rPr lang="en-US" sz="1100">
+                          <a:latin typeface="Calibri"/>
+                          <a:ea typeface="Calibri"/>
+                          <a:cs typeface="Calibri"/>
+                          <a:sym typeface="Calibri"/>
+                        </a:rPr>
+                        <a:t>Épica 1: Administración Global</a:t>
+                      </a:r>
+                      <a:endParaRPr sz="1100">
+                        <a:latin typeface="Calibri"/>
+                        <a:ea typeface="Calibri"/>
+                        <a:cs typeface="Calibri"/>
+                        <a:sym typeface="Calibri"/>
+                      </a:endParaRPr>
+                    </a:p>
+                  </a:txBody>
+                  <a:tcPr marT="0" marB="0" marR="25400" marL="25400">
+                    <a:lnL cap="flat" cmpd="sng" w="9525">
+                      <a:solidFill>
+                        <a:srgbClr val="CCCCCC"/>
+                      </a:solidFill>
+                      <a:prstDash val="solid"/>
+                      <a:round/>
+                      <a:headEnd len="sm" w="sm" type="none"/>
+                      <a:tailEnd len="sm" w="sm" type="none"/>
+                    </a:lnL>
+                    <a:lnR cap="flat" cmpd="sng" w="9525">
+                      <a:solidFill>
+                        <a:srgbClr val="CCCCCC"/>
+                      </a:solidFill>
+                      <a:prstDash val="solid"/>
+                      <a:round/>
+                      <a:headEnd len="sm" w="sm" type="none"/>
+                      <a:tailEnd len="sm" w="sm" type="none"/>
+                    </a:lnR>
+                    <a:lnT cap="flat" cmpd="sng" w="9525">
+                      <a:solidFill>
+                        <a:srgbClr val="CCCCCC"/>
+                      </a:solidFill>
+                      <a:prstDash val="solid"/>
+                      <a:round/>
+                      <a:headEnd len="sm" w="sm" type="none"/>
+                      <a:tailEnd len="sm" w="sm" type="none"/>
+                    </a:lnT>
+                    <a:lnB cap="flat" cmpd="sng" w="9525">
+                      <a:solidFill>
+                        <a:srgbClr val="CCCCCC"/>
+                      </a:solidFill>
+                      <a:prstDash val="solid"/>
+                      <a:round/>
+                      <a:headEnd len="sm" w="sm" type="none"/>
+                      <a:tailEnd len="sm" w="sm" type="none"/>
+                    </a:lnB>
+                    <a:solidFill>
+                      <a:srgbClr val="F9FAFB"/>
+                    </a:solidFill>
+                  </a:tcPr>
+                </a:tc>
+                <a:tc>
+                  <a:txBody>
+                    <a:bodyPr/>
+                    <a:lstStyle/>
+                    <a:p>
+                      <a:pPr indent="0" lvl="0" marL="0" rtl="0" algn="l">
+                        <a:lnSpc>
+                          <a:spcPct val="115000"/>
+                        </a:lnSpc>
+                        <a:spcBef>
+                          <a:spcPts val="0"/>
+                        </a:spcBef>
+                        <a:spcAft>
+                          <a:spcPts val="0"/>
+                        </a:spcAft>
+                        <a:buNone/>
+                      </a:pPr>
+                      <a:r>
+                        <a:rPr lang="en-US" sz="1100">
+                          <a:latin typeface="Calibri"/>
+                          <a:ea typeface="Calibri"/>
+                          <a:cs typeface="Calibri"/>
+                          <a:sym typeface="Calibri"/>
+                        </a:rPr>
+                        <a:t>Creación y Administración Global de Empresa</a:t>
+                      </a:r>
+                      <a:endParaRPr sz="1100">
+                        <a:latin typeface="Calibri"/>
+                        <a:ea typeface="Calibri"/>
+                        <a:cs typeface="Calibri"/>
+                        <a:sym typeface="Calibri"/>
+                      </a:endParaRPr>
+                    </a:p>
+                  </a:txBody>
+                  <a:tcPr marT="0" marB="0" marR="25400" marL="25400">
+                    <a:lnL cap="flat" cmpd="sng" w="9525">
+                      <a:solidFill>
+                        <a:srgbClr val="CCCCCC"/>
+                      </a:solidFill>
+                      <a:prstDash val="solid"/>
+                      <a:round/>
+                      <a:headEnd len="sm" w="sm" type="none"/>
+                      <a:tailEnd len="sm" w="sm" type="none"/>
+                    </a:lnL>
+                    <a:lnR cap="flat" cmpd="sng" w="9525">
+                      <a:solidFill>
+                        <a:srgbClr val="CCCCCC"/>
+                      </a:solidFill>
+                      <a:prstDash val="solid"/>
+                      <a:round/>
+                      <a:headEnd len="sm" w="sm" type="none"/>
+                      <a:tailEnd len="sm" w="sm" type="none"/>
+                    </a:lnR>
+                    <a:lnT cap="flat" cmpd="sng" w="9525">
+                      <a:solidFill>
+                        <a:srgbClr val="CCCCCC"/>
+                      </a:solidFill>
+                      <a:prstDash val="solid"/>
+                      <a:round/>
+                      <a:headEnd len="sm" w="sm" type="none"/>
+                      <a:tailEnd len="sm" w="sm" type="none"/>
+                    </a:lnT>
+                    <a:lnB cap="flat" cmpd="sng" w="9525">
+                      <a:solidFill>
+                        <a:srgbClr val="CCCCCC"/>
+                      </a:solidFill>
+                      <a:prstDash val="solid"/>
+                      <a:round/>
+                      <a:headEnd len="sm" w="sm" type="none"/>
+                      <a:tailEnd len="sm" w="sm" type="none"/>
+                    </a:lnB>
+                    <a:solidFill>
+                      <a:srgbClr val="F9FAFB"/>
+                    </a:solidFill>
+                  </a:tcPr>
+                </a:tc>
+                <a:tc>
+                  <a:txBody>
+                    <a:bodyPr/>
+                    <a:lstStyle/>
+                    <a:p>
+                      <a:pPr indent="0" lvl="0" marL="0" rtl="0" algn="l">
+                        <a:lnSpc>
+                          <a:spcPct val="115000"/>
+                        </a:lnSpc>
+                        <a:spcBef>
+                          <a:spcPts val="0"/>
+                        </a:spcBef>
+                        <a:spcAft>
+                          <a:spcPts val="0"/>
+                        </a:spcAft>
+                        <a:buNone/>
+                      </a:pPr>
+                      <a:r>
+                        <a:rPr lang="en-US" sz="1100">
+                          <a:latin typeface="Calibri"/>
+                          <a:ea typeface="Calibri"/>
+                          <a:cs typeface="Calibri"/>
+                          <a:sym typeface="Calibri"/>
+                        </a:rPr>
+                        <a:t>Staff BackToMe</a:t>
+                      </a:r>
+                      <a:endParaRPr sz="1100">
+                        <a:latin typeface="Calibri"/>
+                        <a:ea typeface="Calibri"/>
+                        <a:cs typeface="Calibri"/>
+                        <a:sym typeface="Calibri"/>
+                      </a:endParaRPr>
+                    </a:p>
+                  </a:txBody>
+                  <a:tcPr marT="0" marB="0" marR="25400" marL="25400">
+                    <a:lnL cap="flat" cmpd="sng" w="9525">
+                      <a:solidFill>
+                        <a:srgbClr val="CCCCCC"/>
+                      </a:solidFill>
+                      <a:prstDash val="solid"/>
+                      <a:round/>
+                      <a:headEnd len="sm" w="sm" type="none"/>
+                      <a:tailEnd len="sm" w="sm" type="none"/>
+                    </a:lnL>
+                    <a:lnR cap="flat" cmpd="sng" w="9525">
+                      <a:solidFill>
+                        <a:srgbClr val="CCCCCC"/>
+                      </a:solidFill>
+                      <a:prstDash val="solid"/>
+                      <a:round/>
+                      <a:headEnd len="sm" w="sm" type="none"/>
+                      <a:tailEnd len="sm" w="sm" type="none"/>
+                    </a:lnR>
+                    <a:lnT cap="flat" cmpd="sng" w="9525">
+                      <a:solidFill>
+                        <a:srgbClr val="CCCCCC"/>
+                      </a:solidFill>
+                      <a:prstDash val="solid"/>
+                      <a:round/>
+                      <a:headEnd len="sm" w="sm" type="none"/>
+                      <a:tailEnd len="sm" w="sm" type="none"/>
+                    </a:lnT>
+                    <a:lnB cap="flat" cmpd="sng" w="9525">
+                      <a:solidFill>
+                        <a:srgbClr val="CCCCCC"/>
+                      </a:solidFill>
+                      <a:prstDash val="solid"/>
+                      <a:round/>
+                      <a:headEnd len="sm" w="sm" type="none"/>
+                      <a:tailEnd len="sm" w="sm" type="none"/>
+                    </a:lnB>
+                    <a:solidFill>
+                      <a:srgbClr val="F9FAFB"/>
+                    </a:solidFill>
+                  </a:tcPr>
+                </a:tc>
+                <a:tc>
+                  <a:txBody>
+                    <a:bodyPr/>
+                    <a:lstStyle/>
+                    <a:p>
+                      <a:pPr indent="0" lvl="0" marL="0" rtl="0" algn="ctr">
+                        <a:lnSpc>
+                          <a:spcPct val="115000"/>
+                        </a:lnSpc>
+                        <a:spcBef>
+                          <a:spcPts val="0"/>
+                        </a:spcBef>
+                        <a:spcAft>
+                          <a:spcPts val="0"/>
+                        </a:spcAft>
+                        <a:buNone/>
+                      </a:pPr>
+                      <a:r>
+                        <a:rPr lang="en-US" sz="1100">
+                          <a:latin typeface="Calibri"/>
+                          <a:ea typeface="Calibri"/>
+                          <a:cs typeface="Calibri"/>
+                          <a:sym typeface="Calibri"/>
+                        </a:rPr>
+                        <a:t>Alta</a:t>
+                      </a:r>
+                      <a:endParaRPr sz="1100">
+                        <a:latin typeface="Calibri"/>
+                        <a:ea typeface="Calibri"/>
+                        <a:cs typeface="Calibri"/>
+                        <a:sym typeface="Calibri"/>
+                      </a:endParaRPr>
+                    </a:p>
+                  </a:txBody>
+                  <a:tcPr marT="0" marB="0" marR="25400" marL="25400">
+                    <a:lnL cap="flat" cmpd="sng" w="9525">
+                      <a:solidFill>
+                        <a:srgbClr val="CCCCCC"/>
+                      </a:solidFill>
+                      <a:prstDash val="solid"/>
+                      <a:round/>
+                      <a:headEnd len="sm" w="sm" type="none"/>
+                      <a:tailEnd len="sm" w="sm" type="none"/>
+                    </a:lnL>
+                    <a:lnR cap="flat" cmpd="sng" w="9525">
+                      <a:solidFill>
+                        <a:srgbClr val="CCCCCC"/>
+                      </a:solidFill>
+                      <a:prstDash val="solid"/>
+                      <a:round/>
+                      <a:headEnd len="sm" w="sm" type="none"/>
+                      <a:tailEnd len="sm" w="sm" type="none"/>
+                    </a:lnR>
+                    <a:lnT cap="flat" cmpd="sng" w="9525">
+                      <a:solidFill>
+                        <a:srgbClr val="CCCCCC"/>
+                      </a:solidFill>
+                      <a:prstDash val="solid"/>
+                      <a:round/>
+                      <a:headEnd len="sm" w="sm" type="none"/>
+                      <a:tailEnd len="sm" w="sm" type="none"/>
+                    </a:lnT>
+                    <a:lnB cap="flat" cmpd="sng" w="9525">
+                      <a:solidFill>
+                        <a:srgbClr val="CCCCCC"/>
+                      </a:solidFill>
+                      <a:prstDash val="solid"/>
+                      <a:round/>
+                      <a:headEnd len="sm" w="sm" type="none"/>
+                      <a:tailEnd len="sm" w="sm" type="none"/>
+                    </a:lnB>
+                    <a:solidFill>
+                      <a:srgbClr val="F9FAFB"/>
+                    </a:solidFill>
+                  </a:tcPr>
+                </a:tc>
+                <a:tc>
+                  <a:txBody>
+                    <a:bodyPr/>
+                    <a:lstStyle/>
+                    <a:p>
+                      <a:pPr indent="0" lvl="0" marL="0" rtl="0" algn="ctr">
+                        <a:lnSpc>
+                          <a:spcPct val="115000"/>
+                        </a:lnSpc>
+                        <a:spcBef>
+                          <a:spcPts val="0"/>
+                        </a:spcBef>
+                        <a:spcAft>
+                          <a:spcPts val="0"/>
+                        </a:spcAft>
+                        <a:buNone/>
+                      </a:pPr>
+                      <a:r>
+                        <a:rPr b="1" lang="en-US" sz="1100">
+                          <a:latin typeface="Calibri"/>
+                          <a:ea typeface="Calibri"/>
+                          <a:cs typeface="Calibri"/>
+                          <a:sym typeface="Calibri"/>
+                        </a:rPr>
+                        <a:t>5</a:t>
+                      </a:r>
+                      <a:endParaRPr sz="1100">
+                        <a:latin typeface="Calibri"/>
+                        <a:ea typeface="Calibri"/>
+                        <a:cs typeface="Calibri"/>
+                        <a:sym typeface="Calibri"/>
+                      </a:endParaRPr>
+                    </a:p>
+                  </a:txBody>
+                  <a:tcPr marT="0" marB="0" marR="25400" marL="25400">
+                    <a:lnL cap="flat" cmpd="sng" w="9525">
+                      <a:solidFill>
+                        <a:srgbClr val="CCCCCC"/>
+                      </a:solidFill>
+                      <a:prstDash val="solid"/>
+                      <a:round/>
+                      <a:headEnd len="sm" w="sm" type="none"/>
+                      <a:tailEnd len="sm" w="sm" type="none"/>
+                    </a:lnL>
+                    <a:lnR cap="flat" cmpd="sng" w="9525">
+                      <a:solidFill>
+                        <a:srgbClr val="CCCCCC"/>
+                      </a:solidFill>
+                      <a:prstDash val="solid"/>
+                      <a:round/>
+                      <a:headEnd len="sm" w="sm" type="none"/>
+                      <a:tailEnd len="sm" w="sm" type="none"/>
+                    </a:lnR>
+                    <a:lnT cap="flat" cmpd="sng" w="9525">
+                      <a:solidFill>
+                        <a:srgbClr val="CCCCCC"/>
+                      </a:solidFill>
+                      <a:prstDash val="solid"/>
+                      <a:round/>
+                      <a:headEnd len="sm" w="sm" type="none"/>
+                      <a:tailEnd len="sm" w="sm" type="none"/>
+                    </a:lnT>
+                    <a:lnB cap="flat" cmpd="sng" w="9525">
+                      <a:solidFill>
+                        <a:srgbClr val="CCCCCC"/>
+                      </a:solidFill>
+                      <a:prstDash val="solid"/>
+                      <a:round/>
+                      <a:headEnd len="sm" w="sm" type="none"/>
+                      <a:tailEnd len="sm" w="sm" type="none"/>
+                    </a:lnB>
+                    <a:solidFill>
+                      <a:srgbClr val="F9FAFB"/>
+                    </a:solidFill>
+                  </a:tcPr>
+                </a:tc>
+                <a:tc>
+                  <a:txBody>
+                    <a:bodyPr/>
+                    <a:lstStyle/>
+                    <a:p>
+                      <a:pPr indent="0" lvl="0" marL="0" rtl="0" algn="ctr">
+                        <a:lnSpc>
+                          <a:spcPct val="115000"/>
+                        </a:lnSpc>
+                        <a:spcBef>
+                          <a:spcPts val="0"/>
+                        </a:spcBef>
+                        <a:spcAft>
+                          <a:spcPts val="0"/>
+                        </a:spcAft>
+                        <a:buNone/>
+                      </a:pPr>
+                      <a:r>
+                        <a:rPr lang="en-US" sz="1100">
+                          <a:latin typeface="Calibri"/>
+                          <a:ea typeface="Calibri"/>
+                          <a:cs typeface="Calibri"/>
+                          <a:sym typeface="Calibri"/>
+                        </a:rPr>
+                        <a:t>Sprint 1</a:t>
+                      </a:r>
+                      <a:endParaRPr sz="1100">
+                        <a:latin typeface="Calibri"/>
+                        <a:ea typeface="Calibri"/>
+                        <a:cs typeface="Calibri"/>
+                        <a:sym typeface="Calibri"/>
+                      </a:endParaRPr>
+                    </a:p>
+                  </a:txBody>
+                  <a:tcPr marT="0" marB="0" marR="25400" marL="25400">
+                    <a:lnL cap="flat" cmpd="sng" w="9525">
+                      <a:solidFill>
+                        <a:srgbClr val="CCCCCC"/>
+                      </a:solidFill>
+                      <a:prstDash val="solid"/>
+                      <a:round/>
+                      <a:headEnd len="sm" w="sm" type="none"/>
+                      <a:tailEnd len="sm" w="sm" type="none"/>
+                    </a:lnL>
+                    <a:lnR cap="flat" cmpd="sng" w="9525">
+                      <a:solidFill>
+                        <a:srgbClr val="CCCCCC"/>
+                      </a:solidFill>
+                      <a:prstDash val="solid"/>
+                      <a:round/>
+                      <a:headEnd len="sm" w="sm" type="none"/>
+                      <a:tailEnd len="sm" w="sm" type="none"/>
+                    </a:lnR>
+                    <a:lnT cap="flat" cmpd="sng" w="9525">
+                      <a:solidFill>
+                        <a:srgbClr val="CCCCCC"/>
+                      </a:solidFill>
+                      <a:prstDash val="solid"/>
+                      <a:round/>
+                      <a:headEnd len="sm" w="sm" type="none"/>
+                      <a:tailEnd len="sm" w="sm" type="none"/>
+                    </a:lnT>
+                    <a:lnB cap="flat" cmpd="sng" w="9525">
+                      <a:solidFill>
+                        <a:srgbClr val="CCCCCC"/>
+                      </a:solidFill>
+                      <a:prstDash val="solid"/>
+                      <a:round/>
+                      <a:headEnd len="sm" w="sm" type="none"/>
+                      <a:tailEnd len="sm" w="sm" type="none"/>
+                    </a:lnB>
+                    <a:solidFill>
+                      <a:srgbClr val="F9FAFB"/>
+                    </a:solidFill>
+                  </a:tcPr>
+                </a:tc>
+                <a:tc>
+                  <a:txBody>
+                    <a:bodyPr/>
+                    <a:lstStyle/>
+                    <a:p>
+                      <a:pPr indent="0" lvl="0" marL="0" rtl="0" algn="ctr">
+                        <a:lnSpc>
+                          <a:spcPct val="115000"/>
+                        </a:lnSpc>
+                        <a:spcBef>
+                          <a:spcPts val="0"/>
+                        </a:spcBef>
+                        <a:spcAft>
+                          <a:spcPts val="0"/>
+                        </a:spcAft>
+                        <a:buNone/>
+                      </a:pPr>
+                      <a:r>
+                        <a:rPr lang="en-US" sz="1100">
+                          <a:latin typeface="Calibri"/>
+                          <a:ea typeface="Calibri"/>
+                          <a:cs typeface="Calibri"/>
+                          <a:sym typeface="Calibri"/>
+                        </a:rPr>
+                        <a:t>Pendiente</a:t>
+                      </a:r>
+                      <a:endParaRPr sz="1100">
+                        <a:latin typeface="Calibri"/>
+                        <a:ea typeface="Calibri"/>
+                        <a:cs typeface="Calibri"/>
+                        <a:sym typeface="Calibri"/>
+                      </a:endParaRPr>
+                    </a:p>
+                  </a:txBody>
+                  <a:tcPr marT="0" marB="0" marR="25400" marL="25400">
+                    <a:lnL cap="flat" cmpd="sng" w="9525">
+                      <a:solidFill>
+                        <a:srgbClr val="CCCCCC"/>
+                      </a:solidFill>
+                      <a:prstDash val="solid"/>
+                      <a:round/>
+                      <a:headEnd len="sm" w="sm" type="none"/>
+                      <a:tailEnd len="sm" w="sm" type="none"/>
+                    </a:lnL>
+                    <a:lnR cap="flat" cmpd="sng" w="9525">
+                      <a:solidFill>
+                        <a:srgbClr val="CCCCCC"/>
+                      </a:solidFill>
+                      <a:prstDash val="solid"/>
+                      <a:round/>
+                      <a:headEnd len="sm" w="sm" type="none"/>
+                      <a:tailEnd len="sm" w="sm" type="none"/>
+                    </a:lnR>
+                    <a:lnT cap="flat" cmpd="sng" w="9525">
+                      <a:solidFill>
+                        <a:srgbClr val="CCCCCC"/>
+                      </a:solidFill>
+                      <a:prstDash val="solid"/>
+                      <a:round/>
+                      <a:headEnd len="sm" w="sm" type="none"/>
+                      <a:tailEnd len="sm" w="sm" type="none"/>
+                    </a:lnT>
+                    <a:lnB cap="flat" cmpd="sng" w="9525">
+                      <a:solidFill>
+                        <a:srgbClr val="CCCCCC"/>
+                      </a:solidFill>
+                      <a:prstDash val="solid"/>
+                      <a:round/>
+                      <a:headEnd len="sm" w="sm" type="none"/>
+                      <a:tailEnd len="sm" w="sm" type="none"/>
+                    </a:lnB>
+                    <a:solidFill>
+                      <a:srgbClr val="F9FAFB"/>
+                    </a:solidFill>
+                  </a:tcPr>
+                </a:tc>
+                <a:tc>
+                  <a:txBody>
+                    <a:bodyPr/>
+                    <a:lstStyle/>
+                    <a:p>
+                      <a:pPr indent="0" lvl="0" marL="0" rtl="0" algn="l">
+                        <a:lnSpc>
+                          <a:spcPct val="115000"/>
+                        </a:lnSpc>
+                        <a:spcBef>
+                          <a:spcPts val="0"/>
+                        </a:spcBef>
+                        <a:spcAft>
+                          <a:spcPts val="0"/>
+                        </a:spcAft>
+                        <a:buNone/>
+                      </a:pPr>
+                      <a:r>
+                        <a:rPr lang="en-US" sz="1100">
+                          <a:latin typeface="Calibri"/>
+                          <a:ea typeface="Calibri"/>
+                          <a:cs typeface="Calibri"/>
+                          <a:sym typeface="Calibri"/>
+                        </a:rPr>
+                        <a:t>COMO Staff de BackToMe</a:t>
+                      </a:r>
+                      <a:endParaRPr sz="1100">
+                        <a:latin typeface="Calibri"/>
+                        <a:ea typeface="Calibri"/>
+                        <a:cs typeface="Calibri"/>
+                        <a:sym typeface="Calibri"/>
+                      </a:endParaRPr>
+                    </a:p>
+                    <a:p>
+                      <a:pPr indent="0" lvl="0" marL="0" rtl="0" algn="l">
+                        <a:lnSpc>
+                          <a:spcPct val="115000"/>
+                        </a:lnSpc>
+                        <a:spcBef>
+                          <a:spcPts val="0"/>
+                        </a:spcBef>
+                        <a:spcAft>
+                          <a:spcPts val="0"/>
+                        </a:spcAft>
+                        <a:buNone/>
+                      </a:pPr>
+                      <a:r>
+                        <a:rPr lang="en-US" sz="1100">
+                          <a:latin typeface="Calibri"/>
+                          <a:ea typeface="Calibri"/>
+                          <a:cs typeface="Calibri"/>
+                          <a:sym typeface="Calibri"/>
+                        </a:rPr>
+                        <a:t>QUIERO crear, editar y listar las empresas en la plataforma</a:t>
+                      </a:r>
+                      <a:endParaRPr sz="1100">
+                        <a:latin typeface="Calibri"/>
+                        <a:ea typeface="Calibri"/>
+                        <a:cs typeface="Calibri"/>
+                        <a:sym typeface="Calibri"/>
+                      </a:endParaRPr>
+                    </a:p>
+                    <a:p>
+                      <a:pPr indent="0" lvl="0" marL="0" rtl="0" algn="l">
+                        <a:lnSpc>
+                          <a:spcPct val="115000"/>
+                        </a:lnSpc>
+                        <a:spcBef>
+                          <a:spcPts val="0"/>
+                        </a:spcBef>
+                        <a:spcAft>
+                          <a:spcPts val="0"/>
+                        </a:spcAft>
+                        <a:buNone/>
+                      </a:pPr>
+                      <a:r>
+                        <a:rPr lang="en-US" sz="1100">
+                          <a:latin typeface="Calibri"/>
+                          <a:ea typeface="Calibri"/>
+                          <a:cs typeface="Calibri"/>
+                          <a:sym typeface="Calibri"/>
+                        </a:rPr>
+                        <a:t>PARA habilitar nuevos clientes B2B en el sistema SaaS.</a:t>
+                      </a:r>
+                      <a:endParaRPr sz="1100">
+                        <a:latin typeface="Calibri"/>
+                        <a:ea typeface="Calibri"/>
+                        <a:cs typeface="Calibri"/>
+                        <a:sym typeface="Calibri"/>
+                      </a:endParaRPr>
+                    </a:p>
+                  </a:txBody>
+                  <a:tcPr marT="0" marB="0" marR="25400" marL="25400">
+                    <a:lnL cap="flat" cmpd="sng" w="9525">
+                      <a:solidFill>
+                        <a:srgbClr val="CCCCCC"/>
+                      </a:solidFill>
+                      <a:prstDash val="solid"/>
+                      <a:round/>
+                      <a:headEnd len="sm" w="sm" type="none"/>
+                      <a:tailEnd len="sm" w="sm" type="none"/>
+                    </a:lnL>
+                    <a:lnR cap="flat" cmpd="sng" w="9525">
+                      <a:solidFill>
+                        <a:srgbClr val="CCCCCC"/>
+                      </a:solidFill>
+                      <a:prstDash val="solid"/>
+                      <a:round/>
+                      <a:headEnd len="sm" w="sm" type="none"/>
+                      <a:tailEnd len="sm" w="sm" type="none"/>
+                    </a:lnR>
+                    <a:lnT cap="flat" cmpd="sng" w="9525">
+                      <a:solidFill>
+                        <a:srgbClr val="CCCCCC"/>
+                      </a:solidFill>
+                      <a:prstDash val="solid"/>
+                      <a:round/>
+                      <a:headEnd len="sm" w="sm" type="none"/>
+                      <a:tailEnd len="sm" w="sm" type="none"/>
+                    </a:lnT>
+                    <a:lnB cap="flat" cmpd="sng" w="9525">
+                      <a:solidFill>
+                        <a:srgbClr val="CCCCCC"/>
+                      </a:solidFill>
+                      <a:prstDash val="solid"/>
+                      <a:round/>
+                      <a:headEnd len="sm" w="sm" type="none"/>
+                      <a:tailEnd len="sm" w="sm" type="none"/>
+                    </a:lnB>
+                    <a:solidFill>
+                      <a:srgbClr val="F9FAFB"/>
+                    </a:solidFill>
+                  </a:tcPr>
+                </a:tc>
+                <a:tc>
+                  <a:txBody>
+                    <a:bodyPr/>
+                    <a:lstStyle/>
+                    <a:p>
+                      <a:pPr indent="0" lvl="0" marL="0" rtl="0" algn="l">
+                        <a:lnSpc>
+                          <a:spcPct val="115000"/>
+                        </a:lnSpc>
+                        <a:spcBef>
+                          <a:spcPts val="0"/>
+                        </a:spcBef>
+                        <a:spcAft>
+                          <a:spcPts val="0"/>
+                        </a:spcAft>
+                        <a:buNone/>
+                      </a:pPr>
+                      <a:r>
+                        <a:rPr lang="en-US" sz="1100">
+                          <a:latin typeface="Calibri"/>
+                          <a:ea typeface="Calibri"/>
+                          <a:cs typeface="Calibri"/>
+                          <a:sym typeface="Calibri"/>
+                        </a:rPr>
+                        <a:t>1. Formulario UI para CRUD de empresas B2B.</a:t>
+                      </a:r>
+                      <a:endParaRPr sz="1100">
+                        <a:latin typeface="Calibri"/>
+                        <a:ea typeface="Calibri"/>
+                        <a:cs typeface="Calibri"/>
+                        <a:sym typeface="Calibri"/>
+                      </a:endParaRPr>
+                    </a:p>
+                    <a:p>
+                      <a:pPr indent="0" lvl="0" marL="0" rtl="0" algn="l">
+                        <a:lnSpc>
+                          <a:spcPct val="115000"/>
+                        </a:lnSpc>
+                        <a:spcBef>
+                          <a:spcPts val="0"/>
+                        </a:spcBef>
+                        <a:spcAft>
+                          <a:spcPts val="0"/>
+                        </a:spcAft>
+                        <a:buNone/>
+                      </a:pPr>
+                      <a:r>
+                        <a:rPr lang="en-US" sz="1100">
+                          <a:latin typeface="Calibri"/>
+                          <a:ea typeface="Calibri"/>
+                          <a:cs typeface="Calibri"/>
+                          <a:sym typeface="Calibri"/>
+                        </a:rPr>
+                        <a:t>2. Validación obligatoria de razón social, tenant_id y estado.</a:t>
+                      </a:r>
+                      <a:endParaRPr sz="1100">
+                        <a:latin typeface="Calibri"/>
+                        <a:ea typeface="Calibri"/>
+                        <a:cs typeface="Calibri"/>
+                        <a:sym typeface="Calibri"/>
+                      </a:endParaRPr>
+                    </a:p>
+                    <a:p>
+                      <a:pPr indent="0" lvl="0" marL="0" rtl="0" algn="l">
+                        <a:lnSpc>
+                          <a:spcPct val="115000"/>
+                        </a:lnSpc>
+                        <a:spcBef>
+                          <a:spcPts val="0"/>
+                        </a:spcBef>
+                        <a:spcAft>
+                          <a:spcPts val="0"/>
+                        </a:spcAft>
+                        <a:buNone/>
+                      </a:pPr>
+                      <a:r>
+                        <a:rPr lang="en-US" sz="1100">
+                          <a:latin typeface="Calibri"/>
+                          <a:ea typeface="Calibri"/>
+                          <a:cs typeface="Calibri"/>
+                          <a:sym typeface="Calibri"/>
+                        </a:rPr>
+                        <a:t>3. Vista en tabla con filtro por empresa y sus sedes.</a:t>
+                      </a:r>
+                      <a:endParaRPr sz="1100">
+                        <a:latin typeface="Calibri"/>
+                        <a:ea typeface="Calibri"/>
+                        <a:cs typeface="Calibri"/>
+                        <a:sym typeface="Calibri"/>
+                      </a:endParaRPr>
+                    </a:p>
+                  </a:txBody>
+                  <a:tcPr marT="0" marB="0" marR="25400" marL="25400">
+                    <a:lnL cap="flat" cmpd="sng" w="9525">
+                      <a:solidFill>
+                        <a:srgbClr val="CCCCCC"/>
+                      </a:solidFill>
+                      <a:prstDash val="solid"/>
+                      <a:round/>
+                      <a:headEnd len="sm" w="sm" type="none"/>
+                      <a:tailEnd len="sm" w="sm" type="none"/>
+                    </a:lnL>
+                    <a:lnR cap="flat" cmpd="sng" w="9525">
+                      <a:solidFill>
+                        <a:srgbClr val="CCCCCC"/>
+                      </a:solidFill>
+                      <a:prstDash val="solid"/>
+                      <a:round/>
+                      <a:headEnd len="sm" w="sm" type="none"/>
+                      <a:tailEnd len="sm" w="sm" type="none"/>
+                    </a:lnR>
+                    <a:lnT cap="flat" cmpd="sng" w="9525">
+                      <a:solidFill>
+                        <a:srgbClr val="CCCCCC"/>
+                      </a:solidFill>
+                      <a:prstDash val="solid"/>
+                      <a:round/>
+                      <a:headEnd len="sm" w="sm" type="none"/>
+                      <a:tailEnd len="sm" w="sm" type="none"/>
+                    </a:lnT>
+                    <a:lnB cap="flat" cmpd="sng" w="9525">
+                      <a:solidFill>
+                        <a:srgbClr val="CCCCCC"/>
+                      </a:solidFill>
+                      <a:prstDash val="solid"/>
+                      <a:round/>
+                      <a:headEnd len="sm" w="sm" type="none"/>
+                      <a:tailEnd len="sm" w="sm" type="none"/>
+                    </a:lnB>
+                    <a:solidFill>
+                      <a:srgbClr val="F9FAFB"/>
+                    </a:solidFill>
+                  </a:tcPr>
+                </a:tc>
+                <a:tc>
+                  <a:txBody>
+                    <a:bodyPr/>
+                    <a:lstStyle/>
+                    <a:p>
+                      <a:pPr indent="0" lvl="0" marL="0" rtl="0" algn="l">
+                        <a:lnSpc>
+                          <a:spcPct val="115000"/>
+                        </a:lnSpc>
+                        <a:spcBef>
+                          <a:spcPts val="0"/>
+                        </a:spcBef>
+                        <a:spcAft>
+                          <a:spcPts val="0"/>
+                        </a:spcAft>
+                        <a:buNone/>
+                      </a:pPr>
+                      <a:r>
+                        <a:rPr lang="en-US" sz="1100">
+                          <a:latin typeface="Calibri"/>
+                          <a:ea typeface="Calibri"/>
+                          <a:cs typeface="Calibri"/>
+                          <a:sym typeface="Calibri"/>
+                        </a:rPr>
+                        <a:t>1. Endpoints REST (/tenants) en NestJS con guard @Roles(Role.SUPER_ADMIN).</a:t>
+                      </a:r>
+                      <a:endParaRPr sz="1100">
+                        <a:latin typeface="Calibri"/>
+                        <a:ea typeface="Calibri"/>
+                        <a:cs typeface="Calibri"/>
+                        <a:sym typeface="Calibri"/>
+                      </a:endParaRPr>
+                    </a:p>
+                    <a:p>
+                      <a:pPr indent="0" lvl="0" marL="0" rtl="0" algn="l">
+                        <a:lnSpc>
+                          <a:spcPct val="115000"/>
+                        </a:lnSpc>
+                        <a:spcBef>
+                          <a:spcPts val="0"/>
+                        </a:spcBef>
+                        <a:spcAft>
+                          <a:spcPts val="0"/>
+                        </a:spcAft>
+                        <a:buNone/>
+                      </a:pPr>
+                      <a:r>
+                        <a:rPr lang="en-US" sz="1100">
+                          <a:latin typeface="Calibri"/>
+                          <a:ea typeface="Calibri"/>
+                          <a:cs typeface="Calibri"/>
+                          <a:sym typeface="Calibri"/>
+                        </a:rPr>
+                        <a:t>2. Esquema Supabase PostgreSQL con tenant_id como PK.</a:t>
+                      </a:r>
+                      <a:endParaRPr sz="1100">
+                        <a:latin typeface="Calibri"/>
+                        <a:ea typeface="Calibri"/>
+                        <a:cs typeface="Calibri"/>
+                        <a:sym typeface="Calibri"/>
+                      </a:endParaRPr>
+                    </a:p>
+                    <a:p>
+                      <a:pPr indent="0" lvl="0" marL="0" rtl="0" algn="l">
+                        <a:lnSpc>
+                          <a:spcPct val="115000"/>
+                        </a:lnSpc>
+                        <a:spcBef>
+                          <a:spcPts val="0"/>
+                        </a:spcBef>
+                        <a:spcAft>
+                          <a:spcPts val="0"/>
+                        </a:spcAft>
+                        <a:buNone/>
+                      </a:pPr>
+                      <a:r>
+                        <a:rPr lang="en-US" sz="1100">
+                          <a:latin typeface="Calibri"/>
+                          <a:ea typeface="Calibri"/>
+                          <a:cs typeface="Calibri"/>
+                          <a:sym typeface="Calibri"/>
+                        </a:rPr>
+                        <a:t>3. Componentes React/Astro en dashboard admin.</a:t>
+                      </a:r>
+                      <a:endParaRPr sz="1100">
+                        <a:latin typeface="Calibri"/>
+                        <a:ea typeface="Calibri"/>
+                        <a:cs typeface="Calibri"/>
+                        <a:sym typeface="Calibri"/>
+                      </a:endParaRPr>
+                    </a:p>
+                  </a:txBody>
+                  <a:tcPr marT="0" marB="0" marR="25400" marL="25400">
+                    <a:lnL cap="flat" cmpd="sng" w="9525">
+                      <a:solidFill>
+                        <a:srgbClr val="CCCCCC"/>
+                      </a:solidFill>
+                      <a:prstDash val="solid"/>
+                      <a:round/>
+                      <a:headEnd len="sm" w="sm" type="none"/>
+                      <a:tailEnd len="sm" w="sm" type="none"/>
+                    </a:lnL>
+                    <a:lnR cap="flat" cmpd="sng" w="9525">
+                      <a:solidFill>
+                        <a:srgbClr val="CCCCCC"/>
+                      </a:solidFill>
+                      <a:prstDash val="solid"/>
+                      <a:round/>
+                      <a:headEnd len="sm" w="sm" type="none"/>
+                      <a:tailEnd len="sm" w="sm" type="none"/>
+                    </a:lnR>
+                    <a:lnT cap="flat" cmpd="sng" w="9525">
+                      <a:solidFill>
+                        <a:srgbClr val="CCCCCC"/>
+                      </a:solidFill>
+                      <a:prstDash val="solid"/>
+                      <a:round/>
+                      <a:headEnd len="sm" w="sm" type="none"/>
+                      <a:tailEnd len="sm" w="sm" type="none"/>
+                    </a:lnT>
+                    <a:lnB cap="flat" cmpd="sng" w="9525">
+                      <a:solidFill>
+                        <a:srgbClr val="CCCCCC"/>
+                      </a:solidFill>
+                      <a:prstDash val="solid"/>
+                      <a:round/>
+                      <a:headEnd len="sm" w="sm" type="none"/>
+                      <a:tailEnd len="sm" w="sm" type="none"/>
+                    </a:lnB>
+                    <a:solidFill>
+                      <a:srgbClr val="F9FAFB"/>
+                    </a:solidFill>
+                  </a:tcPr>
+                </a:tc>
+              </a:tr>
+              <a:tr h="974850">
+                <a:tc>
+                  <a:txBody>
+                    <a:bodyPr/>
+                    <a:lstStyle/>
+                    <a:p>
+                      <a:pPr indent="0" lvl="0" marL="0" rtl="0" algn="ctr">
+                        <a:lnSpc>
+                          <a:spcPct val="115000"/>
+                        </a:lnSpc>
+                        <a:spcBef>
+                          <a:spcPts val="0"/>
+                        </a:spcBef>
+                        <a:spcAft>
+                          <a:spcPts val="0"/>
+                        </a:spcAft>
+                        <a:buNone/>
+                      </a:pPr>
+                      <a:r>
+                        <a:rPr b="1" lang="en-US" sz="1100">
+                          <a:latin typeface="Calibri"/>
+                          <a:ea typeface="Calibri"/>
+                          <a:cs typeface="Calibri"/>
+                          <a:sym typeface="Calibri"/>
+                        </a:rPr>
+                        <a:t>HU-02</a:t>
+                      </a:r>
+                      <a:endParaRPr sz="1100">
+                        <a:latin typeface="Calibri"/>
+                        <a:ea typeface="Calibri"/>
+                        <a:cs typeface="Calibri"/>
+                        <a:sym typeface="Calibri"/>
+                      </a:endParaRPr>
+                    </a:p>
+                  </a:txBody>
+                  <a:tcPr marT="0" marB="0" marR="25400" marL="25400">
+                    <a:lnL cap="flat" cmpd="sng" w="9525">
+                      <a:solidFill>
+                        <a:srgbClr val="D9D9D9"/>
+                      </a:solidFill>
+                      <a:prstDash val="solid"/>
+                      <a:round/>
+                      <a:headEnd len="sm" w="sm" type="none"/>
+                      <a:tailEnd len="sm" w="sm" type="none"/>
+                    </a:lnL>
+                    <a:lnR cap="flat" cmpd="sng" w="9525">
+                      <a:solidFill>
+                        <a:srgbClr val="CCCCCC"/>
+                      </a:solidFill>
+                      <a:prstDash val="solid"/>
+                      <a:round/>
+                      <a:headEnd len="sm" w="sm" type="none"/>
+                      <a:tailEnd len="sm" w="sm" type="none"/>
+                    </a:lnR>
+                    <a:lnT cap="flat" cmpd="sng" w="9525">
+                      <a:solidFill>
+                        <a:srgbClr val="CCCCCC"/>
+                      </a:solidFill>
+                      <a:prstDash val="solid"/>
+                      <a:round/>
+                      <a:headEnd len="sm" w="sm" type="none"/>
+                      <a:tailEnd len="sm" w="sm" type="none"/>
+                    </a:lnT>
+                    <a:lnB cap="flat" cmpd="sng" w="9525">
+                      <a:solidFill>
+                        <a:srgbClr val="CCCCCC"/>
+                      </a:solidFill>
+                      <a:prstDash val="solid"/>
+                      <a:round/>
+                      <a:headEnd len="sm" w="sm" type="none"/>
+                      <a:tailEnd len="sm" w="sm" type="none"/>
+                    </a:lnB>
+                  </a:tcPr>
+                </a:tc>
+                <a:tc>
+                  <a:txBody>
+                    <a:bodyPr/>
+                    <a:lstStyle/>
+                    <a:p>
+                      <a:pPr indent="0" lvl="0" marL="0" rtl="0" algn="l">
+                        <a:lnSpc>
+                          <a:spcPct val="115000"/>
+                        </a:lnSpc>
+                        <a:spcBef>
+                          <a:spcPts val="0"/>
+                        </a:spcBef>
+                        <a:spcAft>
+                          <a:spcPts val="0"/>
+                        </a:spcAft>
+                        <a:buNone/>
+                      </a:pPr>
+                      <a:r>
+                        <a:rPr lang="en-US" sz="1100">
+                          <a:latin typeface="Calibri"/>
+                          <a:ea typeface="Calibri"/>
+                          <a:cs typeface="Calibri"/>
+                          <a:sym typeface="Calibri"/>
+                        </a:rPr>
+                        <a:t>Épica 1: Administración Global</a:t>
+                      </a:r>
+                      <a:endParaRPr sz="1100">
+                        <a:latin typeface="Calibri"/>
+                        <a:ea typeface="Calibri"/>
+                        <a:cs typeface="Calibri"/>
+                        <a:sym typeface="Calibri"/>
+                      </a:endParaRPr>
+                    </a:p>
+                  </a:txBody>
+                  <a:tcPr marT="0" marB="0" marR="25400" marL="25400">
+                    <a:lnL cap="flat" cmpd="sng" w="9525">
+                      <a:solidFill>
+                        <a:srgbClr val="CCCCCC"/>
+                      </a:solidFill>
+                      <a:prstDash val="solid"/>
+                      <a:round/>
+                      <a:headEnd len="sm" w="sm" type="none"/>
+                      <a:tailEnd len="sm" w="sm" type="none"/>
+                    </a:lnL>
+                    <a:lnR cap="flat" cmpd="sng" w="9525">
+                      <a:solidFill>
+                        <a:srgbClr val="CCCCCC"/>
+                      </a:solidFill>
+                      <a:prstDash val="solid"/>
+                      <a:round/>
+                      <a:headEnd len="sm" w="sm" type="none"/>
+                      <a:tailEnd len="sm" w="sm" type="none"/>
+                    </a:lnR>
+                    <a:lnT cap="flat" cmpd="sng" w="9525">
+                      <a:solidFill>
+                        <a:srgbClr val="CCCCCC"/>
+                      </a:solidFill>
+                      <a:prstDash val="solid"/>
+                      <a:round/>
+                      <a:headEnd len="sm" w="sm" type="none"/>
+                      <a:tailEnd len="sm" w="sm" type="none"/>
+                    </a:lnT>
+                    <a:lnB cap="flat" cmpd="sng" w="9525">
+                      <a:solidFill>
+                        <a:srgbClr val="CCCCCC"/>
+                      </a:solidFill>
+                      <a:prstDash val="solid"/>
+                      <a:round/>
+                      <a:headEnd len="sm" w="sm" type="none"/>
+                      <a:tailEnd len="sm" w="sm" type="none"/>
+                    </a:lnB>
+                  </a:tcPr>
+                </a:tc>
+                <a:tc>
+                  <a:txBody>
+                    <a:bodyPr/>
+                    <a:lstStyle/>
+                    <a:p>
+                      <a:pPr indent="0" lvl="0" marL="0" rtl="0" algn="l">
+                        <a:lnSpc>
+                          <a:spcPct val="115000"/>
+                        </a:lnSpc>
+                        <a:spcBef>
+                          <a:spcPts val="0"/>
+                        </a:spcBef>
+                        <a:spcAft>
+                          <a:spcPts val="0"/>
+                        </a:spcAft>
+                        <a:buNone/>
+                      </a:pPr>
+                      <a:r>
+                        <a:rPr lang="en-US" sz="1100">
+                          <a:latin typeface="Calibri"/>
+                          <a:ea typeface="Calibri"/>
+                          <a:cs typeface="Calibri"/>
+                          <a:sym typeface="Calibri"/>
+                        </a:rPr>
+                        <a:t>Configuración de Branding e Identidad Visual por Empresa</a:t>
+                      </a:r>
+                      <a:endParaRPr sz="1100">
+                        <a:latin typeface="Calibri"/>
+                        <a:ea typeface="Calibri"/>
+                        <a:cs typeface="Calibri"/>
+                        <a:sym typeface="Calibri"/>
+                      </a:endParaRPr>
+                    </a:p>
+                  </a:txBody>
+                  <a:tcPr marT="0" marB="0" marR="25400" marL="25400">
+                    <a:lnL cap="flat" cmpd="sng" w="9525">
+                      <a:solidFill>
+                        <a:srgbClr val="CCCCCC"/>
+                      </a:solidFill>
+                      <a:prstDash val="solid"/>
+                      <a:round/>
+                      <a:headEnd len="sm" w="sm" type="none"/>
+                      <a:tailEnd len="sm" w="sm" type="none"/>
+                    </a:lnL>
+                    <a:lnR cap="flat" cmpd="sng" w="9525">
+                      <a:solidFill>
+                        <a:srgbClr val="CCCCCC"/>
+                      </a:solidFill>
+                      <a:prstDash val="solid"/>
+                      <a:round/>
+                      <a:headEnd len="sm" w="sm" type="none"/>
+                      <a:tailEnd len="sm" w="sm" type="none"/>
+                    </a:lnR>
+                    <a:lnT cap="flat" cmpd="sng" w="9525">
+                      <a:solidFill>
+                        <a:srgbClr val="CCCCCC"/>
+                      </a:solidFill>
+                      <a:prstDash val="solid"/>
+                      <a:round/>
+                      <a:headEnd len="sm" w="sm" type="none"/>
+                      <a:tailEnd len="sm" w="sm" type="none"/>
+                    </a:lnT>
+                    <a:lnB cap="flat" cmpd="sng" w="9525">
+                      <a:solidFill>
+                        <a:srgbClr val="CCCCCC"/>
+                      </a:solidFill>
+                      <a:prstDash val="solid"/>
+                      <a:round/>
+                      <a:headEnd len="sm" w="sm" type="none"/>
+                      <a:tailEnd len="sm" w="sm" type="none"/>
+                    </a:lnB>
+                  </a:tcPr>
+                </a:tc>
+                <a:tc>
+                  <a:txBody>
+                    <a:bodyPr/>
+                    <a:lstStyle/>
+                    <a:p>
+                      <a:pPr indent="0" lvl="0" marL="0" rtl="0" algn="l">
+                        <a:lnSpc>
+                          <a:spcPct val="115000"/>
+                        </a:lnSpc>
+                        <a:spcBef>
+                          <a:spcPts val="0"/>
+                        </a:spcBef>
+                        <a:spcAft>
+                          <a:spcPts val="0"/>
+                        </a:spcAft>
+                        <a:buNone/>
+                      </a:pPr>
+                      <a:r>
+                        <a:rPr lang="en-US" sz="1100">
+                          <a:latin typeface="Calibri"/>
+                          <a:ea typeface="Calibri"/>
+                          <a:cs typeface="Calibri"/>
+                          <a:sym typeface="Calibri"/>
+                        </a:rPr>
+                        <a:t>Staff BackToMe</a:t>
+                      </a:r>
+                      <a:endParaRPr sz="1100">
+                        <a:latin typeface="Calibri"/>
+                        <a:ea typeface="Calibri"/>
+                        <a:cs typeface="Calibri"/>
+                        <a:sym typeface="Calibri"/>
+                      </a:endParaRPr>
+                    </a:p>
+                  </a:txBody>
+                  <a:tcPr marT="0" marB="0" marR="25400" marL="25400">
+                    <a:lnL cap="flat" cmpd="sng" w="9525">
+                      <a:solidFill>
+                        <a:srgbClr val="CCCCCC"/>
+                      </a:solidFill>
+                      <a:prstDash val="solid"/>
+                      <a:round/>
+                      <a:headEnd len="sm" w="sm" type="none"/>
+                      <a:tailEnd len="sm" w="sm" type="none"/>
+                    </a:lnL>
+                    <a:lnR cap="flat" cmpd="sng" w="9525">
+                      <a:solidFill>
+                        <a:srgbClr val="CCCCCC"/>
+                      </a:solidFill>
+                      <a:prstDash val="solid"/>
+                      <a:round/>
+                      <a:headEnd len="sm" w="sm" type="none"/>
+                      <a:tailEnd len="sm" w="sm" type="none"/>
+                    </a:lnR>
+                    <a:lnT cap="flat" cmpd="sng" w="9525">
+                      <a:solidFill>
+                        <a:srgbClr val="CCCCCC"/>
+                      </a:solidFill>
+                      <a:prstDash val="solid"/>
+                      <a:round/>
+                      <a:headEnd len="sm" w="sm" type="none"/>
+                      <a:tailEnd len="sm" w="sm" type="none"/>
+                    </a:lnT>
+                    <a:lnB cap="flat" cmpd="sng" w="9525">
+                      <a:solidFill>
+                        <a:srgbClr val="CCCCCC"/>
+                      </a:solidFill>
+                      <a:prstDash val="solid"/>
+                      <a:round/>
+                      <a:headEnd len="sm" w="sm" type="none"/>
+                      <a:tailEnd len="sm" w="sm" type="none"/>
+                    </a:lnB>
+                  </a:tcPr>
+                </a:tc>
+                <a:tc>
+                  <a:txBody>
+                    <a:bodyPr/>
+                    <a:lstStyle/>
+                    <a:p>
+                      <a:pPr indent="0" lvl="0" marL="0" rtl="0" algn="ctr">
+                        <a:lnSpc>
+                          <a:spcPct val="115000"/>
+                        </a:lnSpc>
+                        <a:spcBef>
+                          <a:spcPts val="0"/>
+                        </a:spcBef>
+                        <a:spcAft>
+                          <a:spcPts val="0"/>
+                        </a:spcAft>
+                        <a:buNone/>
+                      </a:pPr>
+                      <a:r>
+                        <a:rPr lang="en-US" sz="1100">
+                          <a:latin typeface="Calibri"/>
+                          <a:ea typeface="Calibri"/>
+                          <a:cs typeface="Calibri"/>
+                          <a:sym typeface="Calibri"/>
+                        </a:rPr>
+                        <a:t>Media</a:t>
+                      </a:r>
+                      <a:endParaRPr sz="1100">
+                        <a:latin typeface="Calibri"/>
+                        <a:ea typeface="Calibri"/>
+                        <a:cs typeface="Calibri"/>
+                        <a:sym typeface="Calibri"/>
+                      </a:endParaRPr>
+                    </a:p>
+                  </a:txBody>
+                  <a:tcPr marT="0" marB="0" marR="25400" marL="25400">
+                    <a:lnL cap="flat" cmpd="sng" w="9525">
+                      <a:solidFill>
+                        <a:srgbClr val="CCCCCC"/>
+                      </a:solidFill>
+                      <a:prstDash val="solid"/>
+                      <a:round/>
+                      <a:headEnd len="sm" w="sm" type="none"/>
+                      <a:tailEnd len="sm" w="sm" type="none"/>
+                    </a:lnL>
+                    <a:lnR cap="flat" cmpd="sng" w="9525">
+                      <a:solidFill>
+                        <a:srgbClr val="CCCCCC"/>
+                      </a:solidFill>
+                      <a:prstDash val="solid"/>
+                      <a:round/>
+                      <a:headEnd len="sm" w="sm" type="none"/>
+                      <a:tailEnd len="sm" w="sm" type="none"/>
+                    </a:lnR>
+                    <a:lnT cap="flat" cmpd="sng" w="9525">
+                      <a:solidFill>
+                        <a:srgbClr val="CCCCCC"/>
+                      </a:solidFill>
+                      <a:prstDash val="solid"/>
+                      <a:round/>
+                      <a:headEnd len="sm" w="sm" type="none"/>
+                      <a:tailEnd len="sm" w="sm" type="none"/>
+                    </a:lnT>
+                    <a:lnB cap="flat" cmpd="sng" w="9525">
+                      <a:solidFill>
+                        <a:srgbClr val="CCCCCC"/>
+                      </a:solidFill>
+                      <a:prstDash val="solid"/>
+                      <a:round/>
+                      <a:headEnd len="sm" w="sm" type="none"/>
+                      <a:tailEnd len="sm" w="sm" type="none"/>
+                    </a:lnB>
+                  </a:tcPr>
+                </a:tc>
+                <a:tc>
+                  <a:txBody>
+                    <a:bodyPr/>
+                    <a:lstStyle/>
+                    <a:p>
+                      <a:pPr indent="0" lvl="0" marL="0" rtl="0" algn="ctr">
+                        <a:lnSpc>
+                          <a:spcPct val="115000"/>
+                        </a:lnSpc>
+                        <a:spcBef>
+                          <a:spcPts val="0"/>
+                        </a:spcBef>
+                        <a:spcAft>
+                          <a:spcPts val="0"/>
+                        </a:spcAft>
+                        <a:buNone/>
+                      </a:pPr>
+                      <a:r>
+                        <a:rPr b="1" lang="en-US" sz="1100">
+                          <a:latin typeface="Calibri"/>
+                          <a:ea typeface="Calibri"/>
+                          <a:cs typeface="Calibri"/>
+                          <a:sym typeface="Calibri"/>
+                        </a:rPr>
+                        <a:t>3</a:t>
+                      </a:r>
+                      <a:endParaRPr sz="1100">
+                        <a:latin typeface="Calibri"/>
+                        <a:ea typeface="Calibri"/>
+                        <a:cs typeface="Calibri"/>
+                        <a:sym typeface="Calibri"/>
+                      </a:endParaRPr>
+                    </a:p>
+                  </a:txBody>
+                  <a:tcPr marT="0" marB="0" marR="25400" marL="25400">
+                    <a:lnL cap="flat" cmpd="sng" w="9525">
+                      <a:solidFill>
+                        <a:srgbClr val="CCCCCC"/>
+                      </a:solidFill>
+                      <a:prstDash val="solid"/>
+                      <a:round/>
+                      <a:headEnd len="sm" w="sm" type="none"/>
+                      <a:tailEnd len="sm" w="sm" type="none"/>
+                    </a:lnL>
+                    <a:lnR cap="flat" cmpd="sng" w="9525">
+                      <a:solidFill>
+                        <a:srgbClr val="CCCCCC"/>
+                      </a:solidFill>
+                      <a:prstDash val="solid"/>
+                      <a:round/>
+                      <a:headEnd len="sm" w="sm" type="none"/>
+                      <a:tailEnd len="sm" w="sm" type="none"/>
+                    </a:lnR>
+                    <a:lnT cap="flat" cmpd="sng" w="9525">
+                      <a:solidFill>
+                        <a:srgbClr val="CCCCCC"/>
+                      </a:solidFill>
+                      <a:prstDash val="solid"/>
+                      <a:round/>
+                      <a:headEnd len="sm" w="sm" type="none"/>
+                      <a:tailEnd len="sm" w="sm" type="none"/>
+                    </a:lnT>
+                    <a:lnB cap="flat" cmpd="sng" w="9525">
+                      <a:solidFill>
+                        <a:srgbClr val="CCCCCC"/>
+                      </a:solidFill>
+                      <a:prstDash val="solid"/>
+                      <a:round/>
+                      <a:headEnd len="sm" w="sm" type="none"/>
+                      <a:tailEnd len="sm" w="sm" type="none"/>
+                    </a:lnB>
+                  </a:tcPr>
+                </a:tc>
+                <a:tc>
+                  <a:txBody>
+                    <a:bodyPr/>
+                    <a:lstStyle/>
+                    <a:p>
+                      <a:pPr indent="0" lvl="0" marL="0" rtl="0" algn="ctr">
+                        <a:lnSpc>
+                          <a:spcPct val="115000"/>
+                        </a:lnSpc>
+                        <a:spcBef>
+                          <a:spcPts val="0"/>
+                        </a:spcBef>
+                        <a:spcAft>
+                          <a:spcPts val="0"/>
+                        </a:spcAft>
+                        <a:buNone/>
+                      </a:pPr>
+                      <a:r>
+                        <a:rPr lang="en-US" sz="1100">
+                          <a:latin typeface="Calibri"/>
+                          <a:ea typeface="Calibri"/>
+                          <a:cs typeface="Calibri"/>
+                          <a:sym typeface="Calibri"/>
+                        </a:rPr>
+                        <a:t>Sprint 1</a:t>
+                      </a:r>
+                      <a:endParaRPr sz="1100">
+                        <a:latin typeface="Calibri"/>
+                        <a:ea typeface="Calibri"/>
+                        <a:cs typeface="Calibri"/>
+                        <a:sym typeface="Calibri"/>
+                      </a:endParaRPr>
+                    </a:p>
+                  </a:txBody>
+                  <a:tcPr marT="0" marB="0" marR="25400" marL="25400">
+                    <a:lnL cap="flat" cmpd="sng" w="9525">
+                      <a:solidFill>
+                        <a:srgbClr val="CCCCCC"/>
+                      </a:solidFill>
+                      <a:prstDash val="solid"/>
+                      <a:round/>
+                      <a:headEnd len="sm" w="sm" type="none"/>
+                      <a:tailEnd len="sm" w="sm" type="none"/>
+                    </a:lnL>
+                    <a:lnR cap="flat" cmpd="sng" w="9525">
+                      <a:solidFill>
+                        <a:srgbClr val="CCCCCC"/>
+                      </a:solidFill>
+                      <a:prstDash val="solid"/>
+                      <a:round/>
+                      <a:headEnd len="sm" w="sm" type="none"/>
+                      <a:tailEnd len="sm" w="sm" type="none"/>
+                    </a:lnR>
+                    <a:lnT cap="flat" cmpd="sng" w="9525">
+                      <a:solidFill>
+                        <a:srgbClr val="CCCCCC"/>
+                      </a:solidFill>
+                      <a:prstDash val="solid"/>
+                      <a:round/>
+                      <a:headEnd len="sm" w="sm" type="none"/>
+                      <a:tailEnd len="sm" w="sm" type="none"/>
+                    </a:lnT>
+                    <a:lnB cap="flat" cmpd="sng" w="9525">
+                      <a:solidFill>
+                        <a:srgbClr val="CCCCCC"/>
+                      </a:solidFill>
+                      <a:prstDash val="solid"/>
+                      <a:round/>
+                      <a:headEnd len="sm" w="sm" type="none"/>
+                      <a:tailEnd len="sm" w="sm" type="none"/>
+                    </a:lnB>
+                  </a:tcPr>
+                </a:tc>
+                <a:tc>
+                  <a:txBody>
+                    <a:bodyPr/>
+                    <a:lstStyle/>
+                    <a:p>
+                      <a:pPr indent="0" lvl="0" marL="0" rtl="0" algn="ctr">
+                        <a:lnSpc>
+                          <a:spcPct val="115000"/>
+                        </a:lnSpc>
+                        <a:spcBef>
+                          <a:spcPts val="0"/>
+                        </a:spcBef>
+                        <a:spcAft>
+                          <a:spcPts val="0"/>
+                        </a:spcAft>
+                        <a:buNone/>
+                      </a:pPr>
+                      <a:r>
+                        <a:rPr lang="en-US" sz="1100">
+                          <a:latin typeface="Calibri"/>
+                          <a:ea typeface="Calibri"/>
+                          <a:cs typeface="Calibri"/>
+                          <a:sym typeface="Calibri"/>
+                        </a:rPr>
+                        <a:t>Pendiente</a:t>
+                      </a:r>
+                      <a:endParaRPr sz="1100">
+                        <a:latin typeface="Calibri"/>
+                        <a:ea typeface="Calibri"/>
+                        <a:cs typeface="Calibri"/>
+                        <a:sym typeface="Calibri"/>
+                      </a:endParaRPr>
+                    </a:p>
+                  </a:txBody>
+                  <a:tcPr marT="0" marB="0" marR="25400" marL="25400">
+                    <a:lnL cap="flat" cmpd="sng" w="9525">
+                      <a:solidFill>
+                        <a:srgbClr val="CCCCCC"/>
+                      </a:solidFill>
+                      <a:prstDash val="solid"/>
+                      <a:round/>
+                      <a:headEnd len="sm" w="sm" type="none"/>
+                      <a:tailEnd len="sm" w="sm" type="none"/>
+                    </a:lnL>
+                    <a:lnR cap="flat" cmpd="sng" w="9525">
+                      <a:solidFill>
+                        <a:srgbClr val="CCCCCC"/>
+                      </a:solidFill>
+                      <a:prstDash val="solid"/>
+                      <a:round/>
+                      <a:headEnd len="sm" w="sm" type="none"/>
+                      <a:tailEnd len="sm" w="sm" type="none"/>
+                    </a:lnR>
+                    <a:lnT cap="flat" cmpd="sng" w="9525">
+                      <a:solidFill>
+                        <a:srgbClr val="CCCCCC"/>
+                      </a:solidFill>
+                      <a:prstDash val="solid"/>
+                      <a:round/>
+                      <a:headEnd len="sm" w="sm" type="none"/>
+                      <a:tailEnd len="sm" w="sm" type="none"/>
+                    </a:lnT>
+                    <a:lnB cap="flat" cmpd="sng" w="9525">
+                      <a:solidFill>
+                        <a:srgbClr val="CCCCCC"/>
+                      </a:solidFill>
+                      <a:prstDash val="solid"/>
+                      <a:round/>
+                      <a:headEnd len="sm" w="sm" type="none"/>
+                      <a:tailEnd len="sm" w="sm" type="none"/>
+                    </a:lnB>
+                  </a:tcPr>
+                </a:tc>
+                <a:tc>
+                  <a:txBody>
+                    <a:bodyPr/>
+                    <a:lstStyle/>
+                    <a:p>
+                      <a:pPr indent="0" lvl="0" marL="0" rtl="0" algn="l">
+                        <a:lnSpc>
+                          <a:spcPct val="115000"/>
+                        </a:lnSpc>
+                        <a:spcBef>
+                          <a:spcPts val="0"/>
+                        </a:spcBef>
+                        <a:spcAft>
+                          <a:spcPts val="0"/>
+                        </a:spcAft>
+                        <a:buNone/>
+                      </a:pPr>
+                      <a:r>
+                        <a:rPr lang="en-US" sz="1100">
+                          <a:latin typeface="Calibri"/>
+                          <a:ea typeface="Calibri"/>
+                          <a:cs typeface="Calibri"/>
+                          <a:sym typeface="Calibri"/>
+                        </a:rPr>
+                        <a:t>COMO Staff de BackToMe</a:t>
+                      </a:r>
+                      <a:endParaRPr sz="1100">
+                        <a:latin typeface="Calibri"/>
+                        <a:ea typeface="Calibri"/>
+                        <a:cs typeface="Calibri"/>
+                        <a:sym typeface="Calibri"/>
+                      </a:endParaRPr>
+                    </a:p>
+                    <a:p>
+                      <a:pPr indent="0" lvl="0" marL="0" rtl="0" algn="l">
+                        <a:lnSpc>
+                          <a:spcPct val="115000"/>
+                        </a:lnSpc>
+                        <a:spcBef>
+                          <a:spcPts val="0"/>
+                        </a:spcBef>
+                        <a:spcAft>
+                          <a:spcPts val="0"/>
+                        </a:spcAft>
+                        <a:buNone/>
+                      </a:pPr>
+                      <a:r>
+                        <a:rPr lang="en-US" sz="1100">
+                          <a:latin typeface="Calibri"/>
+                          <a:ea typeface="Calibri"/>
+                          <a:cs typeface="Calibri"/>
+                          <a:sym typeface="Calibri"/>
+                        </a:rPr>
+                        <a:t>QUIERO definir las imágenes de logo e isotipo y la paleta de colores de cada empresa</a:t>
+                      </a:r>
+                      <a:endParaRPr sz="1100">
+                        <a:latin typeface="Calibri"/>
+                        <a:ea typeface="Calibri"/>
+                        <a:cs typeface="Calibri"/>
+                        <a:sym typeface="Calibri"/>
+                      </a:endParaRPr>
+                    </a:p>
+                    <a:p>
+                      <a:pPr indent="0" lvl="0" marL="0" rtl="0" algn="l">
+                        <a:lnSpc>
+                          <a:spcPct val="115000"/>
+                        </a:lnSpc>
+                        <a:spcBef>
+                          <a:spcPts val="0"/>
+                        </a:spcBef>
+                        <a:spcAft>
+                          <a:spcPts val="0"/>
+                        </a:spcAft>
+                        <a:buNone/>
+                      </a:pPr>
+                      <a:r>
+                        <a:rPr lang="en-US" sz="1100">
+                          <a:latin typeface="Calibri"/>
+                          <a:ea typeface="Calibri"/>
+                          <a:cs typeface="Calibri"/>
+                          <a:sym typeface="Calibri"/>
+                        </a:rPr>
+                        <a:t>PARA personalizar la PWA corporativa.</a:t>
+                      </a:r>
+                      <a:endParaRPr sz="1100">
+                        <a:latin typeface="Calibri"/>
+                        <a:ea typeface="Calibri"/>
+                        <a:cs typeface="Calibri"/>
+                        <a:sym typeface="Calibri"/>
+                      </a:endParaRPr>
+                    </a:p>
+                  </a:txBody>
+                  <a:tcPr marT="0" marB="0" marR="25400" marL="25400">
+                    <a:lnL cap="flat" cmpd="sng" w="9525">
+                      <a:solidFill>
+                        <a:srgbClr val="CCCCCC"/>
+                      </a:solidFill>
+                      <a:prstDash val="solid"/>
+                      <a:round/>
+                      <a:headEnd len="sm" w="sm" type="none"/>
+                      <a:tailEnd len="sm" w="sm" type="none"/>
+                    </a:lnL>
+                    <a:lnR cap="flat" cmpd="sng" w="9525">
+                      <a:solidFill>
+                        <a:srgbClr val="CCCCCC"/>
+                      </a:solidFill>
+                      <a:prstDash val="solid"/>
+                      <a:round/>
+                      <a:headEnd len="sm" w="sm" type="none"/>
+                      <a:tailEnd len="sm" w="sm" type="none"/>
+                    </a:lnR>
+                    <a:lnT cap="flat" cmpd="sng" w="9525">
+                      <a:solidFill>
+                        <a:srgbClr val="CCCCCC"/>
+                      </a:solidFill>
+                      <a:prstDash val="solid"/>
+                      <a:round/>
+                      <a:headEnd len="sm" w="sm" type="none"/>
+                      <a:tailEnd len="sm" w="sm" type="none"/>
+                    </a:lnT>
+                    <a:lnB cap="flat" cmpd="sng" w="9525">
+                      <a:solidFill>
+                        <a:srgbClr val="CCCCCC"/>
+                      </a:solidFill>
+                      <a:prstDash val="solid"/>
+                      <a:round/>
+                      <a:headEnd len="sm" w="sm" type="none"/>
+                      <a:tailEnd len="sm" w="sm" type="none"/>
+                    </a:lnB>
+                  </a:tcPr>
+                </a:tc>
+                <a:tc>
+                  <a:txBody>
+                    <a:bodyPr/>
+                    <a:lstStyle/>
+                    <a:p>
+                      <a:pPr indent="0" lvl="0" marL="0" rtl="0" algn="l">
+                        <a:lnSpc>
+                          <a:spcPct val="115000"/>
+                        </a:lnSpc>
+                        <a:spcBef>
+                          <a:spcPts val="0"/>
+                        </a:spcBef>
+                        <a:spcAft>
+                          <a:spcPts val="0"/>
+                        </a:spcAft>
+                        <a:buNone/>
+                      </a:pPr>
+                      <a:r>
+                        <a:rPr lang="en-US" sz="1100">
+                          <a:latin typeface="Calibri"/>
+                          <a:ea typeface="Calibri"/>
+                          <a:cs typeface="Calibri"/>
+                          <a:sym typeface="Calibri"/>
+                        </a:rPr>
+                        <a:t>1. Carga de logo e isotipo a Cloudflare R2.</a:t>
+                      </a:r>
+                      <a:endParaRPr sz="1100">
+                        <a:latin typeface="Calibri"/>
+                        <a:ea typeface="Calibri"/>
+                        <a:cs typeface="Calibri"/>
+                        <a:sym typeface="Calibri"/>
+                      </a:endParaRPr>
+                    </a:p>
+                    <a:p>
+                      <a:pPr indent="0" lvl="0" marL="0" rtl="0" algn="l">
+                        <a:lnSpc>
+                          <a:spcPct val="115000"/>
+                        </a:lnSpc>
+                        <a:spcBef>
+                          <a:spcPts val="0"/>
+                        </a:spcBef>
+                        <a:spcAft>
+                          <a:spcPts val="0"/>
+                        </a:spcAft>
+                        <a:buNone/>
+                      </a:pPr>
+                      <a:r>
+                        <a:rPr lang="en-US" sz="1100">
+                          <a:latin typeface="Calibri"/>
+                          <a:ea typeface="Calibri"/>
+                          <a:cs typeface="Calibri"/>
+                          <a:sym typeface="Calibri"/>
+                        </a:rPr>
+                        <a:t>2. Selector de paleta de colores hexadecimales.</a:t>
+                      </a:r>
+                      <a:endParaRPr sz="1100">
+                        <a:latin typeface="Calibri"/>
+                        <a:ea typeface="Calibri"/>
+                        <a:cs typeface="Calibri"/>
+                        <a:sym typeface="Calibri"/>
+                      </a:endParaRPr>
+                    </a:p>
+                    <a:p>
+                      <a:pPr indent="0" lvl="0" marL="0" rtl="0" algn="l">
+                        <a:lnSpc>
+                          <a:spcPct val="115000"/>
+                        </a:lnSpc>
+                        <a:spcBef>
+                          <a:spcPts val="0"/>
+                        </a:spcBef>
+                        <a:spcAft>
+                          <a:spcPts val="0"/>
+                        </a:spcAft>
+                        <a:buNone/>
+                      </a:pPr>
+                      <a:r>
+                        <a:rPr lang="en-US" sz="1100">
+                          <a:latin typeface="Calibri"/>
+                          <a:ea typeface="Calibri"/>
+                          <a:cs typeface="Calibri"/>
+                          <a:sym typeface="Calibri"/>
+                        </a:rPr>
+                        <a:t>3. Previsualización dinámica del tema PWA.</a:t>
+                      </a:r>
+                      <a:endParaRPr sz="1100">
+                        <a:latin typeface="Calibri"/>
+                        <a:ea typeface="Calibri"/>
+                        <a:cs typeface="Calibri"/>
+                        <a:sym typeface="Calibri"/>
+                      </a:endParaRPr>
+                    </a:p>
+                  </a:txBody>
+                  <a:tcPr marT="0" marB="0" marR="25400" marL="25400">
+                    <a:lnL cap="flat" cmpd="sng" w="9525">
+                      <a:solidFill>
+                        <a:srgbClr val="CCCCCC"/>
+                      </a:solidFill>
+                      <a:prstDash val="solid"/>
+                      <a:round/>
+                      <a:headEnd len="sm" w="sm" type="none"/>
+                      <a:tailEnd len="sm" w="sm" type="none"/>
+                    </a:lnL>
+                    <a:lnR cap="flat" cmpd="sng" w="9525">
+                      <a:solidFill>
+                        <a:srgbClr val="CCCCCC"/>
+                      </a:solidFill>
+                      <a:prstDash val="solid"/>
+                      <a:round/>
+                      <a:headEnd len="sm" w="sm" type="none"/>
+                      <a:tailEnd len="sm" w="sm" type="none"/>
+                    </a:lnR>
+                    <a:lnT cap="flat" cmpd="sng" w="9525">
+                      <a:solidFill>
+                        <a:srgbClr val="CCCCCC"/>
+                      </a:solidFill>
+                      <a:prstDash val="solid"/>
+                      <a:round/>
+                      <a:headEnd len="sm" w="sm" type="none"/>
+                      <a:tailEnd len="sm" w="sm" type="none"/>
+                    </a:lnT>
+                    <a:lnB cap="flat" cmpd="sng" w="9525">
+                      <a:solidFill>
+                        <a:srgbClr val="CCCCCC"/>
+                      </a:solidFill>
+                      <a:prstDash val="solid"/>
+                      <a:round/>
+                      <a:headEnd len="sm" w="sm" type="none"/>
+                      <a:tailEnd len="sm" w="sm" type="none"/>
+                    </a:lnB>
+                  </a:tcPr>
+                </a:tc>
+                <a:tc>
+                  <a:txBody>
+                    <a:bodyPr/>
+                    <a:lstStyle/>
+                    <a:p>
+                      <a:pPr indent="0" lvl="0" marL="0" rtl="0" algn="l">
+                        <a:lnSpc>
+                          <a:spcPct val="115000"/>
+                        </a:lnSpc>
+                        <a:spcBef>
+                          <a:spcPts val="0"/>
+                        </a:spcBef>
+                        <a:spcAft>
+                          <a:spcPts val="0"/>
+                        </a:spcAft>
+                        <a:buNone/>
+                      </a:pPr>
+                      <a:r>
+                        <a:rPr lang="en-US" sz="1100">
+                          <a:latin typeface="Calibri"/>
+                          <a:ea typeface="Calibri"/>
+                          <a:cs typeface="Calibri"/>
+                          <a:sym typeface="Calibri"/>
+                        </a:rPr>
+                        <a:t>1. Inyección de variables CSS (--primary-color) en React/Astro.</a:t>
+                      </a:r>
+                      <a:endParaRPr sz="1100">
+                        <a:latin typeface="Calibri"/>
+                        <a:ea typeface="Calibri"/>
+                        <a:cs typeface="Calibri"/>
+                        <a:sym typeface="Calibri"/>
+                      </a:endParaRPr>
+                    </a:p>
+                    <a:p>
+                      <a:pPr indent="0" lvl="0" marL="0" rtl="0" algn="l">
+                        <a:lnSpc>
+                          <a:spcPct val="115000"/>
+                        </a:lnSpc>
+                        <a:spcBef>
+                          <a:spcPts val="0"/>
+                        </a:spcBef>
+                        <a:spcAft>
+                          <a:spcPts val="0"/>
+                        </a:spcAft>
+                        <a:buNone/>
+                      </a:pPr>
+                      <a:r>
+                        <a:rPr lang="en-US" sz="1100">
+                          <a:latin typeface="Calibri"/>
+                          <a:ea typeface="Calibri"/>
+                          <a:cs typeface="Calibri"/>
+                          <a:sym typeface="Calibri"/>
+                        </a:rPr>
+                        <a:t>2. URLs prefirmadas en Cloudflare R2 para assets de marca.</a:t>
+                      </a:r>
+                      <a:endParaRPr sz="1100">
+                        <a:latin typeface="Calibri"/>
+                        <a:ea typeface="Calibri"/>
+                        <a:cs typeface="Calibri"/>
+                        <a:sym typeface="Calibri"/>
+                      </a:endParaRPr>
+                    </a:p>
+                    <a:p>
+                      <a:pPr indent="0" lvl="0" marL="0" rtl="0" algn="l">
+                        <a:lnSpc>
+                          <a:spcPct val="115000"/>
+                        </a:lnSpc>
+                        <a:spcBef>
+                          <a:spcPts val="0"/>
+                        </a:spcBef>
+                        <a:spcAft>
+                          <a:spcPts val="0"/>
+                        </a:spcAft>
+                        <a:buNone/>
+                      </a:pPr>
+                      <a:r>
+                        <a:rPr lang="en-US" sz="1100">
+                          <a:latin typeface="Calibri"/>
+                          <a:ea typeface="Calibri"/>
+                          <a:cs typeface="Calibri"/>
+                          <a:sym typeface="Calibri"/>
+                        </a:rPr>
+                        <a:t>3. Test de renderizado multi-tenant completado.</a:t>
+                      </a:r>
+                      <a:endParaRPr sz="1100">
+                        <a:latin typeface="Calibri"/>
+                        <a:ea typeface="Calibri"/>
+                        <a:cs typeface="Calibri"/>
+                        <a:sym typeface="Calibri"/>
+                      </a:endParaRPr>
+                    </a:p>
+                  </a:txBody>
+                  <a:tcPr marT="0" marB="0" marR="25400" marL="25400">
+                    <a:lnL cap="flat" cmpd="sng" w="9525">
+                      <a:solidFill>
+                        <a:srgbClr val="CCCCCC"/>
+                      </a:solidFill>
+                      <a:prstDash val="solid"/>
+                      <a:round/>
+                      <a:headEnd len="sm" w="sm" type="none"/>
+                      <a:tailEnd len="sm" w="sm" type="none"/>
+                    </a:lnL>
+                    <a:lnR cap="flat" cmpd="sng" w="9525">
+                      <a:solidFill>
+                        <a:srgbClr val="CCCCCC"/>
+                      </a:solidFill>
+                      <a:prstDash val="solid"/>
+                      <a:round/>
+                      <a:headEnd len="sm" w="sm" type="none"/>
+                      <a:tailEnd len="sm" w="sm" type="none"/>
+                    </a:lnR>
+                    <a:lnT cap="flat" cmpd="sng" w="9525">
+                      <a:solidFill>
+                        <a:srgbClr val="CCCCCC"/>
+                      </a:solidFill>
+                      <a:prstDash val="solid"/>
+                      <a:round/>
+                      <a:headEnd len="sm" w="sm" type="none"/>
+                      <a:tailEnd len="sm" w="sm" type="none"/>
+                    </a:lnT>
+                    <a:lnB cap="flat" cmpd="sng" w="9525">
+                      <a:solidFill>
+                        <a:srgbClr val="CCCCCC"/>
+                      </a:solidFill>
+                      <a:prstDash val="solid"/>
+                      <a:round/>
+                      <a:headEnd len="sm" w="sm" type="none"/>
+                      <a:tailEnd len="sm" w="sm" type="none"/>
+                    </a:lnB>
+                  </a:tcPr>
+                </a:tc>
+              </a:tr>
+              <a:tr h="974850">
+                <a:tc>
+                  <a:txBody>
+                    <a:bodyPr/>
+                    <a:lstStyle/>
+                    <a:p>
+                      <a:pPr indent="0" lvl="0" marL="0" rtl="0" algn="ctr">
+                        <a:lnSpc>
+                          <a:spcPct val="115000"/>
+                        </a:lnSpc>
+                        <a:spcBef>
+                          <a:spcPts val="0"/>
+                        </a:spcBef>
+                        <a:spcAft>
+                          <a:spcPts val="0"/>
+                        </a:spcAft>
+                        <a:buNone/>
+                      </a:pPr>
+                      <a:r>
+                        <a:rPr b="1" lang="en-US" sz="1100">
+                          <a:latin typeface="Calibri"/>
+                          <a:ea typeface="Calibri"/>
+                          <a:cs typeface="Calibri"/>
+                          <a:sym typeface="Calibri"/>
+                        </a:rPr>
+                        <a:t>HU-03</a:t>
+                      </a:r>
+                      <a:endParaRPr sz="1100">
+                        <a:latin typeface="Calibri"/>
+                        <a:ea typeface="Calibri"/>
+                        <a:cs typeface="Calibri"/>
+                        <a:sym typeface="Calibri"/>
+                      </a:endParaRPr>
+                    </a:p>
+                  </a:txBody>
+                  <a:tcPr marT="0" marB="0" marR="25400" marL="25400">
+                    <a:lnL cap="flat" cmpd="sng" w="9525">
+                      <a:solidFill>
+                        <a:srgbClr val="D9D9D9"/>
+                      </a:solidFill>
+                      <a:prstDash val="solid"/>
+                      <a:round/>
+                      <a:headEnd len="sm" w="sm" type="none"/>
+                      <a:tailEnd len="sm" w="sm" type="none"/>
+                    </a:lnL>
+                    <a:lnR cap="flat" cmpd="sng" w="9525">
+                      <a:solidFill>
+                        <a:srgbClr val="CCCCCC"/>
+                      </a:solidFill>
+                      <a:prstDash val="solid"/>
+                      <a:round/>
+                      <a:headEnd len="sm" w="sm" type="none"/>
+                      <a:tailEnd len="sm" w="sm" type="none"/>
+                    </a:lnR>
+                    <a:lnT cap="flat" cmpd="sng" w="9525">
+                      <a:solidFill>
+                        <a:srgbClr val="CCCCCC"/>
+                      </a:solidFill>
+                      <a:prstDash val="solid"/>
+                      <a:round/>
+                      <a:headEnd len="sm" w="sm" type="none"/>
+                      <a:tailEnd len="sm" w="sm" type="none"/>
+                    </a:lnT>
+                    <a:lnB cap="flat" cmpd="sng" w="9525">
+                      <a:solidFill>
+                        <a:srgbClr val="CCCCCC"/>
+                      </a:solidFill>
+                      <a:prstDash val="solid"/>
+                      <a:round/>
+                      <a:headEnd len="sm" w="sm" type="none"/>
+                      <a:tailEnd len="sm" w="sm" type="none"/>
+                    </a:lnB>
+                    <a:solidFill>
+                      <a:srgbClr val="F9FAFB"/>
+                    </a:solidFill>
+                  </a:tcPr>
+                </a:tc>
+                <a:tc>
+                  <a:txBody>
+                    <a:bodyPr/>
+                    <a:lstStyle/>
+                    <a:p>
+                      <a:pPr indent="0" lvl="0" marL="0" rtl="0" algn="l">
+                        <a:lnSpc>
+                          <a:spcPct val="115000"/>
+                        </a:lnSpc>
+                        <a:spcBef>
+                          <a:spcPts val="0"/>
+                        </a:spcBef>
+                        <a:spcAft>
+                          <a:spcPts val="0"/>
+                        </a:spcAft>
+                        <a:buNone/>
+                      </a:pPr>
+                      <a:r>
+                        <a:rPr lang="en-US" sz="1100">
+                          <a:latin typeface="Calibri"/>
+                          <a:ea typeface="Calibri"/>
+                          <a:cs typeface="Calibri"/>
+                          <a:sym typeface="Calibri"/>
+                        </a:rPr>
+                        <a:t>Épica 1: Administración Global</a:t>
+                      </a:r>
+                      <a:endParaRPr sz="1100">
+                        <a:latin typeface="Calibri"/>
+                        <a:ea typeface="Calibri"/>
+                        <a:cs typeface="Calibri"/>
+                        <a:sym typeface="Calibri"/>
+                      </a:endParaRPr>
+                    </a:p>
+                  </a:txBody>
+                  <a:tcPr marT="0" marB="0" marR="25400" marL="25400">
+                    <a:lnL cap="flat" cmpd="sng" w="9525">
+                      <a:solidFill>
+                        <a:srgbClr val="CCCCCC"/>
+                      </a:solidFill>
+                      <a:prstDash val="solid"/>
+                      <a:round/>
+                      <a:headEnd len="sm" w="sm" type="none"/>
+                      <a:tailEnd len="sm" w="sm" type="none"/>
+                    </a:lnL>
+                    <a:lnR cap="flat" cmpd="sng" w="9525">
+                      <a:solidFill>
+                        <a:srgbClr val="CCCCCC"/>
+                      </a:solidFill>
+                      <a:prstDash val="solid"/>
+                      <a:round/>
+                      <a:headEnd len="sm" w="sm" type="none"/>
+                      <a:tailEnd len="sm" w="sm" type="none"/>
+                    </a:lnR>
+                    <a:lnT cap="flat" cmpd="sng" w="9525">
+                      <a:solidFill>
+                        <a:srgbClr val="CCCCCC"/>
+                      </a:solidFill>
+                      <a:prstDash val="solid"/>
+                      <a:round/>
+                      <a:headEnd len="sm" w="sm" type="none"/>
+                      <a:tailEnd len="sm" w="sm" type="none"/>
+                    </a:lnT>
+                    <a:lnB cap="flat" cmpd="sng" w="9525">
+                      <a:solidFill>
+                        <a:srgbClr val="CCCCCC"/>
+                      </a:solidFill>
+                      <a:prstDash val="solid"/>
+                      <a:round/>
+                      <a:headEnd len="sm" w="sm" type="none"/>
+                      <a:tailEnd len="sm" w="sm" type="none"/>
+                    </a:lnB>
+                    <a:solidFill>
+                      <a:srgbClr val="F9FAFB"/>
+                    </a:solidFill>
+                  </a:tcPr>
+                </a:tc>
+                <a:tc>
+                  <a:txBody>
+                    <a:bodyPr/>
+                    <a:lstStyle/>
+                    <a:p>
+                      <a:pPr indent="0" lvl="0" marL="0" rtl="0" algn="l">
+                        <a:lnSpc>
+                          <a:spcPct val="115000"/>
+                        </a:lnSpc>
+                        <a:spcBef>
+                          <a:spcPts val="0"/>
+                        </a:spcBef>
+                        <a:spcAft>
+                          <a:spcPts val="0"/>
+                        </a:spcAft>
+                        <a:buNone/>
+                      </a:pPr>
+                      <a:r>
+                        <a:rPr lang="en-US" sz="1100">
+                          <a:latin typeface="Calibri"/>
+                          <a:ea typeface="Calibri"/>
+                          <a:cs typeface="Calibri"/>
+                          <a:sym typeface="Calibri"/>
+                        </a:rPr>
+                        <a:t>Gestión de Dominios Empresariales Permitidos</a:t>
+                      </a:r>
+                      <a:endParaRPr sz="1100">
+                        <a:latin typeface="Calibri"/>
+                        <a:ea typeface="Calibri"/>
+                        <a:cs typeface="Calibri"/>
+                        <a:sym typeface="Calibri"/>
+                      </a:endParaRPr>
+                    </a:p>
+                  </a:txBody>
+                  <a:tcPr marT="0" marB="0" marR="25400" marL="25400">
+                    <a:lnL cap="flat" cmpd="sng" w="9525">
+                      <a:solidFill>
+                        <a:srgbClr val="CCCCCC"/>
+                      </a:solidFill>
+                      <a:prstDash val="solid"/>
+                      <a:round/>
+                      <a:headEnd len="sm" w="sm" type="none"/>
+                      <a:tailEnd len="sm" w="sm" type="none"/>
+                    </a:lnL>
+                    <a:lnR cap="flat" cmpd="sng" w="9525">
+                      <a:solidFill>
+                        <a:srgbClr val="CCCCCC"/>
+                      </a:solidFill>
+                      <a:prstDash val="solid"/>
+                      <a:round/>
+                      <a:headEnd len="sm" w="sm" type="none"/>
+                      <a:tailEnd len="sm" w="sm" type="none"/>
+                    </a:lnR>
+                    <a:lnT cap="flat" cmpd="sng" w="9525">
+                      <a:solidFill>
+                        <a:srgbClr val="CCCCCC"/>
+                      </a:solidFill>
+                      <a:prstDash val="solid"/>
+                      <a:round/>
+                      <a:headEnd len="sm" w="sm" type="none"/>
+                      <a:tailEnd len="sm" w="sm" type="none"/>
+                    </a:lnT>
+                    <a:lnB cap="flat" cmpd="sng" w="9525">
+                      <a:solidFill>
+                        <a:srgbClr val="CCCCCC"/>
+                      </a:solidFill>
+                      <a:prstDash val="solid"/>
+                      <a:round/>
+                      <a:headEnd len="sm" w="sm" type="none"/>
+                      <a:tailEnd len="sm" w="sm" type="none"/>
+                    </a:lnB>
+                    <a:solidFill>
+                      <a:srgbClr val="F9FAFB"/>
+                    </a:solidFill>
+                  </a:tcPr>
+                </a:tc>
+                <a:tc>
+                  <a:txBody>
+                    <a:bodyPr/>
+                    <a:lstStyle/>
+                    <a:p>
+                      <a:pPr indent="0" lvl="0" marL="0" rtl="0" algn="l">
+                        <a:lnSpc>
+                          <a:spcPct val="115000"/>
+                        </a:lnSpc>
+                        <a:spcBef>
+                          <a:spcPts val="0"/>
+                        </a:spcBef>
+                        <a:spcAft>
+                          <a:spcPts val="0"/>
+                        </a:spcAft>
+                        <a:buNone/>
+                      </a:pPr>
+                      <a:r>
+                        <a:rPr lang="en-US" sz="1100">
+                          <a:latin typeface="Calibri"/>
+                          <a:ea typeface="Calibri"/>
+                          <a:cs typeface="Calibri"/>
+                          <a:sym typeface="Calibri"/>
+                        </a:rPr>
+                        <a:t>Admin Empresa</a:t>
+                      </a:r>
+                      <a:endParaRPr sz="1100">
+                        <a:latin typeface="Calibri"/>
+                        <a:ea typeface="Calibri"/>
+                        <a:cs typeface="Calibri"/>
+                        <a:sym typeface="Calibri"/>
+                      </a:endParaRPr>
+                    </a:p>
+                  </a:txBody>
+                  <a:tcPr marT="0" marB="0" marR="25400" marL="25400">
+                    <a:lnL cap="flat" cmpd="sng" w="9525">
+                      <a:solidFill>
+                        <a:srgbClr val="CCCCCC"/>
+                      </a:solidFill>
+                      <a:prstDash val="solid"/>
+                      <a:round/>
+                      <a:headEnd len="sm" w="sm" type="none"/>
+                      <a:tailEnd len="sm" w="sm" type="none"/>
+                    </a:lnL>
+                    <a:lnR cap="flat" cmpd="sng" w="9525">
+                      <a:solidFill>
+                        <a:srgbClr val="CCCCCC"/>
+                      </a:solidFill>
+                      <a:prstDash val="solid"/>
+                      <a:round/>
+                      <a:headEnd len="sm" w="sm" type="none"/>
+                      <a:tailEnd len="sm" w="sm" type="none"/>
+                    </a:lnR>
+                    <a:lnT cap="flat" cmpd="sng" w="9525">
+                      <a:solidFill>
+                        <a:srgbClr val="CCCCCC"/>
+                      </a:solidFill>
+                      <a:prstDash val="solid"/>
+                      <a:round/>
+                      <a:headEnd len="sm" w="sm" type="none"/>
+                      <a:tailEnd len="sm" w="sm" type="none"/>
+                    </a:lnT>
+                    <a:lnB cap="flat" cmpd="sng" w="9525">
+                      <a:solidFill>
+                        <a:srgbClr val="CCCCCC"/>
+                      </a:solidFill>
+                      <a:prstDash val="solid"/>
+                      <a:round/>
+                      <a:headEnd len="sm" w="sm" type="none"/>
+                      <a:tailEnd len="sm" w="sm" type="none"/>
+                    </a:lnB>
+                    <a:solidFill>
+                      <a:srgbClr val="F9FAFB"/>
+                    </a:solidFill>
+                  </a:tcPr>
+                </a:tc>
+                <a:tc>
+                  <a:txBody>
+                    <a:bodyPr/>
+                    <a:lstStyle/>
+                    <a:p>
+                      <a:pPr indent="0" lvl="0" marL="0" rtl="0" algn="ctr">
+                        <a:lnSpc>
+                          <a:spcPct val="115000"/>
+                        </a:lnSpc>
+                        <a:spcBef>
+                          <a:spcPts val="0"/>
+                        </a:spcBef>
+                        <a:spcAft>
+                          <a:spcPts val="0"/>
+                        </a:spcAft>
+                        <a:buNone/>
+                      </a:pPr>
+                      <a:r>
+                        <a:rPr lang="en-US" sz="1100">
+                          <a:latin typeface="Calibri"/>
+                          <a:ea typeface="Calibri"/>
+                          <a:cs typeface="Calibri"/>
+                          <a:sym typeface="Calibri"/>
+                        </a:rPr>
+                        <a:t>Alta</a:t>
+                      </a:r>
+                      <a:endParaRPr sz="1100">
+                        <a:latin typeface="Calibri"/>
+                        <a:ea typeface="Calibri"/>
+                        <a:cs typeface="Calibri"/>
+                        <a:sym typeface="Calibri"/>
+                      </a:endParaRPr>
+                    </a:p>
+                  </a:txBody>
+                  <a:tcPr marT="0" marB="0" marR="25400" marL="25400">
+                    <a:lnL cap="flat" cmpd="sng" w="9525">
+                      <a:solidFill>
+                        <a:srgbClr val="CCCCCC"/>
+                      </a:solidFill>
+                      <a:prstDash val="solid"/>
+                      <a:round/>
+                      <a:headEnd len="sm" w="sm" type="none"/>
+                      <a:tailEnd len="sm" w="sm" type="none"/>
+                    </a:lnL>
+                    <a:lnR cap="flat" cmpd="sng" w="9525">
+                      <a:solidFill>
+                        <a:srgbClr val="CCCCCC"/>
+                      </a:solidFill>
+                      <a:prstDash val="solid"/>
+                      <a:round/>
+                      <a:headEnd len="sm" w="sm" type="none"/>
+                      <a:tailEnd len="sm" w="sm" type="none"/>
+                    </a:lnR>
+                    <a:lnT cap="flat" cmpd="sng" w="9525">
+                      <a:solidFill>
+                        <a:srgbClr val="CCCCCC"/>
+                      </a:solidFill>
+                      <a:prstDash val="solid"/>
+                      <a:round/>
+                      <a:headEnd len="sm" w="sm" type="none"/>
+                      <a:tailEnd len="sm" w="sm" type="none"/>
+                    </a:lnT>
+                    <a:lnB cap="flat" cmpd="sng" w="9525">
+                      <a:solidFill>
+                        <a:srgbClr val="CCCCCC"/>
+                      </a:solidFill>
+                      <a:prstDash val="solid"/>
+                      <a:round/>
+                      <a:headEnd len="sm" w="sm" type="none"/>
+                      <a:tailEnd len="sm" w="sm" type="none"/>
+                    </a:lnB>
+                    <a:solidFill>
+                      <a:srgbClr val="F9FAFB"/>
+                    </a:solidFill>
+                  </a:tcPr>
+                </a:tc>
+                <a:tc>
+                  <a:txBody>
+                    <a:bodyPr/>
+                    <a:lstStyle/>
+                    <a:p>
+                      <a:pPr indent="0" lvl="0" marL="0" rtl="0" algn="ctr">
+                        <a:lnSpc>
+                          <a:spcPct val="115000"/>
+                        </a:lnSpc>
+                        <a:spcBef>
+                          <a:spcPts val="0"/>
+                        </a:spcBef>
+                        <a:spcAft>
+                          <a:spcPts val="0"/>
+                        </a:spcAft>
+                        <a:buNone/>
+                      </a:pPr>
+                      <a:r>
+                        <a:rPr b="1" lang="en-US" sz="1100">
+                          <a:latin typeface="Calibri"/>
+                          <a:ea typeface="Calibri"/>
+                          <a:cs typeface="Calibri"/>
+                          <a:sym typeface="Calibri"/>
+                        </a:rPr>
+                        <a:t>3</a:t>
+                      </a:r>
+                      <a:endParaRPr sz="1100">
+                        <a:latin typeface="Calibri"/>
+                        <a:ea typeface="Calibri"/>
+                        <a:cs typeface="Calibri"/>
+                        <a:sym typeface="Calibri"/>
+                      </a:endParaRPr>
+                    </a:p>
+                  </a:txBody>
+                  <a:tcPr marT="0" marB="0" marR="25400" marL="25400">
+                    <a:lnL cap="flat" cmpd="sng" w="9525">
+                      <a:solidFill>
+                        <a:srgbClr val="CCCCCC"/>
+                      </a:solidFill>
+                      <a:prstDash val="solid"/>
+                      <a:round/>
+                      <a:headEnd len="sm" w="sm" type="none"/>
+                      <a:tailEnd len="sm" w="sm" type="none"/>
+                    </a:lnL>
+                    <a:lnR cap="flat" cmpd="sng" w="9525">
+                      <a:solidFill>
+                        <a:srgbClr val="CCCCCC"/>
+                      </a:solidFill>
+                      <a:prstDash val="solid"/>
+                      <a:round/>
+                      <a:headEnd len="sm" w="sm" type="none"/>
+                      <a:tailEnd len="sm" w="sm" type="none"/>
+                    </a:lnR>
+                    <a:lnT cap="flat" cmpd="sng" w="9525">
+                      <a:solidFill>
+                        <a:srgbClr val="CCCCCC"/>
+                      </a:solidFill>
+                      <a:prstDash val="solid"/>
+                      <a:round/>
+                      <a:headEnd len="sm" w="sm" type="none"/>
+                      <a:tailEnd len="sm" w="sm" type="none"/>
+                    </a:lnT>
+                    <a:lnB cap="flat" cmpd="sng" w="9525">
+                      <a:solidFill>
+                        <a:srgbClr val="CCCCCC"/>
+                      </a:solidFill>
+                      <a:prstDash val="solid"/>
+                      <a:round/>
+                      <a:headEnd len="sm" w="sm" type="none"/>
+                      <a:tailEnd len="sm" w="sm" type="none"/>
+                    </a:lnB>
+                    <a:solidFill>
+                      <a:srgbClr val="F9FAFB"/>
+                    </a:solidFill>
+                  </a:tcPr>
+                </a:tc>
+                <a:tc>
+                  <a:txBody>
+                    <a:bodyPr/>
+                    <a:lstStyle/>
+                    <a:p>
+                      <a:pPr indent="0" lvl="0" marL="0" rtl="0" algn="ctr">
+                        <a:lnSpc>
+                          <a:spcPct val="115000"/>
+                        </a:lnSpc>
+                        <a:spcBef>
+                          <a:spcPts val="0"/>
+                        </a:spcBef>
+                        <a:spcAft>
+                          <a:spcPts val="0"/>
+                        </a:spcAft>
+                        <a:buNone/>
+                      </a:pPr>
+                      <a:r>
+                        <a:rPr lang="en-US" sz="1100">
+                          <a:latin typeface="Calibri"/>
+                          <a:ea typeface="Calibri"/>
+                          <a:cs typeface="Calibri"/>
+                          <a:sym typeface="Calibri"/>
+                        </a:rPr>
+                        <a:t>Sprint 2</a:t>
+                      </a:r>
+                      <a:endParaRPr sz="1100">
+                        <a:latin typeface="Calibri"/>
+                        <a:ea typeface="Calibri"/>
+                        <a:cs typeface="Calibri"/>
+                        <a:sym typeface="Calibri"/>
+                      </a:endParaRPr>
+                    </a:p>
+                  </a:txBody>
+                  <a:tcPr marT="0" marB="0" marR="25400" marL="25400">
+                    <a:lnL cap="flat" cmpd="sng" w="9525">
+                      <a:solidFill>
+                        <a:srgbClr val="CCCCCC"/>
+                      </a:solidFill>
+                      <a:prstDash val="solid"/>
+                      <a:round/>
+                      <a:headEnd len="sm" w="sm" type="none"/>
+                      <a:tailEnd len="sm" w="sm" type="none"/>
+                    </a:lnL>
+                    <a:lnR cap="flat" cmpd="sng" w="9525">
+                      <a:solidFill>
+                        <a:srgbClr val="CCCCCC"/>
+                      </a:solidFill>
+                      <a:prstDash val="solid"/>
+                      <a:round/>
+                      <a:headEnd len="sm" w="sm" type="none"/>
+                      <a:tailEnd len="sm" w="sm" type="none"/>
+                    </a:lnR>
+                    <a:lnT cap="flat" cmpd="sng" w="9525">
+                      <a:solidFill>
+                        <a:srgbClr val="CCCCCC"/>
+                      </a:solidFill>
+                      <a:prstDash val="solid"/>
+                      <a:round/>
+                      <a:headEnd len="sm" w="sm" type="none"/>
+                      <a:tailEnd len="sm" w="sm" type="none"/>
+                    </a:lnT>
+                    <a:lnB cap="flat" cmpd="sng" w="9525">
+                      <a:solidFill>
+                        <a:srgbClr val="CCCCCC"/>
+                      </a:solidFill>
+                      <a:prstDash val="solid"/>
+                      <a:round/>
+                      <a:headEnd len="sm" w="sm" type="none"/>
+                      <a:tailEnd len="sm" w="sm" type="none"/>
+                    </a:lnB>
+                    <a:solidFill>
+                      <a:srgbClr val="F9FAFB"/>
+                    </a:solidFill>
+                  </a:tcPr>
+                </a:tc>
+                <a:tc>
+                  <a:txBody>
+                    <a:bodyPr/>
+                    <a:lstStyle/>
+                    <a:p>
+                      <a:pPr indent="0" lvl="0" marL="0" rtl="0" algn="ctr">
+                        <a:lnSpc>
+                          <a:spcPct val="115000"/>
+                        </a:lnSpc>
+                        <a:spcBef>
+                          <a:spcPts val="0"/>
+                        </a:spcBef>
+                        <a:spcAft>
+                          <a:spcPts val="0"/>
+                        </a:spcAft>
+                        <a:buNone/>
+                      </a:pPr>
+                      <a:r>
+                        <a:rPr lang="en-US" sz="1100">
+                          <a:latin typeface="Calibri"/>
+                          <a:ea typeface="Calibri"/>
+                          <a:cs typeface="Calibri"/>
+                          <a:sym typeface="Calibri"/>
+                        </a:rPr>
+                        <a:t>Pendiente</a:t>
+                      </a:r>
+                      <a:endParaRPr sz="1100">
+                        <a:latin typeface="Calibri"/>
+                        <a:ea typeface="Calibri"/>
+                        <a:cs typeface="Calibri"/>
+                        <a:sym typeface="Calibri"/>
+                      </a:endParaRPr>
+                    </a:p>
+                  </a:txBody>
+                  <a:tcPr marT="0" marB="0" marR="25400" marL="25400">
+                    <a:lnL cap="flat" cmpd="sng" w="9525">
+                      <a:solidFill>
+                        <a:srgbClr val="CCCCCC"/>
+                      </a:solidFill>
+                      <a:prstDash val="solid"/>
+                      <a:round/>
+                      <a:headEnd len="sm" w="sm" type="none"/>
+                      <a:tailEnd len="sm" w="sm" type="none"/>
+                    </a:lnL>
+                    <a:lnR cap="flat" cmpd="sng" w="9525">
+                      <a:solidFill>
+                        <a:srgbClr val="CCCCCC"/>
+                      </a:solidFill>
+                      <a:prstDash val="solid"/>
+                      <a:round/>
+                      <a:headEnd len="sm" w="sm" type="none"/>
+                      <a:tailEnd len="sm" w="sm" type="none"/>
+                    </a:lnR>
+                    <a:lnT cap="flat" cmpd="sng" w="9525">
+                      <a:solidFill>
+                        <a:srgbClr val="CCCCCC"/>
+                      </a:solidFill>
+                      <a:prstDash val="solid"/>
+                      <a:round/>
+                      <a:headEnd len="sm" w="sm" type="none"/>
+                      <a:tailEnd len="sm" w="sm" type="none"/>
+                    </a:lnT>
+                    <a:lnB cap="flat" cmpd="sng" w="9525">
+                      <a:solidFill>
+                        <a:srgbClr val="CCCCCC"/>
+                      </a:solidFill>
+                      <a:prstDash val="solid"/>
+                      <a:round/>
+                      <a:headEnd len="sm" w="sm" type="none"/>
+                      <a:tailEnd len="sm" w="sm" type="none"/>
+                    </a:lnB>
+                    <a:solidFill>
+                      <a:srgbClr val="F9FAFB"/>
+                    </a:solidFill>
+                  </a:tcPr>
+                </a:tc>
+                <a:tc>
+                  <a:txBody>
+                    <a:bodyPr/>
+                    <a:lstStyle/>
+                    <a:p>
+                      <a:pPr indent="0" lvl="0" marL="0" rtl="0" algn="l">
+                        <a:lnSpc>
+                          <a:spcPct val="115000"/>
+                        </a:lnSpc>
+                        <a:spcBef>
+                          <a:spcPts val="0"/>
+                        </a:spcBef>
+                        <a:spcAft>
+                          <a:spcPts val="0"/>
+                        </a:spcAft>
+                        <a:buNone/>
+                      </a:pPr>
+                      <a:r>
+                        <a:rPr lang="en-US" sz="1100">
+                          <a:latin typeface="Calibri"/>
+                          <a:ea typeface="Calibri"/>
+                          <a:cs typeface="Calibri"/>
+                          <a:sym typeface="Calibri"/>
+                        </a:rPr>
+                        <a:t>COMO Administrador de Empresa</a:t>
+                      </a:r>
+                      <a:endParaRPr sz="1100">
+                        <a:latin typeface="Calibri"/>
+                        <a:ea typeface="Calibri"/>
+                        <a:cs typeface="Calibri"/>
+                        <a:sym typeface="Calibri"/>
+                      </a:endParaRPr>
+                    </a:p>
+                    <a:p>
+                      <a:pPr indent="0" lvl="0" marL="0" rtl="0" algn="l">
+                        <a:lnSpc>
+                          <a:spcPct val="115000"/>
+                        </a:lnSpc>
+                        <a:spcBef>
+                          <a:spcPts val="0"/>
+                        </a:spcBef>
+                        <a:spcAft>
+                          <a:spcPts val="0"/>
+                        </a:spcAft>
+                        <a:buNone/>
+                      </a:pPr>
+                      <a:r>
+                        <a:rPr lang="en-US" sz="1100">
+                          <a:latin typeface="Calibri"/>
+                          <a:ea typeface="Calibri"/>
+                          <a:cs typeface="Calibri"/>
+                          <a:sym typeface="Calibri"/>
+                        </a:rPr>
+                        <a:t>QUIERO gestionar los dominios de correo de mi organización</a:t>
+                      </a:r>
+                      <a:endParaRPr sz="1100">
+                        <a:latin typeface="Calibri"/>
+                        <a:ea typeface="Calibri"/>
+                        <a:cs typeface="Calibri"/>
+                        <a:sym typeface="Calibri"/>
+                      </a:endParaRPr>
+                    </a:p>
+                    <a:p>
+                      <a:pPr indent="0" lvl="0" marL="0" rtl="0" algn="l">
+                        <a:lnSpc>
+                          <a:spcPct val="115000"/>
+                        </a:lnSpc>
+                        <a:spcBef>
+                          <a:spcPts val="0"/>
+                        </a:spcBef>
+                        <a:spcAft>
+                          <a:spcPts val="0"/>
+                        </a:spcAft>
+                        <a:buNone/>
+                      </a:pPr>
+                      <a:r>
+                        <a:rPr lang="en-US" sz="1100">
+                          <a:latin typeface="Calibri"/>
+                          <a:ea typeface="Calibri"/>
+                          <a:cs typeface="Calibri"/>
+                          <a:sym typeface="Calibri"/>
+                        </a:rPr>
+                        <a:t>PARA controlar el acceso exclusivo de la comunidad.</a:t>
+                      </a:r>
+                      <a:endParaRPr sz="1100">
+                        <a:latin typeface="Calibri"/>
+                        <a:ea typeface="Calibri"/>
+                        <a:cs typeface="Calibri"/>
+                        <a:sym typeface="Calibri"/>
+                      </a:endParaRPr>
+                    </a:p>
+                  </a:txBody>
+                  <a:tcPr marT="0" marB="0" marR="25400" marL="25400">
+                    <a:lnL cap="flat" cmpd="sng" w="9525">
+                      <a:solidFill>
+                        <a:srgbClr val="CCCCCC"/>
+                      </a:solidFill>
+                      <a:prstDash val="solid"/>
+                      <a:round/>
+                      <a:headEnd len="sm" w="sm" type="none"/>
+                      <a:tailEnd len="sm" w="sm" type="none"/>
+                    </a:lnL>
+                    <a:lnR cap="flat" cmpd="sng" w="9525">
+                      <a:solidFill>
+                        <a:srgbClr val="CCCCCC"/>
+                      </a:solidFill>
+                      <a:prstDash val="solid"/>
+                      <a:round/>
+                      <a:headEnd len="sm" w="sm" type="none"/>
+                      <a:tailEnd len="sm" w="sm" type="none"/>
+                    </a:lnR>
+                    <a:lnT cap="flat" cmpd="sng" w="9525">
+                      <a:solidFill>
+                        <a:srgbClr val="CCCCCC"/>
+                      </a:solidFill>
+                      <a:prstDash val="solid"/>
+                      <a:round/>
+                      <a:headEnd len="sm" w="sm" type="none"/>
+                      <a:tailEnd len="sm" w="sm" type="none"/>
+                    </a:lnT>
+                    <a:lnB cap="flat" cmpd="sng" w="9525">
+                      <a:solidFill>
+                        <a:srgbClr val="CCCCCC"/>
+                      </a:solidFill>
+                      <a:prstDash val="solid"/>
+                      <a:round/>
+                      <a:headEnd len="sm" w="sm" type="none"/>
+                      <a:tailEnd len="sm" w="sm" type="none"/>
+                    </a:lnB>
+                    <a:solidFill>
+                      <a:srgbClr val="F9FAFB"/>
+                    </a:solidFill>
+                  </a:tcPr>
+                </a:tc>
+                <a:tc>
+                  <a:txBody>
+                    <a:bodyPr/>
+                    <a:lstStyle/>
+                    <a:p>
+                      <a:pPr indent="0" lvl="0" marL="0" rtl="0" algn="l">
+                        <a:lnSpc>
+                          <a:spcPct val="115000"/>
+                        </a:lnSpc>
+                        <a:spcBef>
+                          <a:spcPts val="0"/>
+                        </a:spcBef>
+                        <a:spcAft>
+                          <a:spcPts val="0"/>
+                        </a:spcAft>
+                        <a:buNone/>
+                      </a:pPr>
+                      <a:r>
+                        <a:rPr lang="en-US" sz="1100">
+                          <a:latin typeface="Calibri"/>
+                          <a:ea typeface="Calibri"/>
+                          <a:cs typeface="Calibri"/>
+                          <a:sym typeface="Calibri"/>
+                        </a:rPr>
+                        <a:t>1. Módulo para asociar dominios autorizados (@duocuc.cl).</a:t>
+                      </a:r>
+                      <a:endParaRPr sz="1100">
+                        <a:latin typeface="Calibri"/>
+                        <a:ea typeface="Calibri"/>
+                        <a:cs typeface="Calibri"/>
+                        <a:sym typeface="Calibri"/>
+                      </a:endParaRPr>
+                    </a:p>
+                    <a:p>
+                      <a:pPr indent="0" lvl="0" marL="0" rtl="0" algn="l">
+                        <a:lnSpc>
+                          <a:spcPct val="115000"/>
+                        </a:lnSpc>
+                        <a:spcBef>
+                          <a:spcPts val="0"/>
+                        </a:spcBef>
+                        <a:spcAft>
+                          <a:spcPts val="0"/>
+                        </a:spcAft>
+                        <a:buNone/>
+                      </a:pPr>
+                      <a:r>
+                        <a:rPr lang="en-US" sz="1100">
+                          <a:latin typeface="Calibri"/>
+                          <a:ea typeface="Calibri"/>
+                          <a:cs typeface="Calibri"/>
+                          <a:sym typeface="Calibri"/>
+                        </a:rPr>
+                        <a:t>2. Edición y eliminación de dominios registrados.</a:t>
+                      </a:r>
+                      <a:endParaRPr sz="1100">
+                        <a:latin typeface="Calibri"/>
+                        <a:ea typeface="Calibri"/>
+                        <a:cs typeface="Calibri"/>
+                        <a:sym typeface="Calibri"/>
+                      </a:endParaRPr>
+                    </a:p>
+                    <a:p>
+                      <a:pPr indent="0" lvl="0" marL="0" rtl="0" algn="l">
+                        <a:lnSpc>
+                          <a:spcPct val="115000"/>
+                        </a:lnSpc>
+                        <a:spcBef>
+                          <a:spcPts val="0"/>
+                        </a:spcBef>
+                        <a:spcAft>
+                          <a:spcPts val="0"/>
+                        </a:spcAft>
+                        <a:buNone/>
+                      </a:pPr>
+                      <a:r>
+                        <a:rPr lang="en-US" sz="1100">
+                          <a:latin typeface="Calibri"/>
+                          <a:ea typeface="Calibri"/>
+                          <a:cs typeface="Calibri"/>
+                          <a:sym typeface="Calibri"/>
+                        </a:rPr>
+                        <a:t>3. Rechazo automático a correos no pertenecientes al dominio.</a:t>
+                      </a:r>
+                      <a:endParaRPr sz="1100">
+                        <a:latin typeface="Calibri"/>
+                        <a:ea typeface="Calibri"/>
+                        <a:cs typeface="Calibri"/>
+                        <a:sym typeface="Calibri"/>
+                      </a:endParaRPr>
+                    </a:p>
+                  </a:txBody>
+                  <a:tcPr marT="0" marB="0" marR="25400" marL="25400">
+                    <a:lnL cap="flat" cmpd="sng" w="9525">
+                      <a:solidFill>
+                        <a:srgbClr val="CCCCCC"/>
+                      </a:solidFill>
+                      <a:prstDash val="solid"/>
+                      <a:round/>
+                      <a:headEnd len="sm" w="sm" type="none"/>
+                      <a:tailEnd len="sm" w="sm" type="none"/>
+                    </a:lnL>
+                    <a:lnR cap="flat" cmpd="sng" w="9525">
+                      <a:solidFill>
+                        <a:srgbClr val="CCCCCC"/>
+                      </a:solidFill>
+                      <a:prstDash val="solid"/>
+                      <a:round/>
+                      <a:headEnd len="sm" w="sm" type="none"/>
+                      <a:tailEnd len="sm" w="sm" type="none"/>
+                    </a:lnR>
+                    <a:lnT cap="flat" cmpd="sng" w="9525">
+                      <a:solidFill>
+                        <a:srgbClr val="CCCCCC"/>
+                      </a:solidFill>
+                      <a:prstDash val="solid"/>
+                      <a:round/>
+                      <a:headEnd len="sm" w="sm" type="none"/>
+                      <a:tailEnd len="sm" w="sm" type="none"/>
+                    </a:lnT>
+                    <a:lnB cap="flat" cmpd="sng" w="9525">
+                      <a:solidFill>
+                        <a:srgbClr val="CCCCCC"/>
+                      </a:solidFill>
+                      <a:prstDash val="solid"/>
+                      <a:round/>
+                      <a:headEnd len="sm" w="sm" type="none"/>
+                      <a:tailEnd len="sm" w="sm" type="none"/>
+                    </a:lnB>
+                    <a:solidFill>
+                      <a:srgbClr val="F9FAFB"/>
+                    </a:solidFill>
+                  </a:tcPr>
+                </a:tc>
+                <a:tc>
+                  <a:txBody>
+                    <a:bodyPr/>
+                    <a:lstStyle/>
+                    <a:p>
+                      <a:pPr indent="0" lvl="0" marL="0" rtl="0" algn="l">
+                        <a:lnSpc>
+                          <a:spcPct val="115000"/>
+                        </a:lnSpc>
+                        <a:spcBef>
+                          <a:spcPts val="0"/>
+                        </a:spcBef>
+                        <a:spcAft>
+                          <a:spcPts val="0"/>
+                        </a:spcAft>
+                        <a:buNone/>
+                      </a:pPr>
+                      <a:r>
+                        <a:rPr lang="en-US" sz="1100">
+                          <a:latin typeface="Calibri"/>
+                          <a:ea typeface="Calibri"/>
+                          <a:cs typeface="Calibri"/>
+                          <a:sym typeface="Calibri"/>
+                        </a:rPr>
+                        <a:t>1. Middleware de verificación de dominio en NestJS.</a:t>
+                      </a:r>
+                      <a:endParaRPr sz="1100">
+                        <a:latin typeface="Calibri"/>
+                        <a:ea typeface="Calibri"/>
+                        <a:cs typeface="Calibri"/>
+                        <a:sym typeface="Calibri"/>
+                      </a:endParaRPr>
+                    </a:p>
+                    <a:p>
+                      <a:pPr indent="0" lvl="0" marL="0" rtl="0" algn="l">
+                        <a:lnSpc>
+                          <a:spcPct val="115000"/>
+                        </a:lnSpc>
+                        <a:spcBef>
+                          <a:spcPts val="0"/>
+                        </a:spcBef>
+                        <a:spcAft>
+                          <a:spcPts val="0"/>
+                        </a:spcAft>
+                        <a:buNone/>
+                      </a:pPr>
+                      <a:r>
+                        <a:rPr lang="en-US" sz="1100">
+                          <a:latin typeface="Calibri"/>
+                          <a:ea typeface="Calibri"/>
+                          <a:cs typeface="Calibri"/>
+                          <a:sym typeface="Calibri"/>
+                        </a:rPr>
+                        <a:t>2. Restricción de unicidad en PostgreSQL Supabase.</a:t>
+                      </a:r>
+                      <a:endParaRPr sz="1100">
+                        <a:latin typeface="Calibri"/>
+                        <a:ea typeface="Calibri"/>
+                        <a:cs typeface="Calibri"/>
+                        <a:sym typeface="Calibri"/>
+                      </a:endParaRPr>
+                    </a:p>
+                    <a:p>
+                      <a:pPr indent="0" lvl="0" marL="0" rtl="0" algn="l">
+                        <a:lnSpc>
+                          <a:spcPct val="115000"/>
+                        </a:lnSpc>
+                        <a:spcBef>
+                          <a:spcPts val="0"/>
+                        </a:spcBef>
+                        <a:spcAft>
+                          <a:spcPts val="0"/>
+                        </a:spcAft>
+                        <a:buNone/>
+                      </a:pPr>
+                      <a:r>
+                        <a:rPr lang="en-US" sz="1100">
+                          <a:latin typeface="Calibri"/>
+                          <a:ea typeface="Calibri"/>
+                          <a:cs typeface="Calibri"/>
+                          <a:sym typeface="Calibri"/>
+                        </a:rPr>
+                        <a:t>3. Pruebas de integración aprobadas.</a:t>
+                      </a:r>
+                      <a:endParaRPr sz="1100">
+                        <a:latin typeface="Calibri"/>
+                        <a:ea typeface="Calibri"/>
+                        <a:cs typeface="Calibri"/>
+                        <a:sym typeface="Calibri"/>
+                      </a:endParaRPr>
+                    </a:p>
+                  </a:txBody>
+                  <a:tcPr marT="0" marB="0" marR="25400" marL="25400">
+                    <a:lnL cap="flat" cmpd="sng" w="9525">
+                      <a:solidFill>
+                        <a:srgbClr val="CCCCCC"/>
+                      </a:solidFill>
+                      <a:prstDash val="solid"/>
+                      <a:round/>
+                      <a:headEnd len="sm" w="sm" type="none"/>
+                      <a:tailEnd len="sm" w="sm" type="none"/>
+                    </a:lnL>
+                    <a:lnR cap="flat" cmpd="sng" w="9525">
+                      <a:solidFill>
+                        <a:srgbClr val="CCCCCC"/>
+                      </a:solidFill>
+                      <a:prstDash val="solid"/>
+                      <a:round/>
+                      <a:headEnd len="sm" w="sm" type="none"/>
+                      <a:tailEnd len="sm" w="sm" type="none"/>
+                    </a:lnR>
+                    <a:lnT cap="flat" cmpd="sng" w="9525">
+                      <a:solidFill>
+                        <a:srgbClr val="CCCCCC"/>
+                      </a:solidFill>
+                      <a:prstDash val="solid"/>
+                      <a:round/>
+                      <a:headEnd len="sm" w="sm" type="none"/>
+                      <a:tailEnd len="sm" w="sm" type="none"/>
+                    </a:lnT>
+                    <a:lnB cap="flat" cmpd="sng" w="9525">
+                      <a:solidFill>
+                        <a:srgbClr val="CCCCCC"/>
+                      </a:solidFill>
+                      <a:prstDash val="solid"/>
+                      <a:round/>
+                      <a:headEnd len="sm" w="sm" type="none"/>
+                      <a:tailEnd len="sm" w="sm" type="none"/>
+                    </a:lnB>
+                    <a:solidFill>
+                      <a:srgbClr val="F9FAFB"/>
+                    </a:solidFill>
+                  </a:tcPr>
+                </a:tc>
+              </a:tr>
+              <a:tr h="974850">
+                <a:tc>
+                  <a:txBody>
+                    <a:bodyPr/>
+                    <a:lstStyle/>
+                    <a:p>
+                      <a:pPr indent="0" lvl="0" marL="0" rtl="0" algn="ctr">
+                        <a:lnSpc>
+                          <a:spcPct val="115000"/>
+                        </a:lnSpc>
+                        <a:spcBef>
+                          <a:spcPts val="0"/>
+                        </a:spcBef>
+                        <a:spcAft>
+                          <a:spcPts val="0"/>
+                        </a:spcAft>
+                        <a:buNone/>
+                      </a:pPr>
+                      <a:r>
+                        <a:rPr b="1" lang="en-US" sz="1100">
+                          <a:latin typeface="Calibri"/>
+                          <a:ea typeface="Calibri"/>
+                          <a:cs typeface="Calibri"/>
+                          <a:sym typeface="Calibri"/>
+                        </a:rPr>
+                        <a:t>HU-04</a:t>
+                      </a:r>
+                      <a:endParaRPr sz="1100">
+                        <a:latin typeface="Calibri"/>
+                        <a:ea typeface="Calibri"/>
+                        <a:cs typeface="Calibri"/>
+                        <a:sym typeface="Calibri"/>
+                      </a:endParaRPr>
+                    </a:p>
+                  </a:txBody>
+                  <a:tcPr marT="0" marB="0" marR="25400" marL="25400">
+                    <a:lnL cap="flat" cmpd="sng" w="9525">
+                      <a:solidFill>
+                        <a:srgbClr val="D9D9D9"/>
+                      </a:solidFill>
+                      <a:prstDash val="solid"/>
+                      <a:round/>
+                      <a:headEnd len="sm" w="sm" type="none"/>
+                      <a:tailEnd len="sm" w="sm" type="none"/>
+                    </a:lnL>
+                    <a:lnR cap="flat" cmpd="sng" w="9525">
+                      <a:solidFill>
+                        <a:srgbClr val="CCCCCC"/>
+                      </a:solidFill>
+                      <a:prstDash val="solid"/>
+                      <a:round/>
+                      <a:headEnd len="sm" w="sm" type="none"/>
+                      <a:tailEnd len="sm" w="sm" type="none"/>
+                    </a:lnR>
+                    <a:lnT cap="flat" cmpd="sng" w="9525">
+                      <a:solidFill>
+                        <a:srgbClr val="CCCCCC"/>
+                      </a:solidFill>
+                      <a:prstDash val="solid"/>
+                      <a:round/>
+                      <a:headEnd len="sm" w="sm" type="none"/>
+                      <a:tailEnd len="sm" w="sm" type="none"/>
+                    </a:lnT>
+                    <a:lnB cap="flat" cmpd="sng" w="9525">
+                      <a:solidFill>
+                        <a:srgbClr val="CCCCCC"/>
+                      </a:solidFill>
+                      <a:prstDash val="solid"/>
+                      <a:round/>
+                      <a:headEnd len="sm" w="sm" type="none"/>
+                      <a:tailEnd len="sm" w="sm" type="none"/>
+                    </a:lnB>
+                  </a:tcPr>
+                </a:tc>
+                <a:tc>
+                  <a:txBody>
+                    <a:bodyPr/>
+                    <a:lstStyle/>
+                    <a:p>
+                      <a:pPr indent="0" lvl="0" marL="0" rtl="0" algn="l">
+                        <a:lnSpc>
+                          <a:spcPct val="115000"/>
+                        </a:lnSpc>
+                        <a:spcBef>
+                          <a:spcPts val="0"/>
+                        </a:spcBef>
+                        <a:spcAft>
+                          <a:spcPts val="0"/>
+                        </a:spcAft>
+                        <a:buNone/>
+                      </a:pPr>
+                      <a:r>
+                        <a:rPr lang="en-US" sz="1100">
+                          <a:latin typeface="Calibri"/>
+                          <a:ea typeface="Calibri"/>
+                          <a:cs typeface="Calibri"/>
+                          <a:sym typeface="Calibri"/>
+                        </a:rPr>
+                        <a:t>Épica 1: Administración Global</a:t>
+                      </a:r>
+                      <a:endParaRPr sz="1100">
+                        <a:latin typeface="Calibri"/>
+                        <a:ea typeface="Calibri"/>
+                        <a:cs typeface="Calibri"/>
+                        <a:sym typeface="Calibri"/>
+                      </a:endParaRPr>
+                    </a:p>
+                  </a:txBody>
+                  <a:tcPr marT="0" marB="0" marR="25400" marL="25400">
+                    <a:lnL cap="flat" cmpd="sng" w="9525">
+                      <a:solidFill>
+                        <a:srgbClr val="CCCCCC"/>
+                      </a:solidFill>
+                      <a:prstDash val="solid"/>
+                      <a:round/>
+                      <a:headEnd len="sm" w="sm" type="none"/>
+                      <a:tailEnd len="sm" w="sm" type="none"/>
+                    </a:lnL>
+                    <a:lnR cap="flat" cmpd="sng" w="9525">
+                      <a:solidFill>
+                        <a:srgbClr val="CCCCCC"/>
+                      </a:solidFill>
+                      <a:prstDash val="solid"/>
+                      <a:round/>
+                      <a:headEnd len="sm" w="sm" type="none"/>
+                      <a:tailEnd len="sm" w="sm" type="none"/>
+                    </a:lnR>
+                    <a:lnT cap="flat" cmpd="sng" w="9525">
+                      <a:solidFill>
+                        <a:srgbClr val="CCCCCC"/>
+                      </a:solidFill>
+                      <a:prstDash val="solid"/>
+                      <a:round/>
+                      <a:headEnd len="sm" w="sm" type="none"/>
+                      <a:tailEnd len="sm" w="sm" type="none"/>
+                    </a:lnT>
+                    <a:lnB cap="flat" cmpd="sng" w="9525">
+                      <a:solidFill>
+                        <a:srgbClr val="CCCCCC"/>
+                      </a:solidFill>
+                      <a:prstDash val="solid"/>
+                      <a:round/>
+                      <a:headEnd len="sm" w="sm" type="none"/>
+                      <a:tailEnd len="sm" w="sm" type="none"/>
+                    </a:lnB>
+                  </a:tcPr>
+                </a:tc>
+                <a:tc>
+                  <a:txBody>
+                    <a:bodyPr/>
+                    <a:lstStyle/>
+                    <a:p>
+                      <a:pPr indent="0" lvl="0" marL="0" rtl="0" algn="l">
+                        <a:lnSpc>
+                          <a:spcPct val="115000"/>
+                        </a:lnSpc>
+                        <a:spcBef>
+                          <a:spcPts val="0"/>
+                        </a:spcBef>
+                        <a:spcAft>
+                          <a:spcPts val="0"/>
+                        </a:spcAft>
+                        <a:buNone/>
+                      </a:pPr>
+                      <a:r>
+                        <a:rPr lang="en-US" sz="1100">
+                          <a:latin typeface="Calibri"/>
+                          <a:ea typeface="Calibri"/>
+                          <a:cs typeface="Calibri"/>
+                          <a:sym typeface="Calibri"/>
+                        </a:rPr>
+                        <a:t>Onboarding B2B y Configuración de Aislamiento Supabase RLS</a:t>
+                      </a:r>
+                      <a:endParaRPr sz="1100">
+                        <a:latin typeface="Calibri"/>
+                        <a:ea typeface="Calibri"/>
+                        <a:cs typeface="Calibri"/>
+                        <a:sym typeface="Calibri"/>
+                      </a:endParaRPr>
+                    </a:p>
+                  </a:txBody>
+                  <a:tcPr marT="0" marB="0" marR="25400" marL="25400">
+                    <a:lnL cap="flat" cmpd="sng" w="9525">
+                      <a:solidFill>
+                        <a:srgbClr val="CCCCCC"/>
+                      </a:solidFill>
+                      <a:prstDash val="solid"/>
+                      <a:round/>
+                      <a:headEnd len="sm" w="sm" type="none"/>
+                      <a:tailEnd len="sm" w="sm" type="none"/>
+                    </a:lnL>
+                    <a:lnR cap="flat" cmpd="sng" w="9525">
+                      <a:solidFill>
+                        <a:srgbClr val="CCCCCC"/>
+                      </a:solidFill>
+                      <a:prstDash val="solid"/>
+                      <a:round/>
+                      <a:headEnd len="sm" w="sm" type="none"/>
+                      <a:tailEnd len="sm" w="sm" type="none"/>
+                    </a:lnR>
+                    <a:lnT cap="flat" cmpd="sng" w="9525">
+                      <a:solidFill>
+                        <a:srgbClr val="CCCCCC"/>
+                      </a:solidFill>
+                      <a:prstDash val="solid"/>
+                      <a:round/>
+                      <a:headEnd len="sm" w="sm" type="none"/>
+                      <a:tailEnd len="sm" w="sm" type="none"/>
+                    </a:lnT>
+                    <a:lnB cap="flat" cmpd="sng" w="9525">
+                      <a:solidFill>
+                        <a:srgbClr val="CCCCCC"/>
+                      </a:solidFill>
+                      <a:prstDash val="solid"/>
+                      <a:round/>
+                      <a:headEnd len="sm" w="sm" type="none"/>
+                      <a:tailEnd len="sm" w="sm" type="none"/>
+                    </a:lnB>
+                  </a:tcPr>
+                </a:tc>
+                <a:tc>
+                  <a:txBody>
+                    <a:bodyPr/>
+                    <a:lstStyle/>
+                    <a:p>
+                      <a:pPr indent="0" lvl="0" marL="0" rtl="0" algn="l">
+                        <a:lnSpc>
+                          <a:spcPct val="115000"/>
+                        </a:lnSpc>
+                        <a:spcBef>
+                          <a:spcPts val="0"/>
+                        </a:spcBef>
+                        <a:spcAft>
+                          <a:spcPts val="0"/>
+                        </a:spcAft>
+                        <a:buNone/>
+                      </a:pPr>
+                      <a:r>
+                        <a:rPr lang="en-US" sz="1100">
+                          <a:latin typeface="Calibri"/>
+                          <a:ea typeface="Calibri"/>
+                          <a:cs typeface="Calibri"/>
+                          <a:sym typeface="Calibri"/>
+                        </a:rPr>
+                        <a:t>Admin Empresa</a:t>
+                      </a:r>
+                      <a:endParaRPr sz="1100">
+                        <a:latin typeface="Calibri"/>
+                        <a:ea typeface="Calibri"/>
+                        <a:cs typeface="Calibri"/>
+                        <a:sym typeface="Calibri"/>
+                      </a:endParaRPr>
+                    </a:p>
+                  </a:txBody>
+                  <a:tcPr marT="0" marB="0" marR="25400" marL="25400">
+                    <a:lnL cap="flat" cmpd="sng" w="9525">
+                      <a:solidFill>
+                        <a:srgbClr val="CCCCCC"/>
+                      </a:solidFill>
+                      <a:prstDash val="solid"/>
+                      <a:round/>
+                      <a:headEnd len="sm" w="sm" type="none"/>
+                      <a:tailEnd len="sm" w="sm" type="none"/>
+                    </a:lnL>
+                    <a:lnR cap="flat" cmpd="sng" w="9525">
+                      <a:solidFill>
+                        <a:srgbClr val="CCCCCC"/>
+                      </a:solidFill>
+                      <a:prstDash val="solid"/>
+                      <a:round/>
+                      <a:headEnd len="sm" w="sm" type="none"/>
+                      <a:tailEnd len="sm" w="sm" type="none"/>
+                    </a:lnR>
+                    <a:lnT cap="flat" cmpd="sng" w="9525">
+                      <a:solidFill>
+                        <a:srgbClr val="CCCCCC"/>
+                      </a:solidFill>
+                      <a:prstDash val="solid"/>
+                      <a:round/>
+                      <a:headEnd len="sm" w="sm" type="none"/>
+                      <a:tailEnd len="sm" w="sm" type="none"/>
+                    </a:lnT>
+                    <a:lnB cap="flat" cmpd="sng" w="9525">
+                      <a:solidFill>
+                        <a:srgbClr val="CCCCCC"/>
+                      </a:solidFill>
+                      <a:prstDash val="solid"/>
+                      <a:round/>
+                      <a:headEnd len="sm" w="sm" type="none"/>
+                      <a:tailEnd len="sm" w="sm" type="none"/>
+                    </a:lnB>
+                  </a:tcPr>
+                </a:tc>
+                <a:tc>
+                  <a:txBody>
+                    <a:bodyPr/>
+                    <a:lstStyle/>
+                    <a:p>
+                      <a:pPr indent="0" lvl="0" marL="0" rtl="0" algn="ctr">
+                        <a:lnSpc>
+                          <a:spcPct val="115000"/>
+                        </a:lnSpc>
+                        <a:spcBef>
+                          <a:spcPts val="0"/>
+                        </a:spcBef>
+                        <a:spcAft>
+                          <a:spcPts val="0"/>
+                        </a:spcAft>
+                        <a:buNone/>
+                      </a:pPr>
+                      <a:r>
+                        <a:rPr lang="en-US" sz="1100">
+                          <a:latin typeface="Calibri"/>
+                          <a:ea typeface="Calibri"/>
+                          <a:cs typeface="Calibri"/>
+                          <a:sym typeface="Calibri"/>
+                        </a:rPr>
+                        <a:t>Alta</a:t>
+                      </a:r>
+                      <a:endParaRPr sz="1100">
+                        <a:latin typeface="Calibri"/>
+                        <a:ea typeface="Calibri"/>
+                        <a:cs typeface="Calibri"/>
+                        <a:sym typeface="Calibri"/>
+                      </a:endParaRPr>
+                    </a:p>
+                  </a:txBody>
+                  <a:tcPr marT="0" marB="0" marR="25400" marL="25400">
+                    <a:lnL cap="flat" cmpd="sng" w="9525">
+                      <a:solidFill>
+                        <a:srgbClr val="CCCCCC"/>
+                      </a:solidFill>
+                      <a:prstDash val="solid"/>
+                      <a:round/>
+                      <a:headEnd len="sm" w="sm" type="none"/>
+                      <a:tailEnd len="sm" w="sm" type="none"/>
+                    </a:lnL>
+                    <a:lnR cap="flat" cmpd="sng" w="9525">
+                      <a:solidFill>
+                        <a:srgbClr val="CCCCCC"/>
+                      </a:solidFill>
+                      <a:prstDash val="solid"/>
+                      <a:round/>
+                      <a:headEnd len="sm" w="sm" type="none"/>
+                      <a:tailEnd len="sm" w="sm" type="none"/>
+                    </a:lnR>
+                    <a:lnT cap="flat" cmpd="sng" w="9525">
+                      <a:solidFill>
+                        <a:srgbClr val="CCCCCC"/>
+                      </a:solidFill>
+                      <a:prstDash val="solid"/>
+                      <a:round/>
+                      <a:headEnd len="sm" w="sm" type="none"/>
+                      <a:tailEnd len="sm" w="sm" type="none"/>
+                    </a:lnT>
+                    <a:lnB cap="flat" cmpd="sng" w="9525">
+                      <a:solidFill>
+                        <a:srgbClr val="CCCCCC"/>
+                      </a:solidFill>
+                      <a:prstDash val="solid"/>
+                      <a:round/>
+                      <a:headEnd len="sm" w="sm" type="none"/>
+                      <a:tailEnd len="sm" w="sm" type="none"/>
+                    </a:lnB>
+                  </a:tcPr>
+                </a:tc>
+                <a:tc>
+                  <a:txBody>
+                    <a:bodyPr/>
+                    <a:lstStyle/>
+                    <a:p>
+                      <a:pPr indent="0" lvl="0" marL="0" rtl="0" algn="ctr">
+                        <a:lnSpc>
+                          <a:spcPct val="115000"/>
+                        </a:lnSpc>
+                        <a:spcBef>
+                          <a:spcPts val="0"/>
+                        </a:spcBef>
+                        <a:spcAft>
+                          <a:spcPts val="0"/>
+                        </a:spcAft>
+                        <a:buNone/>
+                      </a:pPr>
+                      <a:r>
+                        <a:rPr b="1" lang="en-US" sz="1100">
+                          <a:latin typeface="Calibri"/>
+                          <a:ea typeface="Calibri"/>
+                          <a:cs typeface="Calibri"/>
+                          <a:sym typeface="Calibri"/>
+                        </a:rPr>
+                        <a:t>5</a:t>
+                      </a:r>
+                      <a:endParaRPr sz="1100">
+                        <a:latin typeface="Calibri"/>
+                        <a:ea typeface="Calibri"/>
+                        <a:cs typeface="Calibri"/>
+                        <a:sym typeface="Calibri"/>
+                      </a:endParaRPr>
+                    </a:p>
+                  </a:txBody>
+                  <a:tcPr marT="0" marB="0" marR="25400" marL="25400">
+                    <a:lnL cap="flat" cmpd="sng" w="9525">
+                      <a:solidFill>
+                        <a:srgbClr val="CCCCCC"/>
+                      </a:solidFill>
+                      <a:prstDash val="solid"/>
+                      <a:round/>
+                      <a:headEnd len="sm" w="sm" type="none"/>
+                      <a:tailEnd len="sm" w="sm" type="none"/>
+                    </a:lnL>
+                    <a:lnR cap="flat" cmpd="sng" w="9525">
+                      <a:solidFill>
+                        <a:srgbClr val="CCCCCC"/>
+                      </a:solidFill>
+                      <a:prstDash val="solid"/>
+                      <a:round/>
+                      <a:headEnd len="sm" w="sm" type="none"/>
+                      <a:tailEnd len="sm" w="sm" type="none"/>
+                    </a:lnR>
+                    <a:lnT cap="flat" cmpd="sng" w="9525">
+                      <a:solidFill>
+                        <a:srgbClr val="CCCCCC"/>
+                      </a:solidFill>
+                      <a:prstDash val="solid"/>
+                      <a:round/>
+                      <a:headEnd len="sm" w="sm" type="none"/>
+                      <a:tailEnd len="sm" w="sm" type="none"/>
+                    </a:lnT>
+                    <a:lnB cap="flat" cmpd="sng" w="9525">
+                      <a:solidFill>
+                        <a:srgbClr val="CCCCCC"/>
+                      </a:solidFill>
+                      <a:prstDash val="solid"/>
+                      <a:round/>
+                      <a:headEnd len="sm" w="sm" type="none"/>
+                      <a:tailEnd len="sm" w="sm" type="none"/>
+                    </a:lnB>
+                  </a:tcPr>
+                </a:tc>
+                <a:tc>
+                  <a:txBody>
+                    <a:bodyPr/>
+                    <a:lstStyle/>
+                    <a:p>
+                      <a:pPr indent="0" lvl="0" marL="0" rtl="0" algn="ctr">
+                        <a:lnSpc>
+                          <a:spcPct val="115000"/>
+                        </a:lnSpc>
+                        <a:spcBef>
+                          <a:spcPts val="0"/>
+                        </a:spcBef>
+                        <a:spcAft>
+                          <a:spcPts val="0"/>
+                        </a:spcAft>
+                        <a:buNone/>
+                      </a:pPr>
+                      <a:r>
+                        <a:rPr lang="en-US" sz="1100">
+                          <a:latin typeface="Calibri"/>
+                          <a:ea typeface="Calibri"/>
+                          <a:cs typeface="Calibri"/>
+                          <a:sym typeface="Calibri"/>
+                        </a:rPr>
+                        <a:t>Sprint 2</a:t>
+                      </a:r>
+                      <a:endParaRPr sz="1100">
+                        <a:latin typeface="Calibri"/>
+                        <a:ea typeface="Calibri"/>
+                        <a:cs typeface="Calibri"/>
+                        <a:sym typeface="Calibri"/>
+                      </a:endParaRPr>
+                    </a:p>
+                  </a:txBody>
+                  <a:tcPr marT="0" marB="0" marR="25400" marL="25400">
+                    <a:lnL cap="flat" cmpd="sng" w="9525">
+                      <a:solidFill>
+                        <a:srgbClr val="CCCCCC"/>
+                      </a:solidFill>
+                      <a:prstDash val="solid"/>
+                      <a:round/>
+                      <a:headEnd len="sm" w="sm" type="none"/>
+                      <a:tailEnd len="sm" w="sm" type="none"/>
+                    </a:lnL>
+                    <a:lnR cap="flat" cmpd="sng" w="9525">
+                      <a:solidFill>
+                        <a:srgbClr val="CCCCCC"/>
+                      </a:solidFill>
+                      <a:prstDash val="solid"/>
+                      <a:round/>
+                      <a:headEnd len="sm" w="sm" type="none"/>
+                      <a:tailEnd len="sm" w="sm" type="none"/>
+                    </a:lnR>
+                    <a:lnT cap="flat" cmpd="sng" w="9525">
+                      <a:solidFill>
+                        <a:srgbClr val="CCCCCC"/>
+                      </a:solidFill>
+                      <a:prstDash val="solid"/>
+                      <a:round/>
+                      <a:headEnd len="sm" w="sm" type="none"/>
+                      <a:tailEnd len="sm" w="sm" type="none"/>
+                    </a:lnT>
+                    <a:lnB cap="flat" cmpd="sng" w="9525">
+                      <a:solidFill>
+                        <a:srgbClr val="CCCCCC"/>
+                      </a:solidFill>
+                      <a:prstDash val="solid"/>
+                      <a:round/>
+                      <a:headEnd len="sm" w="sm" type="none"/>
+                      <a:tailEnd len="sm" w="sm" type="none"/>
+                    </a:lnB>
+                  </a:tcPr>
+                </a:tc>
+                <a:tc>
+                  <a:txBody>
+                    <a:bodyPr/>
+                    <a:lstStyle/>
+                    <a:p>
+                      <a:pPr indent="0" lvl="0" marL="0" rtl="0" algn="ctr">
+                        <a:lnSpc>
+                          <a:spcPct val="115000"/>
+                        </a:lnSpc>
+                        <a:spcBef>
+                          <a:spcPts val="0"/>
+                        </a:spcBef>
+                        <a:spcAft>
+                          <a:spcPts val="0"/>
+                        </a:spcAft>
+                        <a:buNone/>
+                      </a:pPr>
+                      <a:r>
+                        <a:rPr lang="en-US" sz="1100">
+                          <a:latin typeface="Calibri"/>
+                          <a:ea typeface="Calibri"/>
+                          <a:cs typeface="Calibri"/>
+                          <a:sym typeface="Calibri"/>
+                        </a:rPr>
+                        <a:t>Pendiente</a:t>
+                      </a:r>
+                      <a:endParaRPr sz="1100">
+                        <a:latin typeface="Calibri"/>
+                        <a:ea typeface="Calibri"/>
+                        <a:cs typeface="Calibri"/>
+                        <a:sym typeface="Calibri"/>
+                      </a:endParaRPr>
+                    </a:p>
+                  </a:txBody>
+                  <a:tcPr marT="0" marB="0" marR="25400" marL="25400">
+                    <a:lnL cap="flat" cmpd="sng" w="9525">
+                      <a:solidFill>
+                        <a:srgbClr val="CCCCCC"/>
+                      </a:solidFill>
+                      <a:prstDash val="solid"/>
+                      <a:round/>
+                      <a:headEnd len="sm" w="sm" type="none"/>
+                      <a:tailEnd len="sm" w="sm" type="none"/>
+                    </a:lnL>
+                    <a:lnR cap="flat" cmpd="sng" w="9525">
+                      <a:solidFill>
+                        <a:srgbClr val="CCCCCC"/>
+                      </a:solidFill>
+                      <a:prstDash val="solid"/>
+                      <a:round/>
+                      <a:headEnd len="sm" w="sm" type="none"/>
+                      <a:tailEnd len="sm" w="sm" type="none"/>
+                    </a:lnR>
+                    <a:lnT cap="flat" cmpd="sng" w="9525">
+                      <a:solidFill>
+                        <a:srgbClr val="CCCCCC"/>
+                      </a:solidFill>
+                      <a:prstDash val="solid"/>
+                      <a:round/>
+                      <a:headEnd len="sm" w="sm" type="none"/>
+                      <a:tailEnd len="sm" w="sm" type="none"/>
+                    </a:lnT>
+                    <a:lnB cap="flat" cmpd="sng" w="9525">
+                      <a:solidFill>
+                        <a:srgbClr val="CCCCCC"/>
+                      </a:solidFill>
+                      <a:prstDash val="solid"/>
+                      <a:round/>
+                      <a:headEnd len="sm" w="sm" type="none"/>
+                      <a:tailEnd len="sm" w="sm" type="none"/>
+                    </a:lnB>
+                  </a:tcPr>
+                </a:tc>
+                <a:tc>
+                  <a:txBody>
+                    <a:bodyPr/>
+                    <a:lstStyle/>
+                    <a:p>
+                      <a:pPr indent="0" lvl="0" marL="0" rtl="0" algn="l">
+                        <a:lnSpc>
+                          <a:spcPct val="115000"/>
+                        </a:lnSpc>
+                        <a:spcBef>
+                          <a:spcPts val="0"/>
+                        </a:spcBef>
+                        <a:spcAft>
+                          <a:spcPts val="0"/>
+                        </a:spcAft>
+                        <a:buNone/>
+                      </a:pPr>
+                      <a:r>
+                        <a:rPr lang="en-US" sz="1100">
+                          <a:latin typeface="Calibri"/>
+                          <a:ea typeface="Calibri"/>
+                          <a:cs typeface="Calibri"/>
+                          <a:sym typeface="Calibri"/>
+                        </a:rPr>
+                        <a:t>COMO Administrador de Empresa</a:t>
+                      </a:r>
+                      <a:endParaRPr sz="1100">
+                        <a:latin typeface="Calibri"/>
+                        <a:ea typeface="Calibri"/>
+                        <a:cs typeface="Calibri"/>
+                        <a:sym typeface="Calibri"/>
+                      </a:endParaRPr>
+                    </a:p>
+                    <a:p>
+                      <a:pPr indent="0" lvl="0" marL="0" rtl="0" algn="l">
+                        <a:lnSpc>
+                          <a:spcPct val="115000"/>
+                        </a:lnSpc>
+                        <a:spcBef>
+                          <a:spcPts val="0"/>
+                        </a:spcBef>
+                        <a:spcAft>
+                          <a:spcPts val="0"/>
+                        </a:spcAft>
+                        <a:buNone/>
+                      </a:pPr>
+                      <a:r>
+                        <a:rPr lang="en-US" sz="1100">
+                          <a:latin typeface="Calibri"/>
+                          <a:ea typeface="Calibri"/>
+                          <a:cs typeface="Calibri"/>
+                          <a:sym typeface="Calibri"/>
+                        </a:rPr>
+                        <a:t>QUIERO completar el onboarding y aprovisionar las políticas RLS</a:t>
+                      </a:r>
+                      <a:endParaRPr sz="1100">
+                        <a:latin typeface="Calibri"/>
+                        <a:ea typeface="Calibri"/>
+                        <a:cs typeface="Calibri"/>
+                        <a:sym typeface="Calibri"/>
+                      </a:endParaRPr>
+                    </a:p>
+                    <a:p>
+                      <a:pPr indent="0" lvl="0" marL="0" rtl="0" algn="l">
+                        <a:lnSpc>
+                          <a:spcPct val="115000"/>
+                        </a:lnSpc>
+                        <a:spcBef>
+                          <a:spcPts val="0"/>
+                        </a:spcBef>
+                        <a:spcAft>
+                          <a:spcPts val="0"/>
+                        </a:spcAft>
+                        <a:buNone/>
+                      </a:pPr>
+                      <a:r>
+                        <a:rPr lang="en-US" sz="1100">
+                          <a:latin typeface="Calibri"/>
+                          <a:ea typeface="Calibri"/>
+                          <a:cs typeface="Calibri"/>
+                          <a:sym typeface="Calibri"/>
+                        </a:rPr>
+                        <a:t>PARA garantizar el aislamiento estricto de datos.</a:t>
+                      </a:r>
+                      <a:endParaRPr sz="1100">
+                        <a:latin typeface="Calibri"/>
+                        <a:ea typeface="Calibri"/>
+                        <a:cs typeface="Calibri"/>
+                        <a:sym typeface="Calibri"/>
+                      </a:endParaRPr>
+                    </a:p>
+                  </a:txBody>
+                  <a:tcPr marT="0" marB="0" marR="25400" marL="25400">
+                    <a:lnL cap="flat" cmpd="sng" w="9525">
+                      <a:solidFill>
+                        <a:srgbClr val="CCCCCC"/>
+                      </a:solidFill>
+                      <a:prstDash val="solid"/>
+                      <a:round/>
+                      <a:headEnd len="sm" w="sm" type="none"/>
+                      <a:tailEnd len="sm" w="sm" type="none"/>
+                    </a:lnL>
+                    <a:lnR cap="flat" cmpd="sng" w="9525">
+                      <a:solidFill>
+                        <a:srgbClr val="CCCCCC"/>
+                      </a:solidFill>
+                      <a:prstDash val="solid"/>
+                      <a:round/>
+                      <a:headEnd len="sm" w="sm" type="none"/>
+                      <a:tailEnd len="sm" w="sm" type="none"/>
+                    </a:lnR>
+                    <a:lnT cap="flat" cmpd="sng" w="9525">
+                      <a:solidFill>
+                        <a:srgbClr val="CCCCCC"/>
+                      </a:solidFill>
+                      <a:prstDash val="solid"/>
+                      <a:round/>
+                      <a:headEnd len="sm" w="sm" type="none"/>
+                      <a:tailEnd len="sm" w="sm" type="none"/>
+                    </a:lnT>
+                    <a:lnB cap="flat" cmpd="sng" w="9525">
+                      <a:solidFill>
+                        <a:srgbClr val="CCCCCC"/>
+                      </a:solidFill>
+                      <a:prstDash val="solid"/>
+                      <a:round/>
+                      <a:headEnd len="sm" w="sm" type="none"/>
+                      <a:tailEnd len="sm" w="sm" type="none"/>
+                    </a:lnB>
+                  </a:tcPr>
+                </a:tc>
+                <a:tc>
+                  <a:txBody>
+                    <a:bodyPr/>
+                    <a:lstStyle/>
+                    <a:p>
+                      <a:pPr indent="0" lvl="0" marL="0" rtl="0" algn="l">
+                        <a:lnSpc>
+                          <a:spcPct val="115000"/>
+                        </a:lnSpc>
+                        <a:spcBef>
+                          <a:spcPts val="0"/>
+                        </a:spcBef>
+                        <a:spcAft>
+                          <a:spcPts val="0"/>
+                        </a:spcAft>
+                        <a:buNone/>
+                      </a:pPr>
+                      <a:r>
+                        <a:rPr lang="en-US" sz="1100">
+                          <a:latin typeface="Calibri"/>
+                          <a:ea typeface="Calibri"/>
+                          <a:cs typeface="Calibri"/>
+                          <a:sym typeface="Calibri"/>
+                        </a:rPr>
+                        <a:t>1. Flujo paso a paso de bienvenida y sedes.</a:t>
+                      </a:r>
+                      <a:endParaRPr sz="1100">
+                        <a:latin typeface="Calibri"/>
+                        <a:ea typeface="Calibri"/>
+                        <a:cs typeface="Calibri"/>
+                        <a:sym typeface="Calibri"/>
+                      </a:endParaRPr>
+                    </a:p>
+                    <a:p>
+                      <a:pPr indent="0" lvl="0" marL="0" rtl="0" algn="l">
+                        <a:lnSpc>
+                          <a:spcPct val="115000"/>
+                        </a:lnSpc>
+                        <a:spcBef>
+                          <a:spcPts val="0"/>
+                        </a:spcBef>
+                        <a:spcAft>
+                          <a:spcPts val="0"/>
+                        </a:spcAft>
+                        <a:buNone/>
+                      </a:pPr>
+                      <a:r>
+                        <a:rPr lang="en-US" sz="1100">
+                          <a:latin typeface="Calibri"/>
+                          <a:ea typeface="Calibri"/>
+                          <a:cs typeface="Calibri"/>
+                          <a:sym typeface="Calibri"/>
+                        </a:rPr>
+                        <a:t>2. Activación automática de Supabase RLS.</a:t>
+                      </a:r>
+                      <a:endParaRPr sz="1100">
+                        <a:latin typeface="Calibri"/>
+                        <a:ea typeface="Calibri"/>
+                        <a:cs typeface="Calibri"/>
+                        <a:sym typeface="Calibri"/>
+                      </a:endParaRPr>
+                    </a:p>
+                    <a:p>
+                      <a:pPr indent="0" lvl="0" marL="0" rtl="0" algn="l">
+                        <a:lnSpc>
+                          <a:spcPct val="115000"/>
+                        </a:lnSpc>
+                        <a:spcBef>
+                          <a:spcPts val="0"/>
+                        </a:spcBef>
+                        <a:spcAft>
+                          <a:spcPts val="0"/>
+                        </a:spcAft>
+                        <a:buNone/>
+                      </a:pPr>
+                      <a:r>
+                        <a:rPr lang="en-US" sz="1100">
+                          <a:latin typeface="Calibri"/>
+                          <a:ea typeface="Calibri"/>
+                          <a:cs typeface="Calibri"/>
+                          <a:sym typeface="Calibri"/>
+                        </a:rPr>
+                        <a:t>3. Emisión de certificado digital de tenant.</a:t>
+                      </a:r>
+                      <a:endParaRPr sz="1100">
+                        <a:latin typeface="Calibri"/>
+                        <a:ea typeface="Calibri"/>
+                        <a:cs typeface="Calibri"/>
+                        <a:sym typeface="Calibri"/>
+                      </a:endParaRPr>
+                    </a:p>
+                  </a:txBody>
+                  <a:tcPr marT="0" marB="0" marR="25400" marL="25400">
+                    <a:lnL cap="flat" cmpd="sng" w="9525">
+                      <a:solidFill>
+                        <a:srgbClr val="CCCCCC"/>
+                      </a:solidFill>
+                      <a:prstDash val="solid"/>
+                      <a:round/>
+                      <a:headEnd len="sm" w="sm" type="none"/>
+                      <a:tailEnd len="sm" w="sm" type="none"/>
+                    </a:lnL>
+                    <a:lnR cap="flat" cmpd="sng" w="9525">
+                      <a:solidFill>
+                        <a:srgbClr val="CCCCCC"/>
+                      </a:solidFill>
+                      <a:prstDash val="solid"/>
+                      <a:round/>
+                      <a:headEnd len="sm" w="sm" type="none"/>
+                      <a:tailEnd len="sm" w="sm" type="none"/>
+                    </a:lnR>
+                    <a:lnT cap="flat" cmpd="sng" w="9525">
+                      <a:solidFill>
+                        <a:srgbClr val="CCCCCC"/>
+                      </a:solidFill>
+                      <a:prstDash val="solid"/>
+                      <a:round/>
+                      <a:headEnd len="sm" w="sm" type="none"/>
+                      <a:tailEnd len="sm" w="sm" type="none"/>
+                    </a:lnT>
+                    <a:lnB cap="flat" cmpd="sng" w="9525">
+                      <a:solidFill>
+                        <a:srgbClr val="CCCCCC"/>
+                      </a:solidFill>
+                      <a:prstDash val="solid"/>
+                      <a:round/>
+                      <a:headEnd len="sm" w="sm" type="none"/>
+                      <a:tailEnd len="sm" w="sm" type="none"/>
+                    </a:lnB>
+                  </a:tcPr>
+                </a:tc>
+                <a:tc>
+                  <a:txBody>
+                    <a:bodyPr/>
+                    <a:lstStyle/>
+                    <a:p>
+                      <a:pPr indent="0" lvl="0" marL="0" rtl="0" algn="l">
+                        <a:lnSpc>
+                          <a:spcPct val="115000"/>
+                        </a:lnSpc>
+                        <a:spcBef>
+                          <a:spcPts val="0"/>
+                        </a:spcBef>
+                        <a:spcAft>
+                          <a:spcPts val="0"/>
+                        </a:spcAft>
+                        <a:buNone/>
+                      </a:pPr>
+                      <a:r>
+                        <a:rPr lang="en-US" sz="1100">
+                          <a:latin typeface="Calibri"/>
+                          <a:ea typeface="Calibri"/>
+                          <a:cs typeface="Calibri"/>
+                          <a:sym typeface="Calibri"/>
+                        </a:rPr>
+                        <a:t>1. Directivas DDL (CREATE POLICY ON table USING tenant_id).</a:t>
+                      </a:r>
+                      <a:endParaRPr sz="1100">
+                        <a:latin typeface="Calibri"/>
+                        <a:ea typeface="Calibri"/>
+                        <a:cs typeface="Calibri"/>
+                        <a:sym typeface="Calibri"/>
+                      </a:endParaRPr>
+                    </a:p>
+                    <a:p>
+                      <a:pPr indent="0" lvl="0" marL="0" rtl="0" algn="l">
+                        <a:lnSpc>
+                          <a:spcPct val="115000"/>
+                        </a:lnSpc>
+                        <a:spcBef>
+                          <a:spcPts val="0"/>
+                        </a:spcBef>
+                        <a:spcAft>
+                          <a:spcPts val="0"/>
+                        </a:spcAft>
+                        <a:buNone/>
+                      </a:pPr>
+                      <a:r>
+                        <a:rPr lang="en-US" sz="1100">
+                          <a:latin typeface="Calibri"/>
+                          <a:ea typeface="Calibri"/>
+                          <a:cs typeface="Calibri"/>
+                          <a:sym typeface="Calibri"/>
+                        </a:rPr>
+                        <a:t>2. Interceptor NestJS configurando app.current_tenant.</a:t>
+                      </a:r>
+                      <a:endParaRPr sz="1100">
+                        <a:latin typeface="Calibri"/>
+                        <a:ea typeface="Calibri"/>
+                        <a:cs typeface="Calibri"/>
+                        <a:sym typeface="Calibri"/>
+                      </a:endParaRPr>
+                    </a:p>
+                    <a:p>
+                      <a:pPr indent="0" lvl="0" marL="0" rtl="0" algn="l">
+                        <a:lnSpc>
+                          <a:spcPct val="115000"/>
+                        </a:lnSpc>
+                        <a:spcBef>
+                          <a:spcPts val="0"/>
+                        </a:spcBef>
+                        <a:spcAft>
+                          <a:spcPts val="0"/>
+                        </a:spcAft>
+                        <a:buNone/>
+                      </a:pPr>
+                      <a:r>
+                        <a:rPr lang="en-US" sz="1100">
+                          <a:latin typeface="Calibri"/>
+                          <a:ea typeface="Calibri"/>
+                          <a:cs typeface="Calibri"/>
+                          <a:sym typeface="Calibri"/>
+                        </a:rPr>
+                        <a:t>3. Test de inyección retornando 403 Forbidden.</a:t>
+                      </a:r>
+                      <a:endParaRPr sz="1100">
+                        <a:latin typeface="Calibri"/>
+                        <a:ea typeface="Calibri"/>
+                        <a:cs typeface="Calibri"/>
+                        <a:sym typeface="Calibri"/>
+                      </a:endParaRPr>
+                    </a:p>
+                  </a:txBody>
+                  <a:tcPr marT="0" marB="0" marR="25400" marL="25400">
+                    <a:lnL cap="flat" cmpd="sng" w="9525">
+                      <a:solidFill>
+                        <a:srgbClr val="CCCCCC"/>
+                      </a:solidFill>
+                      <a:prstDash val="solid"/>
+                      <a:round/>
+                      <a:headEnd len="sm" w="sm" type="none"/>
+                      <a:tailEnd len="sm" w="sm" type="none"/>
+                    </a:lnL>
+                    <a:lnR cap="flat" cmpd="sng" w="9525">
+                      <a:solidFill>
+                        <a:srgbClr val="CCCCCC"/>
+                      </a:solidFill>
+                      <a:prstDash val="solid"/>
+                      <a:round/>
+                      <a:headEnd len="sm" w="sm" type="none"/>
+                      <a:tailEnd len="sm" w="sm" type="none"/>
+                    </a:lnR>
+                    <a:lnT cap="flat" cmpd="sng" w="9525">
+                      <a:solidFill>
+                        <a:srgbClr val="CCCCCC"/>
+                      </a:solidFill>
+                      <a:prstDash val="solid"/>
+                      <a:round/>
+                      <a:headEnd len="sm" w="sm" type="none"/>
+                      <a:tailEnd len="sm" w="sm" type="none"/>
+                    </a:lnT>
+                    <a:lnB cap="flat" cmpd="sng" w="9525">
+                      <a:solidFill>
+                        <a:srgbClr val="CCCCCC"/>
+                      </a:solidFill>
+                      <a:prstDash val="solid"/>
+                      <a:round/>
+                      <a:headEnd len="sm" w="sm" type="none"/>
+                      <a:tailEnd len="sm" w="sm" type="none"/>
+                    </a:lnB>
+                  </a:tcPr>
+                </a:tc>
+              </a:tr>
+            </a:tbl>
+          </a:graphicData>
+        </a:graphic>
+      </p:graphicFrame>
     </p:spTree>
   </p:cSld>
   <p:clrMapOvr>
